--- a/Project SDC.pptx
+++ b/Project SDC.pptx
@@ -197,6 +197,11 @@
       </a:defRPr>
     </a:lvl9pPr>
   </p:defaultTextStyle>
+  <p:extLst>
+    <p:ext uri="{EFAFB233-063F-42B5-8137-9DF3F51BA10A}">
+      <p15:sldGuideLst xmlns:p15="http://schemas.microsoft.com/office/powerpoint/2012/main"/>
+    </p:ext>
+  </p:extLst>
 </p:presentation>
 </file>
 
@@ -980,6 +985,9 @@
   <p:clrMapOvr>
     <a:masterClrMapping/>
   </p:clrMapOvr>
+  <p:transition spd="med">
+    <p:push dir="u"/>
+  </p:transition>
 </p:sldLayout>
 </file>
 
@@ -1231,6 +1239,9 @@
   <p:clrMapOvr>
     <a:masterClrMapping/>
   </p:clrMapOvr>
+  <p:transition spd="med">
+    <p:push dir="u"/>
+  </p:transition>
 </p:sldLayout>
 </file>
 
@@ -1635,6 +1646,9 @@
   <p:clrMapOvr>
     <a:masterClrMapping/>
   </p:clrMapOvr>
+  <p:transition spd="med">
+    <p:push dir="u"/>
+  </p:transition>
 </p:sldLayout>
 </file>
 
@@ -1886,6 +1900,9 @@
   <p:clrMapOvr>
     <a:masterClrMapping/>
   </p:clrMapOvr>
+  <p:transition spd="med">
+    <p:push dir="u"/>
+  </p:transition>
 </p:sldLayout>
 </file>
 
@@ -2282,6 +2299,9 @@
   <p:clrMapOvr>
     <a:masterClrMapping/>
   </p:clrMapOvr>
+  <p:transition spd="med">
+    <p:push dir="u"/>
+  </p:transition>
 </p:sldLayout>
 </file>
 
@@ -2593,6 +2613,9 @@
   <p:clrMapOvr>
     <a:masterClrMapping/>
   </p:clrMapOvr>
+  <p:transition spd="med">
+    <p:push dir="u"/>
+  </p:transition>
 </p:sldLayout>
 </file>
 
@@ -2763,6 +2786,9 @@
   <p:clrMapOvr>
     <a:masterClrMapping/>
   </p:clrMapOvr>
+  <p:transition spd="med">
+    <p:push dir="u"/>
+  </p:transition>
 </p:sldLayout>
 </file>
 
@@ -2943,6 +2969,9 @@
   <p:clrMapOvr>
     <a:masterClrMapping/>
   </p:clrMapOvr>
+  <p:transition spd="med">
+    <p:push dir="u"/>
+  </p:transition>
 </p:sldLayout>
 </file>
 
@@ -3119,6 +3148,9 @@
   <p:clrMapOvr>
     <a:masterClrMapping/>
   </p:clrMapOvr>
+  <p:transition spd="med">
+    <p:push dir="u"/>
+  </p:transition>
 </p:sldLayout>
 </file>
 
@@ -3366,6 +3398,9 @@
   <p:clrMapOvr>
     <a:masterClrMapping/>
   </p:clrMapOvr>
+  <p:transition spd="med">
+    <p:push dir="u"/>
+  </p:transition>
 </p:sldLayout>
 </file>
 
@@ -3598,6 +3633,9 @@
   <p:clrMapOvr>
     <a:masterClrMapping/>
   </p:clrMapOvr>
+  <p:transition spd="med">
+    <p:push dir="u"/>
+  </p:transition>
 </p:sldLayout>
 </file>
 
@@ -3972,6 +4010,9 @@
   <p:clrMapOvr>
     <a:masterClrMapping/>
   </p:clrMapOvr>
+  <p:transition spd="med">
+    <p:push dir="u"/>
+  </p:transition>
 </p:sldLayout>
 </file>
 
@@ -4095,6 +4136,9 @@
   <p:clrMapOvr>
     <a:masterClrMapping/>
   </p:clrMapOvr>
+  <p:transition spd="med">
+    <p:push dir="u"/>
+  </p:transition>
 </p:sldLayout>
 </file>
 
@@ -4190,6 +4234,9 @@
   <p:clrMapOvr>
     <a:masterClrMapping/>
   </p:clrMapOvr>
+  <p:transition spd="med">
+    <p:push dir="u"/>
+  </p:transition>
 </p:sldLayout>
 </file>
 
@@ -4445,6 +4492,9 @@
   <p:clrMapOvr>
     <a:masterClrMapping/>
   </p:clrMapOvr>
+  <p:transition spd="med">
+    <p:push dir="u"/>
+  </p:transition>
 </p:sldLayout>
 </file>
 
@@ -4708,6 +4758,9 @@
   <p:clrMapOvr>
     <a:masterClrMapping/>
   </p:clrMapOvr>
+  <p:transition spd="med">
+    <p:push dir="u"/>
+  </p:transition>
 </p:sldLayout>
 </file>
 
@@ -5501,6 +5554,9 @@
     <p:sldLayoutId id="2147483687" r:id="rId15"/>
     <p:sldLayoutId id="2147483688" r:id="rId16"/>
   </p:sldLayoutIdLst>
+  <p:transition spd="med">
+    <p:push dir="u"/>
+  </p:transition>
   <p:txStyles>
     <p:titleStyle>
       <a:lvl1pPr algn="l" defTabSz="457200" rtl="0" eaLnBrk="1" latinLnBrk="0" hangingPunct="1">
@@ -5973,6 +6029,42 @@
           </a:p>
         </p:txBody>
       </p:sp>
+      <p:pic>
+        <p:nvPicPr>
+          <p:cNvPr id="5" name="Picture 4">
+            <a:extLst>
+              <a:ext uri="{FF2B5EF4-FFF2-40B4-BE49-F238E27FC236}">
+                <a16:creationId xmlns:a16="http://schemas.microsoft.com/office/drawing/2014/main" id="{B69BA296-6FE7-7E9B-CC6E-07F2B93AAD1B}"/>
+              </a:ext>
+            </a:extLst>
+          </p:cNvPr>
+          <p:cNvPicPr>
+            <a:picLocks noChangeAspect="1"/>
+          </p:cNvPicPr>
+          <p:nvPr/>
+        </p:nvPicPr>
+        <p:blipFill>
+          <a:blip r:embed="rId2">
+            <a:extLst>
+              <a:ext uri="{28A0092B-C50C-407E-A947-70E740481C1C}">
+                <a14:useLocalDpi xmlns:a14="http://schemas.microsoft.com/office/drawing/2010/main" val="0"/>
+              </a:ext>
+            </a:extLst>
+          </a:blip>
+          <a:stretch>
+            <a:fillRect/>
+          </a:stretch>
+        </p:blipFill>
+        <p:spPr>
+          <a:xfrm>
+            <a:off x="7591419" y="1185165"/>
+            <a:ext cx="1682584" cy="1690096"/>
+          </a:xfrm>
+          <a:prstGeom prst="rect">
+            <a:avLst/>
+          </a:prstGeom>
+        </p:spPr>
+      </p:pic>
     </p:spTree>
     <p:extLst>
       <p:ext uri="{BB962C8B-B14F-4D97-AF65-F5344CB8AC3E}">
@@ -5983,6 +6075,9 @@
   <p:clrMapOvr>
     <a:masterClrMapping/>
   </p:clrMapOvr>
+  <p:transition spd="med">
+    <p:push dir="u"/>
+  </p:transition>
 </p:sld>
 </file>
 
@@ -6034,6 +6129,27 @@
               <a:rPr lang="en-US" dirty="0"/>
               <a:t>User Controller</a:t>
             </a:r>
+            <a:br>
+              <a:rPr lang="en-US" dirty="0"/>
+            </a:br>
+            <a:r>
+              <a:rPr kumimoji="0" lang="en-US" sz="2000" b="0" i="0" u="none" strike="noStrike" kern="1200" cap="none" spc="0" normalizeH="0" baseline="0" noProof="0" dirty="0">
+                <a:ln>
+                  <a:noFill/>
+                </a:ln>
+                <a:solidFill>
+                  <a:srgbClr val="90C226"/>
+                </a:solidFill>
+                <a:effectLst/>
+                <a:uLnTx/>
+                <a:uFillTx/>
+                <a:latin typeface="Trebuchet MS" panose="020B0603020202020204"/>
+                <a:ea typeface="+mj-ea"/>
+                <a:cs typeface="+mj-cs"/>
+              </a:rPr>
+              <a:t>collection of 5 end points</a:t>
+            </a:r>
+            <a:endParaRPr lang="en-US" dirty="0"/>
           </a:p>
         </p:txBody>
       </p:sp>
@@ -6109,6 +6225,53 @@
           </a:p>
         </p:txBody>
       </p:sp>
+      <p:pic>
+        <p:nvPicPr>
+          <p:cNvPr id="4098" name="Picture 2" descr="User Icon Vector Art, Icons, and ...">
+            <a:extLst>
+              <a:ext uri="{FF2B5EF4-FFF2-40B4-BE49-F238E27FC236}">
+                <a16:creationId xmlns:a16="http://schemas.microsoft.com/office/drawing/2014/main" id="{8C4AC39E-1BCA-45A8-412C-48142C1124AF}"/>
+              </a:ext>
+            </a:extLst>
+          </p:cNvPr>
+          <p:cNvPicPr>
+            <a:picLocks noChangeAspect="1" noChangeArrowheads="1"/>
+          </p:cNvPicPr>
+          <p:nvPr/>
+        </p:nvPicPr>
+        <p:blipFill>
+          <a:blip r:embed="rId2">
+            <a:extLst>
+              <a:ext uri="{28A0092B-C50C-407E-A947-70E740481C1C}">
+                <a14:useLocalDpi xmlns:a14="http://schemas.microsoft.com/office/drawing/2010/main" val="0"/>
+              </a:ext>
+            </a:extLst>
+          </a:blip>
+          <a:srcRect/>
+          <a:stretch>
+            <a:fillRect/>
+          </a:stretch>
+        </p:blipFill>
+        <p:spPr bwMode="auto">
+          <a:xfrm>
+            <a:off x="7130876" y="238328"/>
+            <a:ext cx="2143125" cy="2143125"/>
+          </a:xfrm>
+          <a:prstGeom prst="rect">
+            <a:avLst/>
+          </a:prstGeom>
+          <a:noFill/>
+          <a:extLst>
+            <a:ext uri="{909E8E84-426E-40DD-AFC4-6F175D3DCCD1}">
+              <a14:hiddenFill xmlns:a14="http://schemas.microsoft.com/office/drawing/2010/main">
+                <a:solidFill>
+                  <a:srgbClr val="FFFFFF"/>
+                </a:solidFill>
+              </a14:hiddenFill>
+            </a:ext>
+          </a:extLst>
+        </p:spPr>
+      </p:pic>
     </p:spTree>
     <p:extLst>
       <p:ext uri="{BB962C8B-B14F-4D97-AF65-F5344CB8AC3E}">
@@ -6119,6 +6282,9 @@
   <p:clrMapOvr>
     <a:masterClrMapping/>
   </p:clrMapOvr>
+  <p:transition spd="med">
+    <p:push dir="u"/>
+  </p:transition>
 </p:sld>
 </file>
 
@@ -6170,27 +6336,40 @@
             <p:ph idx="1"/>
           </p:nvPr>
         </p:nvSpPr>
-        <p:spPr/>
-        <p:txBody>
-          <a:bodyPr/>
-          <a:lstStyle/>
-          <a:p>
-            <a:r>
-              <a:t>Operation ID: getUsers</a:t>
-            </a:r>
-          </a:p>
-          <a:p>
-            <a:r>
+        <p:spPr>
+          <a:xfrm>
+            <a:off x="677334" y="2170317"/>
+            <a:ext cx="8596668" cy="3880773"/>
+          </a:xfrm>
+        </p:spPr>
+        <p:txBody>
+          <a:bodyPr/>
+          <a:lstStyle/>
+          <a:p>
+            <a:r>
+              <a:rPr dirty="0"/>
+              <a:t>Operation ID: </a:t>
+            </a:r>
+            <a:r>
+              <a:rPr dirty="0" err="1"/>
+              <a:t>getUsers</a:t>
+            </a:r>
+            <a:endParaRPr dirty="0"/>
+          </a:p>
+          <a:p>
+            <a:r>
+              <a:rPr dirty="0"/>
               <a:t>Responses:</a:t>
             </a:r>
           </a:p>
           <a:p>
             <a:r>
+              <a:rPr dirty="0"/>
               <a:t>  200: OK</a:t>
             </a:r>
           </a:p>
           <a:p>
-            <a:endParaRPr/>
+            <a:endParaRPr dirty="0"/>
           </a:p>
         </p:txBody>
       </p:sp>
@@ -6204,6 +6383,9 @@
   <p:clrMapOvr>
     <a:masterClrMapping/>
   </p:clrMapOvr>
+  <p:transition spd="med">
+    <p:push dir="u"/>
+  </p:transition>
 </p:sld>
 </file>
 
@@ -6294,6 +6476,9 @@
   <p:clrMapOvr>
     <a:masterClrMapping/>
   </p:clrMapOvr>
+  <p:transition spd="med">
+    <p:push dir="u"/>
+  </p:transition>
 </p:sld>
 </file>
 
@@ -6384,6 +6569,9 @@
   <p:clrMapOvr>
     <a:masterClrMapping/>
   </p:clrMapOvr>
+  <p:transition spd="med">
+    <p:push dir="u"/>
+  </p:transition>
 </p:sld>
 </file>
 
@@ -6479,6 +6667,9 @@
   <p:clrMapOvr>
     <a:masterClrMapping/>
   </p:clrMapOvr>
+  <p:transition spd="med">
+    <p:push dir="u"/>
+  </p:transition>
 </p:sld>
 </file>
 
@@ -6569,6 +6760,9 @@
   <p:clrMapOvr>
     <a:masterClrMapping/>
   </p:clrMapOvr>
+  <p:transition spd="med">
+    <p:push dir="u"/>
+  </p:transition>
 </p:sld>
 </file>
 
@@ -6620,6 +6814,27 @@
               <a:rPr lang="en-US" dirty="0"/>
               <a:t>Event Controller</a:t>
             </a:r>
+            <a:br>
+              <a:rPr lang="en-US" dirty="0"/>
+            </a:br>
+            <a:r>
+              <a:rPr kumimoji="0" lang="en-US" sz="2000" b="0" i="0" u="none" strike="noStrike" kern="1200" cap="none" spc="0" normalizeH="0" baseline="0" noProof="0" dirty="0">
+                <a:ln>
+                  <a:noFill/>
+                </a:ln>
+                <a:solidFill>
+                  <a:srgbClr val="90C226"/>
+                </a:solidFill>
+                <a:effectLst/>
+                <a:uLnTx/>
+                <a:uFillTx/>
+                <a:latin typeface="Trebuchet MS" panose="020B0603020202020204"/>
+                <a:ea typeface="+mj-ea"/>
+                <a:cs typeface="+mj-cs"/>
+              </a:rPr>
+              <a:t>collection of 9 end points</a:t>
+            </a:r>
+            <a:endParaRPr lang="en-US" dirty="0"/>
           </a:p>
         </p:txBody>
       </p:sp>
@@ -6695,6 +6910,51 @@
           </a:p>
         </p:txBody>
       </p:sp>
+      <p:pic>
+        <p:nvPicPr>
+          <p:cNvPr id="5122" name="Picture 2" descr="Events Logo Stock Illustrations – 9,158 ...">
+            <a:extLst>
+              <a:ext uri="{FF2B5EF4-FFF2-40B4-BE49-F238E27FC236}">
+                <a16:creationId xmlns:a16="http://schemas.microsoft.com/office/drawing/2014/main" id="{5F3E682C-4324-8C24-8B20-D42BB90318AE}"/>
+              </a:ext>
+            </a:extLst>
+          </p:cNvPr>
+          <p:cNvPicPr>
+            <a:picLocks noChangeAspect="1" noChangeArrowheads="1"/>
+          </p:cNvPicPr>
+          <p:nvPr/>
+        </p:nvPicPr>
+        <p:blipFill rotWithShape="1">
+          <a:blip r:embed="rId2">
+            <a:extLst>
+              <a:ext uri="{28A0092B-C50C-407E-A947-70E740481C1C}">
+                <a14:useLocalDpi xmlns:a14="http://schemas.microsoft.com/office/drawing/2010/main" val="0"/>
+              </a:ext>
+            </a:extLst>
+          </a:blip>
+          <a:srcRect b="11462"/>
+          <a:stretch/>
+        </p:blipFill>
+        <p:spPr bwMode="auto">
+          <a:xfrm>
+            <a:off x="7197551" y="609600"/>
+            <a:ext cx="2076450" cy="1948078"/>
+          </a:xfrm>
+          <a:prstGeom prst="rect">
+            <a:avLst/>
+          </a:prstGeom>
+          <a:noFill/>
+          <a:extLst>
+            <a:ext uri="{909E8E84-426E-40DD-AFC4-6F175D3DCCD1}">
+              <a14:hiddenFill xmlns:a14="http://schemas.microsoft.com/office/drawing/2010/main">
+                <a:solidFill>
+                  <a:srgbClr val="FFFFFF"/>
+                </a:solidFill>
+              </a14:hiddenFill>
+            </a:ext>
+          </a:extLst>
+        </p:spPr>
+      </p:pic>
     </p:spTree>
     <p:extLst>
       <p:ext uri="{BB962C8B-B14F-4D97-AF65-F5344CB8AC3E}">
@@ -6705,6 +6965,9 @@
   <p:clrMapOvr>
     <a:masterClrMapping/>
   </p:clrMapOvr>
+  <p:transition spd="med">
+    <p:push dir="u"/>
+  </p:transition>
 </p:sld>
 </file>
 
@@ -6795,6 +7058,9 @@
   <p:clrMapOvr>
     <a:masterClrMapping/>
   </p:clrMapOvr>
+  <p:transition spd="med">
+    <p:push dir="u"/>
+  </p:transition>
 </p:sld>
 </file>
 
@@ -6885,6 +7151,9 @@
   <p:clrMapOvr>
     <a:masterClrMapping/>
   </p:clrMapOvr>
+  <p:transition spd="med">
+    <p:push dir="u"/>
+  </p:transition>
 </p:sld>
 </file>
 
@@ -6992,6 +7261,9 @@
   <p:clrMapOvr>
     <a:masterClrMapping/>
   </p:clrMapOvr>
+  <p:transition spd="med">
+    <p:push dir="u"/>
+  </p:transition>
 </p:sld>
 </file>
 
@@ -7106,6 +7378,9 @@
   <p:clrMapOvr>
     <a:masterClrMapping/>
   </p:clrMapOvr>
+  <p:transition spd="med">
+    <p:push dir="u"/>
+  </p:transition>
 </p:sld>
 </file>
 
@@ -7196,6 +7471,9 @@
   <p:clrMapOvr>
     <a:masterClrMapping/>
   </p:clrMapOvr>
+  <p:transition spd="med">
+    <p:push dir="u"/>
+  </p:transition>
 </p:sld>
 </file>
 
@@ -7291,6 +7569,9 @@
   <p:clrMapOvr>
     <a:masterClrMapping/>
   </p:clrMapOvr>
+  <p:transition spd="med">
+    <p:push dir="u"/>
+  </p:transition>
 </p:sld>
 </file>
 
@@ -7381,6 +7662,9 @@
   <p:clrMapOvr>
     <a:masterClrMapping/>
   </p:clrMapOvr>
+  <p:transition spd="med">
+    <p:push dir="u"/>
+  </p:transition>
 </p:sld>
 </file>
 
@@ -7471,6 +7755,9 @@
   <p:clrMapOvr>
     <a:masterClrMapping/>
   </p:clrMapOvr>
+  <p:transition spd="med">
+    <p:push dir="u"/>
+  </p:transition>
 </p:sld>
 </file>
 
@@ -7561,6 +7848,9 @@
   <p:clrMapOvr>
     <a:masterClrMapping/>
   </p:clrMapOvr>
+  <p:transition spd="med">
+    <p:push dir="u"/>
+  </p:transition>
 </p:sld>
 </file>
 
@@ -7651,6 +7941,9 @@
   <p:clrMapOvr>
     <a:masterClrMapping/>
   </p:clrMapOvr>
+  <p:transition spd="med">
+    <p:push dir="u"/>
+  </p:transition>
 </p:sld>
 </file>
 
@@ -7702,6 +7995,27 @@
               <a:rPr lang="en-US" dirty="0"/>
               <a:t>Post Controller</a:t>
             </a:r>
+            <a:br>
+              <a:rPr lang="en-US" dirty="0"/>
+            </a:br>
+            <a:r>
+              <a:rPr kumimoji="0" lang="en-US" sz="2000" b="0" i="0" u="none" strike="noStrike" kern="1200" cap="none" spc="0" normalizeH="0" baseline="0" noProof="0" dirty="0">
+                <a:ln>
+                  <a:noFill/>
+                </a:ln>
+                <a:solidFill>
+                  <a:srgbClr val="90C226"/>
+                </a:solidFill>
+                <a:effectLst/>
+                <a:uLnTx/>
+                <a:uFillTx/>
+                <a:latin typeface="Trebuchet MS" panose="020B0603020202020204"/>
+                <a:ea typeface="+mj-ea"/>
+                <a:cs typeface="+mj-cs"/>
+              </a:rPr>
+              <a:t>collection of 6 end points</a:t>
+            </a:r>
+            <a:endParaRPr lang="en-US" dirty="0"/>
           </a:p>
         </p:txBody>
       </p:sp>
@@ -7777,6 +8091,53 @@
           </a:p>
         </p:txBody>
       </p:sp>
+      <p:pic>
+        <p:nvPicPr>
+          <p:cNvPr id="6146" name="Picture 2" descr="Social media - Free social media icons">
+            <a:extLst>
+              <a:ext uri="{FF2B5EF4-FFF2-40B4-BE49-F238E27FC236}">
+                <a16:creationId xmlns:a16="http://schemas.microsoft.com/office/drawing/2014/main" id="{35ADDE77-5FB7-02FF-23DB-45149B9F645B}"/>
+              </a:ext>
+            </a:extLst>
+          </p:cNvPr>
+          <p:cNvPicPr>
+            <a:picLocks noChangeAspect="1" noChangeArrowheads="1"/>
+          </p:cNvPicPr>
+          <p:nvPr/>
+        </p:nvPicPr>
+        <p:blipFill>
+          <a:blip r:embed="rId2">
+            <a:extLst>
+              <a:ext uri="{28A0092B-C50C-407E-A947-70E740481C1C}">
+                <a14:useLocalDpi xmlns:a14="http://schemas.microsoft.com/office/drawing/2010/main" val="0"/>
+              </a:ext>
+            </a:extLst>
+          </a:blip>
+          <a:srcRect/>
+          <a:stretch>
+            <a:fillRect/>
+          </a:stretch>
+        </p:blipFill>
+        <p:spPr bwMode="auto">
+          <a:xfrm>
+            <a:off x="7250271" y="609600"/>
+            <a:ext cx="1775197" cy="1775197"/>
+          </a:xfrm>
+          <a:prstGeom prst="rect">
+            <a:avLst/>
+          </a:prstGeom>
+          <a:noFill/>
+          <a:extLst>
+            <a:ext uri="{909E8E84-426E-40DD-AFC4-6F175D3DCCD1}">
+              <a14:hiddenFill xmlns:a14="http://schemas.microsoft.com/office/drawing/2010/main">
+                <a:solidFill>
+                  <a:srgbClr val="FFFFFF"/>
+                </a:solidFill>
+              </a14:hiddenFill>
+            </a:ext>
+          </a:extLst>
+        </p:spPr>
+      </p:pic>
     </p:spTree>
     <p:extLst>
       <p:ext uri="{BB962C8B-B14F-4D97-AF65-F5344CB8AC3E}">
@@ -7787,6 +8148,9 @@
   <p:clrMapOvr>
     <a:masterClrMapping/>
   </p:clrMapOvr>
+  <p:transition spd="med">
+    <p:push dir="u"/>
+  </p:transition>
 </p:sld>
 </file>
 
@@ -7877,6 +8241,9 @@
   <p:clrMapOvr>
     <a:masterClrMapping/>
   </p:clrMapOvr>
+  <p:transition spd="med">
+    <p:push dir="u"/>
+  </p:transition>
 </p:sld>
 </file>
 
@@ -7972,6 +8339,9 @@
   <p:clrMapOvr>
     <a:masterClrMapping/>
   </p:clrMapOvr>
+  <p:transition spd="med">
+    <p:push dir="u"/>
+  </p:transition>
 </p:sld>
 </file>
 
@@ -8062,6 +8432,9 @@
   <p:clrMapOvr>
     <a:masterClrMapping/>
   </p:clrMapOvr>
+  <p:transition spd="med">
+    <p:push dir="u"/>
+  </p:transition>
 </p:sld>
 </file>
 
@@ -8176,6 +8549,9 @@
   <p:clrMapOvr>
     <a:masterClrMapping/>
   </p:clrMapOvr>
+  <p:transition spd="med">
+    <p:push dir="u"/>
+  </p:transition>
 </p:sld>
 </file>
 
@@ -8266,6 +8642,9 @@
   <p:clrMapOvr>
     <a:masterClrMapping/>
   </p:clrMapOvr>
+  <p:transition spd="med">
+    <p:push dir="u"/>
+  </p:transition>
 </p:sld>
 </file>
 
@@ -8356,6 +8735,9 @@
   <p:clrMapOvr>
     <a:masterClrMapping/>
   </p:clrMapOvr>
+  <p:transition spd="med">
+    <p:push dir="u"/>
+  </p:transition>
 </p:sld>
 </file>
 
@@ -8446,6 +8828,9 @@
   <p:clrMapOvr>
     <a:masterClrMapping/>
   </p:clrMapOvr>
+  <p:transition spd="med">
+    <p:push dir="u"/>
+  </p:transition>
 </p:sld>
 </file>
 
@@ -8536,6 +8921,9 @@
   <p:clrMapOvr>
     <a:masterClrMapping/>
   </p:clrMapOvr>
+  <p:transition spd="med">
+    <p:push dir="u"/>
+  </p:transition>
 </p:sld>
 </file>
 
@@ -8587,6 +8975,27 @@
               <a:rPr lang="en-US" dirty="0"/>
               <a:t>Comment Controller</a:t>
             </a:r>
+            <a:br>
+              <a:rPr lang="en-US" dirty="0"/>
+            </a:br>
+            <a:r>
+              <a:rPr kumimoji="0" lang="en-US" sz="2000" b="0" i="0" u="none" strike="noStrike" kern="1200" cap="none" spc="0" normalizeH="0" baseline="0" noProof="0" dirty="0">
+                <a:ln>
+                  <a:noFill/>
+                </a:ln>
+                <a:solidFill>
+                  <a:srgbClr val="90C226"/>
+                </a:solidFill>
+                <a:effectLst/>
+                <a:uLnTx/>
+                <a:uFillTx/>
+                <a:latin typeface="Trebuchet MS" panose="020B0603020202020204"/>
+                <a:ea typeface="+mj-ea"/>
+                <a:cs typeface="+mj-cs"/>
+              </a:rPr>
+              <a:t>collection of 6 end points</a:t>
+            </a:r>
+            <a:endParaRPr lang="en-US" dirty="0"/>
           </a:p>
         </p:txBody>
       </p:sp>
@@ -8662,6 +9071,53 @@
           </a:p>
         </p:txBody>
       </p:sp>
+      <p:pic>
+        <p:nvPicPr>
+          <p:cNvPr id="7170" name="Picture 2" descr="Handwritten social media comment icon ...">
+            <a:extLst>
+              <a:ext uri="{FF2B5EF4-FFF2-40B4-BE49-F238E27FC236}">
+                <a16:creationId xmlns:a16="http://schemas.microsoft.com/office/drawing/2014/main" id="{BFD1EE0E-9F04-40AD-C002-33B616EEE5B6}"/>
+              </a:ext>
+            </a:extLst>
+          </p:cNvPr>
+          <p:cNvPicPr>
+            <a:picLocks noChangeAspect="1" noChangeArrowheads="1"/>
+          </p:cNvPicPr>
+          <p:nvPr/>
+        </p:nvPicPr>
+        <p:blipFill>
+          <a:blip r:embed="rId2">
+            <a:extLst>
+              <a:ext uri="{28A0092B-C50C-407E-A947-70E740481C1C}">
+                <a14:useLocalDpi xmlns:a14="http://schemas.microsoft.com/office/drawing/2010/main" val="0"/>
+              </a:ext>
+            </a:extLst>
+          </a:blip>
+          <a:srcRect/>
+          <a:stretch>
+            <a:fillRect/>
+          </a:stretch>
+        </p:blipFill>
+        <p:spPr bwMode="auto">
+          <a:xfrm>
+            <a:off x="6879100" y="506261"/>
+            <a:ext cx="2143125" cy="2143125"/>
+          </a:xfrm>
+          <a:prstGeom prst="rect">
+            <a:avLst/>
+          </a:prstGeom>
+          <a:noFill/>
+          <a:extLst>
+            <a:ext uri="{909E8E84-426E-40DD-AFC4-6F175D3DCCD1}">
+              <a14:hiddenFill xmlns:a14="http://schemas.microsoft.com/office/drawing/2010/main">
+                <a:solidFill>
+                  <a:srgbClr val="FFFFFF"/>
+                </a:solidFill>
+              </a14:hiddenFill>
+            </a:ext>
+          </a:extLst>
+        </p:spPr>
+      </p:pic>
     </p:spTree>
     <p:extLst>
       <p:ext uri="{BB962C8B-B14F-4D97-AF65-F5344CB8AC3E}">
@@ -8672,6 +9128,9 @@
   <p:clrMapOvr>
     <a:masterClrMapping/>
   </p:clrMapOvr>
+  <p:transition spd="med">
+    <p:push dir="u"/>
+  </p:transition>
 </p:sld>
 </file>
 
@@ -8762,6 +9221,9 @@
   <p:clrMapOvr>
     <a:masterClrMapping/>
   </p:clrMapOvr>
+  <p:transition spd="med">
+    <p:push dir="u"/>
+  </p:transition>
 </p:sld>
 </file>
 
@@ -8852,6 +9314,9 @@
   <p:clrMapOvr>
     <a:masterClrMapping/>
   </p:clrMapOvr>
+  <p:transition spd="med">
+    <p:push dir="u"/>
+  </p:transition>
 </p:sld>
 </file>
 
@@ -8942,6 +9407,9 @@
   <p:clrMapOvr>
     <a:masterClrMapping/>
   </p:clrMapOvr>
+  <p:transition spd="med">
+    <p:push dir="u"/>
+  </p:transition>
 </p:sld>
 </file>
 
@@ -9032,6 +9500,9 @@
   <p:clrMapOvr>
     <a:masterClrMapping/>
   </p:clrMapOvr>
+  <p:transition spd="med">
+    <p:push dir="u"/>
+  </p:transition>
 </p:sld>
 </file>
 
@@ -9127,6 +9598,9 @@
   <p:clrMapOvr>
     <a:masterClrMapping/>
   </p:clrMapOvr>
+  <p:transition spd="med">
+    <p:push dir="u"/>
+  </p:transition>
 </p:sld>
 </file>
 
@@ -9285,6 +9759,9 @@
   <p:clrMapOvr>
     <a:masterClrMapping/>
   </p:clrMapOvr>
+  <p:transition spd="med">
+    <p:push dir="u"/>
+  </p:transition>
 </p:sld>
 </file>
 
@@ -9375,6 +9852,9 @@
   <p:clrMapOvr>
     <a:masterClrMapping/>
   </p:clrMapOvr>
+  <p:transition spd="med">
+    <p:push dir="u"/>
+  </p:transition>
 </p:sld>
 </file>
 
@@ -9426,6 +9906,27 @@
               <a:rPr lang="en-US" dirty="0"/>
               <a:t>Product Controller</a:t>
             </a:r>
+            <a:br>
+              <a:rPr lang="en-US" dirty="0"/>
+            </a:br>
+            <a:r>
+              <a:rPr kumimoji="0" lang="en-US" sz="2000" b="0" i="0" u="none" strike="noStrike" kern="1200" cap="none" spc="0" normalizeH="0" baseline="0" noProof="0" dirty="0">
+                <a:ln>
+                  <a:noFill/>
+                </a:ln>
+                <a:solidFill>
+                  <a:srgbClr val="90C226"/>
+                </a:solidFill>
+                <a:effectLst/>
+                <a:uLnTx/>
+                <a:uFillTx/>
+                <a:latin typeface="Trebuchet MS" panose="020B0603020202020204"/>
+                <a:ea typeface="+mj-ea"/>
+                <a:cs typeface="+mj-cs"/>
+              </a:rPr>
+              <a:t>collection of 6 end points</a:t>
+            </a:r>
+            <a:endParaRPr lang="en-US" dirty="0"/>
           </a:p>
         </p:txBody>
       </p:sp>
@@ -9445,7 +9946,12 @@
             <p:ph type="body" sz="quarter" idx="13"/>
           </p:nvPr>
         </p:nvSpPr>
-        <p:spPr/>
+        <p:spPr>
+          <a:xfrm>
+            <a:off x="677332" y="4013200"/>
+            <a:ext cx="8596669" cy="514248"/>
+          </a:xfrm>
+        </p:spPr>
         <p:txBody>
           <a:bodyPr/>
           <a:lstStyle/>
@@ -9501,6 +10007,58 @@
           </a:p>
         </p:txBody>
       </p:sp>
+      <p:pic>
+        <p:nvPicPr>
+          <p:cNvPr id="9224" name="Picture 8" descr="Shop Logo Images – Browse 1,510,983 ...">
+            <a:extLst>
+              <a:ext uri="{FF2B5EF4-FFF2-40B4-BE49-F238E27FC236}">
+                <a16:creationId xmlns:a16="http://schemas.microsoft.com/office/drawing/2014/main" id="{54BF5FB8-49BD-4E55-C1BD-9583B17C5555}"/>
+              </a:ext>
+            </a:extLst>
+          </p:cNvPr>
+          <p:cNvPicPr>
+            <a:picLocks noChangeAspect="1" noChangeArrowheads="1"/>
+          </p:cNvPicPr>
+          <p:nvPr/>
+        </p:nvPicPr>
+        <p:blipFill>
+          <a:blip r:embed="rId2">
+            <a:extLst>
+              <a:ext uri="{28A0092B-C50C-407E-A947-70E740481C1C}">
+                <a14:useLocalDpi xmlns:a14="http://schemas.microsoft.com/office/drawing/2010/main" val="0"/>
+              </a:ext>
+            </a:extLst>
+          </a:blip>
+          <a:srcRect/>
+          <a:stretch>
+            <a:fillRect/>
+          </a:stretch>
+        </p:blipFill>
+        <p:spPr bwMode="auto">
+          <a:xfrm>
+            <a:off x="6406093" y="609600"/>
+            <a:ext cx="2619375" cy="1743075"/>
+          </a:xfrm>
+          <a:prstGeom prst="rect">
+            <a:avLst/>
+          </a:prstGeom>
+          <a:ln>
+            <a:noFill/>
+          </a:ln>
+          <a:effectLst>
+            <a:softEdge rad="112500"/>
+          </a:effectLst>
+          <a:extLst>
+            <a:ext uri="{909E8E84-426E-40DD-AFC4-6F175D3DCCD1}">
+              <a14:hiddenFill xmlns:a14="http://schemas.microsoft.com/office/drawing/2010/main">
+                <a:solidFill>
+                  <a:srgbClr val="FFFFFF"/>
+                </a:solidFill>
+              </a14:hiddenFill>
+            </a:ext>
+          </a:extLst>
+        </p:spPr>
+      </p:pic>
     </p:spTree>
     <p:extLst>
       <p:ext uri="{BB962C8B-B14F-4D97-AF65-F5344CB8AC3E}">
@@ -9511,6 +10069,9 @@
   <p:clrMapOvr>
     <a:masterClrMapping/>
   </p:clrMapOvr>
+  <p:transition spd="med">
+    <p:push dir="u"/>
+  </p:transition>
 </p:sld>
 </file>
 
@@ -9601,6 +10162,9 @@
   <p:clrMapOvr>
     <a:masterClrMapping/>
   </p:clrMapOvr>
+  <p:transition spd="med">
+    <p:push dir="u"/>
+  </p:transition>
 </p:sld>
 </file>
 
@@ -9696,6 +10260,9 @@
   <p:clrMapOvr>
     <a:masterClrMapping/>
   </p:clrMapOvr>
+  <p:transition spd="med">
+    <p:push dir="u"/>
+  </p:transition>
 </p:sld>
 </file>
 
@@ -9786,6 +10353,9 @@
   <p:clrMapOvr>
     <a:masterClrMapping/>
   </p:clrMapOvr>
+  <p:transition spd="med">
+    <p:push dir="u"/>
+  </p:transition>
 </p:sld>
 </file>
 
@@ -9876,6 +10446,9 @@
   <p:clrMapOvr>
     <a:masterClrMapping/>
   </p:clrMapOvr>
+  <p:transition spd="med">
+    <p:push dir="u"/>
+  </p:transition>
 </p:sld>
 </file>
 
@@ -9966,6 +10539,9 @@
   <p:clrMapOvr>
     <a:masterClrMapping/>
   </p:clrMapOvr>
+  <p:transition spd="med">
+    <p:push dir="u"/>
+  </p:transition>
 </p:sld>
 </file>
 
@@ -10056,6 +10632,9 @@
   <p:clrMapOvr>
     <a:masterClrMapping/>
   </p:clrMapOvr>
+  <p:transition spd="med">
+    <p:push dir="u"/>
+  </p:transition>
 </p:sld>
 </file>
 
@@ -10107,6 +10686,27 @@
               <a:rPr lang="en-US" dirty="0"/>
               <a:t>Cart Controller</a:t>
             </a:r>
+            <a:br>
+              <a:rPr lang="en-US" dirty="0"/>
+            </a:br>
+            <a:r>
+              <a:rPr kumimoji="0" lang="en-US" sz="2000" b="0" i="0" u="none" strike="noStrike" kern="1200" cap="none" spc="0" normalizeH="0" baseline="0" noProof="0" dirty="0">
+                <a:ln>
+                  <a:noFill/>
+                </a:ln>
+                <a:solidFill>
+                  <a:srgbClr val="90C226"/>
+                </a:solidFill>
+                <a:effectLst/>
+                <a:uLnTx/>
+                <a:uFillTx/>
+                <a:latin typeface="Trebuchet MS" panose="020B0603020202020204"/>
+                <a:ea typeface="+mj-ea"/>
+                <a:cs typeface="+mj-cs"/>
+              </a:rPr>
+              <a:t>collection of 6 end points</a:t>
+            </a:r>
+            <a:endParaRPr lang="en-US" dirty="0"/>
           </a:p>
         </p:txBody>
       </p:sp>
@@ -10182,6 +10782,51 @@
           </a:p>
         </p:txBody>
       </p:sp>
+      <p:pic>
+        <p:nvPicPr>
+          <p:cNvPr id="8196" name="Picture 4" descr="shop logo Template | PosterMyWall">
+            <a:extLst>
+              <a:ext uri="{FF2B5EF4-FFF2-40B4-BE49-F238E27FC236}">
+                <a16:creationId xmlns:a16="http://schemas.microsoft.com/office/drawing/2014/main" id="{653D74D1-F9C6-ADFD-515F-C0072C94626F}"/>
+              </a:ext>
+            </a:extLst>
+          </p:cNvPr>
+          <p:cNvPicPr>
+            <a:picLocks noChangeAspect="1" noChangeArrowheads="1"/>
+          </p:cNvPicPr>
+          <p:nvPr/>
+        </p:nvPicPr>
+        <p:blipFill rotWithShape="1">
+          <a:blip r:embed="rId2">
+            <a:extLst>
+              <a:ext uri="{28A0092B-C50C-407E-A947-70E740481C1C}">
+                <a14:useLocalDpi xmlns:a14="http://schemas.microsoft.com/office/drawing/2010/main" val="0"/>
+              </a:ext>
+            </a:extLst>
+          </a:blip>
+          <a:srcRect t="9885" b="39796"/>
+          <a:stretch/>
+        </p:blipFill>
+        <p:spPr bwMode="auto">
+          <a:xfrm>
+            <a:off x="6295919" y="1000741"/>
+            <a:ext cx="2978082" cy="1498545"/>
+          </a:xfrm>
+          <a:prstGeom prst="rect">
+            <a:avLst/>
+          </a:prstGeom>
+          <a:noFill/>
+          <a:extLst>
+            <a:ext uri="{909E8E84-426E-40DD-AFC4-6F175D3DCCD1}">
+              <a14:hiddenFill xmlns:a14="http://schemas.microsoft.com/office/drawing/2010/main">
+                <a:solidFill>
+                  <a:srgbClr val="FFFFFF"/>
+                </a:solidFill>
+              </a14:hiddenFill>
+            </a:ext>
+          </a:extLst>
+        </p:spPr>
+      </p:pic>
     </p:spTree>
     <p:extLst>
       <p:ext uri="{BB962C8B-B14F-4D97-AF65-F5344CB8AC3E}">
@@ -10192,6 +10837,9 @@
   <p:clrMapOvr>
     <a:masterClrMapping/>
   </p:clrMapOvr>
+  <p:transition spd="med">
+    <p:push dir="u"/>
+  </p:transition>
 </p:sld>
 </file>
 
@@ -10282,6 +10930,9 @@
   <p:clrMapOvr>
     <a:masterClrMapping/>
   </p:clrMapOvr>
+  <p:transition spd="med">
+    <p:push dir="u"/>
+  </p:transition>
 </p:sld>
 </file>
 
@@ -10356,8 +11007,61 @@
               <a:t>Secured with Spring security</a:t>
             </a:r>
           </a:p>
-        </p:txBody>
-      </p:sp>
+          <a:p>
+            <a:r>
+              <a:rPr lang="en-US" dirty="0"/>
+              <a:t>13 controllers, 75 end points</a:t>
+            </a:r>
+          </a:p>
+        </p:txBody>
+      </p:sp>
+      <p:pic>
+        <p:nvPicPr>
+          <p:cNvPr id="1028" name="Picture 4" descr="JPA &amp; Spring Boot ...">
+            <a:extLst>
+              <a:ext uri="{FF2B5EF4-FFF2-40B4-BE49-F238E27FC236}">
+                <a16:creationId xmlns:a16="http://schemas.microsoft.com/office/drawing/2014/main" id="{27FFAE74-8148-D700-D932-B87AAEEEA2D9}"/>
+              </a:ext>
+            </a:extLst>
+          </p:cNvPr>
+          <p:cNvPicPr>
+            <a:picLocks noChangeAspect="1" noChangeArrowheads="1"/>
+          </p:cNvPicPr>
+          <p:nvPr/>
+        </p:nvPicPr>
+        <p:blipFill>
+          <a:blip r:embed="rId2">
+            <a:extLst>
+              <a:ext uri="{28A0092B-C50C-407E-A947-70E740481C1C}">
+                <a14:useLocalDpi xmlns:a14="http://schemas.microsoft.com/office/drawing/2010/main" val="0"/>
+              </a:ext>
+            </a:extLst>
+          </a:blip>
+          <a:srcRect/>
+          <a:stretch>
+            <a:fillRect/>
+          </a:stretch>
+        </p:blipFill>
+        <p:spPr bwMode="auto">
+          <a:xfrm>
+            <a:off x="677335" y="1470152"/>
+            <a:ext cx="4000500" cy="1143000"/>
+          </a:xfrm>
+          <a:prstGeom prst="rect">
+            <a:avLst/>
+          </a:prstGeom>
+          <a:noFill/>
+          <a:extLst>
+            <a:ext uri="{909E8E84-426E-40DD-AFC4-6F175D3DCCD1}">
+              <a14:hiddenFill xmlns:a14="http://schemas.microsoft.com/office/drawing/2010/main">
+                <a:solidFill>
+                  <a:srgbClr val="FFFFFF"/>
+                </a:solidFill>
+              </a14:hiddenFill>
+            </a:ext>
+          </a:extLst>
+        </p:spPr>
+      </p:pic>
     </p:spTree>
     <p:extLst>
       <p:ext uri="{BB962C8B-B14F-4D97-AF65-F5344CB8AC3E}">
@@ -10368,6 +11072,9 @@
   <p:clrMapOvr>
     <a:masterClrMapping/>
   </p:clrMapOvr>
+  <p:transition spd="med">
+    <p:push dir="u"/>
+  </p:transition>
 </p:sld>
 </file>
 
@@ -10463,6 +11170,9 @@
   <p:clrMapOvr>
     <a:masterClrMapping/>
   </p:clrMapOvr>
+  <p:transition spd="med">
+    <p:push dir="u"/>
+  </p:transition>
 </p:sld>
 </file>
 
@@ -10553,6 +11263,9 @@
   <p:clrMapOvr>
     <a:masterClrMapping/>
   </p:clrMapOvr>
+  <p:transition spd="med">
+    <p:push dir="u"/>
+  </p:transition>
 </p:sld>
 </file>
 
@@ -10643,6 +11356,9 @@
   <p:clrMapOvr>
     <a:masterClrMapping/>
   </p:clrMapOvr>
+  <p:transition spd="med">
+    <p:push dir="u"/>
+  </p:transition>
 </p:sld>
 </file>
 
@@ -10733,6 +11449,9 @@
   <p:clrMapOvr>
     <a:masterClrMapping/>
   </p:clrMapOvr>
+  <p:transition spd="med">
+    <p:push dir="u"/>
+  </p:transition>
 </p:sld>
 </file>
 
@@ -10823,6 +11542,9 @@
   <p:clrMapOvr>
     <a:masterClrMapping/>
   </p:clrMapOvr>
+  <p:transition spd="med">
+    <p:push dir="u"/>
+  </p:transition>
 </p:sld>
 </file>
 
@@ -10874,6 +11596,27 @@
               <a:rPr lang="en-US" dirty="0"/>
               <a:t>Orders Controller</a:t>
             </a:r>
+            <a:br>
+              <a:rPr lang="en-US" dirty="0"/>
+            </a:br>
+            <a:r>
+              <a:rPr kumimoji="0" lang="en-US" sz="2000" b="0" i="0" u="none" strike="noStrike" kern="1200" cap="none" spc="0" normalizeH="0" baseline="0" noProof="0" dirty="0">
+                <a:ln>
+                  <a:noFill/>
+                </a:ln>
+                <a:solidFill>
+                  <a:srgbClr val="90C226"/>
+                </a:solidFill>
+                <a:effectLst/>
+                <a:uLnTx/>
+                <a:uFillTx/>
+                <a:latin typeface="Trebuchet MS" panose="020B0603020202020204"/>
+                <a:ea typeface="+mj-ea"/>
+                <a:cs typeface="+mj-cs"/>
+              </a:rPr>
+              <a:t>collection of 7 end points</a:t>
+            </a:r>
+            <a:endParaRPr lang="en-US" dirty="0"/>
           </a:p>
         </p:txBody>
       </p:sp>
@@ -10949,6 +11692,51 @@
           </a:p>
         </p:txBody>
       </p:sp>
+      <p:pic>
+        <p:nvPicPr>
+          <p:cNvPr id="10242" name="Picture 2" descr="Order sign logo design template Royalty Free Vector Image">
+            <a:extLst>
+              <a:ext uri="{FF2B5EF4-FFF2-40B4-BE49-F238E27FC236}">
+                <a16:creationId xmlns:a16="http://schemas.microsoft.com/office/drawing/2014/main" id="{A85E217B-B750-ACBE-BBA4-FC95A73654E7}"/>
+              </a:ext>
+            </a:extLst>
+          </p:cNvPr>
+          <p:cNvPicPr>
+            <a:picLocks noChangeAspect="1" noChangeArrowheads="1"/>
+          </p:cNvPicPr>
+          <p:nvPr/>
+        </p:nvPicPr>
+        <p:blipFill rotWithShape="1">
+          <a:blip r:embed="rId2">
+            <a:extLst>
+              <a:ext uri="{28A0092B-C50C-407E-A947-70E740481C1C}">
+                <a14:useLocalDpi xmlns:a14="http://schemas.microsoft.com/office/drawing/2010/main" val="0"/>
+              </a:ext>
+            </a:extLst>
+          </a:blip>
+          <a:srcRect t="21943" b="33983"/>
+          <a:stretch/>
+        </p:blipFill>
+        <p:spPr bwMode="auto">
+          <a:xfrm>
+            <a:off x="5716381" y="816638"/>
+            <a:ext cx="3661084" cy="1742676"/>
+          </a:xfrm>
+          <a:prstGeom prst="rect">
+            <a:avLst/>
+          </a:prstGeom>
+          <a:noFill/>
+          <a:extLst>
+            <a:ext uri="{909E8E84-426E-40DD-AFC4-6F175D3DCCD1}">
+              <a14:hiddenFill xmlns:a14="http://schemas.microsoft.com/office/drawing/2010/main">
+                <a:solidFill>
+                  <a:srgbClr val="FFFFFF"/>
+                </a:solidFill>
+              </a14:hiddenFill>
+            </a:ext>
+          </a:extLst>
+        </p:spPr>
+      </p:pic>
     </p:spTree>
     <p:extLst>
       <p:ext uri="{BB962C8B-B14F-4D97-AF65-F5344CB8AC3E}">
@@ -10959,6 +11747,9 @@
   <p:clrMapOvr>
     <a:masterClrMapping/>
   </p:clrMapOvr>
+  <p:transition spd="med">
+    <p:push dir="u"/>
+  </p:transition>
 </p:sld>
 </file>
 
@@ -11049,6 +11840,9 @@
   <p:clrMapOvr>
     <a:masterClrMapping/>
   </p:clrMapOvr>
+  <p:transition spd="med">
+    <p:push dir="u"/>
+  </p:transition>
 </p:sld>
 </file>
 
@@ -11144,6 +11938,9 @@
   <p:clrMapOvr>
     <a:masterClrMapping/>
   </p:clrMapOvr>
+  <p:transition spd="med">
+    <p:push dir="u"/>
+  </p:transition>
 </p:sld>
 </file>
 
@@ -11234,6 +12031,9 @@
   <p:clrMapOvr>
     <a:masterClrMapping/>
   </p:clrMapOvr>
+  <p:transition spd="med">
+    <p:push dir="u"/>
+  </p:transition>
 </p:sld>
 </file>
 
@@ -11324,6 +12124,9 @@
   <p:clrMapOvr>
     <a:masterClrMapping/>
   </p:clrMapOvr>
+  <p:transition spd="med">
+    <p:push dir="u"/>
+  </p:transition>
 </p:sld>
 </file>
 
@@ -11369,6 +12172,13 @@
               <a:rPr lang="en-US" dirty="0"/>
               <a:t>Authentication Controller</a:t>
             </a:r>
+            <a:br>
+              <a:rPr lang="en-US" dirty="0"/>
+            </a:br>
+            <a:r>
+              <a:rPr lang="en-US" sz="2000" dirty="0"/>
+              <a:t>collection of 3 end points</a:t>
+            </a:r>
           </a:p>
         </p:txBody>
       </p:sp>
@@ -11444,6 +12254,53 @@
           </a:p>
         </p:txBody>
       </p:sp>
+      <p:pic>
+        <p:nvPicPr>
+          <p:cNvPr id="2054" name="Picture 6" descr="Authentication icon. Simple element ...">
+            <a:extLst>
+              <a:ext uri="{FF2B5EF4-FFF2-40B4-BE49-F238E27FC236}">
+                <a16:creationId xmlns:a16="http://schemas.microsoft.com/office/drawing/2014/main" id="{9187BBE9-3949-0AC6-62A7-2124FDC21F79}"/>
+              </a:ext>
+            </a:extLst>
+          </p:cNvPr>
+          <p:cNvPicPr>
+            <a:picLocks noChangeAspect="1" noChangeArrowheads="1"/>
+          </p:cNvPicPr>
+          <p:nvPr/>
+        </p:nvPicPr>
+        <p:blipFill>
+          <a:blip r:embed="rId2">
+            <a:extLst>
+              <a:ext uri="{28A0092B-C50C-407E-A947-70E740481C1C}">
+                <a14:useLocalDpi xmlns:a14="http://schemas.microsoft.com/office/drawing/2010/main" val="0"/>
+              </a:ext>
+            </a:extLst>
+          </a:blip>
+          <a:srcRect/>
+          <a:stretch>
+            <a:fillRect/>
+          </a:stretch>
+        </p:blipFill>
+        <p:spPr bwMode="auto">
+          <a:xfrm>
+            <a:off x="7615435" y="840720"/>
+            <a:ext cx="1658566" cy="1658566"/>
+          </a:xfrm>
+          <a:prstGeom prst="rect">
+            <a:avLst/>
+          </a:prstGeom>
+          <a:noFill/>
+          <a:extLst>
+            <a:ext uri="{909E8E84-426E-40DD-AFC4-6F175D3DCCD1}">
+              <a14:hiddenFill xmlns:a14="http://schemas.microsoft.com/office/drawing/2010/main">
+                <a:solidFill>
+                  <a:srgbClr val="FFFFFF"/>
+                </a:solidFill>
+              </a14:hiddenFill>
+            </a:ext>
+          </a:extLst>
+        </p:spPr>
+      </p:pic>
     </p:spTree>
     <p:extLst>
       <p:ext uri="{BB962C8B-B14F-4D97-AF65-F5344CB8AC3E}">
@@ -11454,6 +12311,9 @@
   <p:clrMapOvr>
     <a:masterClrMapping/>
   </p:clrMapOvr>
+  <p:transition spd="med">
+    <p:push dir="u"/>
+  </p:transition>
 </p:sld>
 </file>
 
@@ -11544,6 +12404,9 @@
   <p:clrMapOvr>
     <a:masterClrMapping/>
   </p:clrMapOvr>
+  <p:transition spd="med">
+    <p:push dir="u"/>
+  </p:transition>
 </p:sld>
 </file>
 
@@ -11634,6 +12497,9 @@
   <p:clrMapOvr>
     <a:masterClrMapping/>
   </p:clrMapOvr>
+  <p:transition spd="med">
+    <p:push dir="u"/>
+  </p:transition>
 </p:sld>
 </file>
 
@@ -11724,6 +12590,9 @@
   <p:clrMapOvr>
     <a:masterClrMapping/>
   </p:clrMapOvr>
+  <p:transition spd="med">
+    <p:push dir="u"/>
+  </p:transition>
 </p:sld>
 </file>
 
@@ -11775,6 +12644,27 @@
               <a:rPr lang="en-US" dirty="0"/>
               <a:t>Parcel Controller</a:t>
             </a:r>
+            <a:br>
+              <a:rPr lang="en-US" dirty="0"/>
+            </a:br>
+            <a:r>
+              <a:rPr kumimoji="0" lang="en-US" sz="2000" b="0" i="0" u="none" strike="noStrike" kern="1200" cap="none" spc="0" normalizeH="0" baseline="0" noProof="0" dirty="0">
+                <a:ln>
+                  <a:noFill/>
+                </a:ln>
+                <a:solidFill>
+                  <a:srgbClr val="90C226"/>
+                </a:solidFill>
+                <a:effectLst/>
+                <a:uLnTx/>
+                <a:uFillTx/>
+                <a:latin typeface="Trebuchet MS" panose="020B0603020202020204"/>
+                <a:ea typeface="+mj-ea"/>
+                <a:cs typeface="+mj-cs"/>
+              </a:rPr>
+              <a:t>collection of 9 end points</a:t>
+            </a:r>
+            <a:endParaRPr lang="en-US" dirty="0"/>
           </a:p>
         </p:txBody>
       </p:sp>
@@ -11863,6 +12753,53 @@
           </a:p>
         </p:txBody>
       </p:sp>
+      <p:pic>
+        <p:nvPicPr>
+          <p:cNvPr id="11266" name="Picture 2" descr="Bike Messenger Icon - Free PNG &amp; SVG ...">
+            <a:extLst>
+              <a:ext uri="{FF2B5EF4-FFF2-40B4-BE49-F238E27FC236}">
+                <a16:creationId xmlns:a16="http://schemas.microsoft.com/office/drawing/2014/main" id="{E07020EF-B425-F0D0-2AB7-110E0C56C95B}"/>
+              </a:ext>
+            </a:extLst>
+          </p:cNvPr>
+          <p:cNvPicPr>
+            <a:picLocks noChangeAspect="1" noChangeArrowheads="1"/>
+          </p:cNvPicPr>
+          <p:nvPr/>
+        </p:nvPicPr>
+        <p:blipFill>
+          <a:blip r:embed="rId2">
+            <a:extLst>
+              <a:ext uri="{28A0092B-C50C-407E-A947-70E740481C1C}">
+                <a14:useLocalDpi xmlns:a14="http://schemas.microsoft.com/office/drawing/2010/main" val="0"/>
+              </a:ext>
+            </a:extLst>
+          </a:blip>
+          <a:srcRect/>
+          <a:stretch>
+            <a:fillRect/>
+          </a:stretch>
+        </p:blipFill>
+        <p:spPr bwMode="auto">
+          <a:xfrm>
+            <a:off x="6758291" y="816638"/>
+            <a:ext cx="1905000" cy="1905000"/>
+          </a:xfrm>
+          <a:prstGeom prst="rect">
+            <a:avLst/>
+          </a:prstGeom>
+          <a:noFill/>
+          <a:extLst>
+            <a:ext uri="{909E8E84-426E-40DD-AFC4-6F175D3DCCD1}">
+              <a14:hiddenFill xmlns:a14="http://schemas.microsoft.com/office/drawing/2010/main">
+                <a:solidFill>
+                  <a:srgbClr val="FFFFFF"/>
+                </a:solidFill>
+              </a14:hiddenFill>
+            </a:ext>
+          </a:extLst>
+        </p:spPr>
+      </p:pic>
     </p:spTree>
     <p:extLst>
       <p:ext uri="{BB962C8B-B14F-4D97-AF65-F5344CB8AC3E}">
@@ -11873,6 +12810,9 @@
   <p:clrMapOvr>
     <a:masterClrMapping/>
   </p:clrMapOvr>
+  <p:transition spd="med">
+    <p:push dir="u"/>
+  </p:transition>
 </p:sld>
 </file>
 
@@ -11963,6 +12903,9 @@
   <p:clrMapOvr>
     <a:masterClrMapping/>
   </p:clrMapOvr>
+  <p:transition spd="med">
+    <p:push dir="u"/>
+  </p:transition>
 </p:sld>
 </file>
 
@@ -12058,6 +13001,9 @@
   <p:clrMapOvr>
     <a:masterClrMapping/>
   </p:clrMapOvr>
+  <p:transition spd="med">
+    <p:push dir="u"/>
+  </p:transition>
 </p:sld>
 </file>
 
@@ -12148,6 +13094,9 @@
   <p:clrMapOvr>
     <a:masterClrMapping/>
   </p:clrMapOvr>
+  <p:transition spd="med">
+    <p:push dir="u"/>
+  </p:transition>
 </p:sld>
 </file>
 
@@ -12238,6 +13187,9 @@
   <p:clrMapOvr>
     <a:masterClrMapping/>
   </p:clrMapOvr>
+  <p:transition spd="med">
+    <p:push dir="u"/>
+  </p:transition>
 </p:sld>
 </file>
 
@@ -12328,6 +13280,9 @@
   <p:clrMapOvr>
     <a:masterClrMapping/>
   </p:clrMapOvr>
+  <p:transition spd="med">
+    <p:push dir="u"/>
+  </p:transition>
 </p:sld>
 </file>
 
@@ -12418,6 +13373,9 @@
   <p:clrMapOvr>
     <a:masterClrMapping/>
   </p:clrMapOvr>
+  <p:transition spd="med">
+    <p:push dir="u"/>
+  </p:transition>
 </p:sld>
 </file>
 
@@ -12461,7 +13419,14 @@
           <a:p>
             <a:r>
               <a:rPr lang="en-US" dirty="0"/>
-              <a:t>API Documentation: /auth/signup</a:t>
+              <a:t>API Documentation:</a:t>
+            </a:r>
+            <a:br>
+              <a:rPr lang="en-US" dirty="0"/>
+            </a:br>
+            <a:r>
+              <a:rPr lang="en-US" dirty="0"/>
+              <a:t>/auth/signup</a:t>
             </a:r>
           </a:p>
         </p:txBody>
@@ -12591,6 +13556,9 @@
   <p:clrMapOvr>
     <a:masterClrMapping/>
   </p:clrMapOvr>
+  <p:transition spd="med">
+    <p:push dir="u"/>
+  </p:transition>
 </p:sld>
 </file>
 
@@ -12681,6 +13649,9 @@
   <p:clrMapOvr>
     <a:masterClrMapping/>
   </p:clrMapOvr>
+  <p:transition spd="med">
+    <p:push dir="u"/>
+  </p:transition>
 </p:sld>
 </file>
 
@@ -12771,6 +13742,9 @@
   <p:clrMapOvr>
     <a:masterClrMapping/>
   </p:clrMapOvr>
+  <p:transition spd="med">
+    <p:push dir="u"/>
+  </p:transition>
 </p:sld>
 </file>
 
@@ -12822,6 +13796,27 @@
               <a:rPr lang="en-US" dirty="0"/>
               <a:t>Rating Controller</a:t>
             </a:r>
+            <a:br>
+              <a:rPr lang="en-US" dirty="0"/>
+            </a:br>
+            <a:r>
+              <a:rPr kumimoji="0" lang="en-US" sz="2000" b="0" i="0" u="none" strike="noStrike" kern="1200" cap="none" spc="0" normalizeH="0" baseline="0" noProof="0" dirty="0">
+                <a:ln>
+                  <a:noFill/>
+                </a:ln>
+                <a:solidFill>
+                  <a:srgbClr val="90C226"/>
+                </a:solidFill>
+                <a:effectLst/>
+                <a:uLnTx/>
+                <a:uFillTx/>
+                <a:latin typeface="Trebuchet MS" panose="020B0603020202020204"/>
+                <a:ea typeface="+mj-ea"/>
+                <a:cs typeface="+mj-cs"/>
+              </a:rPr>
+              <a:t>collection of 4 end points</a:t>
+            </a:r>
+            <a:endParaRPr lang="en-US" dirty="0"/>
           </a:p>
         </p:txBody>
       </p:sp>
@@ -12897,6 +13892,53 @@
           </a:p>
         </p:txBody>
       </p:sp>
+      <p:pic>
+        <p:nvPicPr>
+          <p:cNvPr id="12290" name="Picture 2" descr="Rating Logo Images - Free Download on ...">
+            <a:extLst>
+              <a:ext uri="{FF2B5EF4-FFF2-40B4-BE49-F238E27FC236}">
+                <a16:creationId xmlns:a16="http://schemas.microsoft.com/office/drawing/2014/main" id="{AAC93667-8C68-5335-852D-C3176FF52242}"/>
+              </a:ext>
+            </a:extLst>
+          </p:cNvPr>
+          <p:cNvPicPr>
+            <a:picLocks noChangeAspect="1" noChangeArrowheads="1"/>
+          </p:cNvPicPr>
+          <p:nvPr/>
+        </p:nvPicPr>
+        <p:blipFill>
+          <a:blip r:embed="rId2">
+            <a:extLst>
+              <a:ext uri="{28A0092B-C50C-407E-A947-70E740481C1C}">
+                <a14:useLocalDpi xmlns:a14="http://schemas.microsoft.com/office/drawing/2010/main" val="0"/>
+              </a:ext>
+            </a:extLst>
+          </a:blip>
+          <a:srcRect/>
+          <a:stretch>
+            <a:fillRect/>
+          </a:stretch>
+        </p:blipFill>
+        <p:spPr bwMode="auto">
+          <a:xfrm>
+            <a:off x="6654626" y="609600"/>
+            <a:ext cx="2619375" cy="1743075"/>
+          </a:xfrm>
+          <a:prstGeom prst="rect">
+            <a:avLst/>
+          </a:prstGeom>
+          <a:noFill/>
+          <a:extLst>
+            <a:ext uri="{909E8E84-426E-40DD-AFC4-6F175D3DCCD1}">
+              <a14:hiddenFill xmlns:a14="http://schemas.microsoft.com/office/drawing/2010/main">
+                <a:solidFill>
+                  <a:srgbClr val="FFFFFF"/>
+                </a:solidFill>
+              </a14:hiddenFill>
+            </a:ext>
+          </a:extLst>
+        </p:spPr>
+      </p:pic>
     </p:spTree>
     <p:extLst>
       <p:ext uri="{BB962C8B-B14F-4D97-AF65-F5344CB8AC3E}">
@@ -12907,6 +13949,9 @@
   <p:clrMapOvr>
     <a:masterClrMapping/>
   </p:clrMapOvr>
+  <p:transition spd="med">
+    <p:push dir="u"/>
+  </p:transition>
 </p:sld>
 </file>
 
@@ -12997,6 +14042,9 @@
   <p:clrMapOvr>
     <a:masterClrMapping/>
   </p:clrMapOvr>
+  <p:transition spd="med">
+    <p:push dir="u"/>
+  </p:transition>
 </p:sld>
 </file>
 
@@ -13087,6 +14135,9 @@
   <p:clrMapOvr>
     <a:masterClrMapping/>
   </p:clrMapOvr>
+  <p:transition spd="med">
+    <p:push dir="u"/>
+  </p:transition>
 </p:sld>
 </file>
 
@@ -13177,6 +14228,9 @@
   <p:clrMapOvr>
     <a:masterClrMapping/>
   </p:clrMapOvr>
+  <p:transition spd="med">
+    <p:push dir="u"/>
+  </p:transition>
 </p:sld>
 </file>
 
@@ -13267,6 +14321,9 @@
   <p:clrMapOvr>
     <a:masterClrMapping/>
   </p:clrMapOvr>
+  <p:transition spd="med">
+    <p:push dir="u"/>
+  </p:transition>
 </p:sld>
 </file>
 
@@ -13322,6 +14379,27 @@
               <a:rPr lang="en-US" dirty="0"/>
               <a:t> Controller</a:t>
             </a:r>
+            <a:br>
+              <a:rPr lang="en-US" dirty="0"/>
+            </a:br>
+            <a:r>
+              <a:rPr kumimoji="0" lang="en-US" sz="2000" b="0" i="0" u="none" strike="noStrike" kern="1200" cap="none" spc="0" normalizeH="0" baseline="0" noProof="0" dirty="0">
+                <a:ln>
+                  <a:noFill/>
+                </a:ln>
+                <a:solidFill>
+                  <a:srgbClr val="90C226"/>
+                </a:solidFill>
+                <a:effectLst/>
+                <a:uLnTx/>
+                <a:uFillTx/>
+                <a:latin typeface="Trebuchet MS" panose="020B0603020202020204"/>
+                <a:ea typeface="+mj-ea"/>
+                <a:cs typeface="+mj-cs"/>
+              </a:rPr>
+              <a:t>collection of 6 end points</a:t>
+            </a:r>
+            <a:endParaRPr lang="en-US" dirty="0"/>
           </a:p>
         </p:txBody>
       </p:sp>
@@ -13410,6 +14488,53 @@
           </a:p>
         </p:txBody>
       </p:sp>
+      <p:pic>
+        <p:nvPicPr>
+          <p:cNvPr id="13314" name="Picture 2" descr="message icon logo, vector design ...">
+            <a:extLst>
+              <a:ext uri="{FF2B5EF4-FFF2-40B4-BE49-F238E27FC236}">
+                <a16:creationId xmlns:a16="http://schemas.microsoft.com/office/drawing/2014/main" id="{868B9CA6-6EF0-0AFF-BFA4-A611E961F520}"/>
+              </a:ext>
+            </a:extLst>
+          </p:cNvPr>
+          <p:cNvPicPr>
+            <a:picLocks noChangeAspect="1" noChangeArrowheads="1"/>
+          </p:cNvPicPr>
+          <p:nvPr/>
+        </p:nvPicPr>
+        <p:blipFill>
+          <a:blip r:embed="rId2">
+            <a:extLst>
+              <a:ext uri="{28A0092B-C50C-407E-A947-70E740481C1C}">
+                <a14:useLocalDpi xmlns:a14="http://schemas.microsoft.com/office/drawing/2010/main" val="0"/>
+              </a:ext>
+            </a:extLst>
+          </a:blip>
+          <a:srcRect/>
+          <a:stretch>
+            <a:fillRect/>
+          </a:stretch>
+        </p:blipFill>
+        <p:spPr bwMode="auto">
+          <a:xfrm>
+            <a:off x="6882343" y="816638"/>
+            <a:ext cx="2143125" cy="2143125"/>
+          </a:xfrm>
+          <a:prstGeom prst="rect">
+            <a:avLst/>
+          </a:prstGeom>
+          <a:noFill/>
+          <a:extLst>
+            <a:ext uri="{909E8E84-426E-40DD-AFC4-6F175D3DCCD1}">
+              <a14:hiddenFill xmlns:a14="http://schemas.microsoft.com/office/drawing/2010/main">
+                <a:solidFill>
+                  <a:srgbClr val="FFFFFF"/>
+                </a:solidFill>
+              </a14:hiddenFill>
+            </a:ext>
+          </a:extLst>
+        </p:spPr>
+      </p:pic>
     </p:spTree>
     <p:extLst>
       <p:ext uri="{BB962C8B-B14F-4D97-AF65-F5344CB8AC3E}">
@@ -13420,6 +14545,9 @@
   <p:clrMapOvr>
     <a:masterClrMapping/>
   </p:clrMapOvr>
+  <p:transition spd="med">
+    <p:push dir="u"/>
+  </p:transition>
 </p:sld>
 </file>
 
@@ -13510,6 +14638,9 @@
   <p:clrMapOvr>
     <a:masterClrMapping/>
   </p:clrMapOvr>
+  <p:transition spd="med">
+    <p:push dir="u"/>
+  </p:transition>
 </p:sld>
 </file>
 
@@ -13605,6 +14736,9 @@
   <p:clrMapOvr>
     <a:masterClrMapping/>
   </p:clrMapOvr>
+  <p:transition spd="med">
+    <p:push dir="u"/>
+  </p:transition>
 </p:sld>
 </file>
 
@@ -13781,6 +14915,9 @@
   <p:clrMapOvr>
     <a:masterClrMapping/>
   </p:clrMapOvr>
+  <p:transition spd="med">
+    <p:push dir="u"/>
+  </p:transition>
 </p:sld>
 </file>
 
@@ -13871,6 +15008,9 @@
   <p:clrMapOvr>
     <a:masterClrMapping/>
   </p:clrMapOvr>
+  <p:transition spd="med">
+    <p:push dir="u"/>
+  </p:transition>
 </p:sld>
 </file>
 
@@ -13961,6 +15101,9 @@
   <p:clrMapOvr>
     <a:masterClrMapping/>
   </p:clrMapOvr>
+  <p:transition spd="med">
+    <p:push dir="u"/>
+  </p:transition>
 </p:sld>
 </file>
 
@@ -14051,6 +15194,9 @@
   <p:clrMapOvr>
     <a:masterClrMapping/>
   </p:clrMapOvr>
+  <p:transition spd="med">
+    <p:push dir="u"/>
+  </p:transition>
 </p:sld>
 </file>
 
@@ -14143,6 +15289,9 @@
   <p:clrMapOvr>
     <a:masterClrMapping/>
   </p:clrMapOvr>
+  <p:transition spd="med">
+    <p:push dir="u"/>
+  </p:transition>
 </p:sld>
 </file>
 
@@ -14194,6 +15343,27 @@
               <a:rPr lang="en-US" dirty="0"/>
               <a:t>Bugs Controller</a:t>
             </a:r>
+            <a:br>
+              <a:rPr lang="en-US" dirty="0"/>
+            </a:br>
+            <a:r>
+              <a:rPr kumimoji="0" lang="en-US" sz="2000" b="0" i="0" u="none" strike="noStrike" kern="1200" cap="none" spc="0" normalizeH="0" baseline="0" noProof="0" dirty="0">
+                <a:ln>
+                  <a:noFill/>
+                </a:ln>
+                <a:solidFill>
+                  <a:srgbClr val="90C226"/>
+                </a:solidFill>
+                <a:effectLst/>
+                <a:uLnTx/>
+                <a:uFillTx/>
+                <a:latin typeface="Trebuchet MS" panose="020B0603020202020204"/>
+                <a:ea typeface="+mj-ea"/>
+                <a:cs typeface="+mj-cs"/>
+              </a:rPr>
+              <a:t>collection of 4 end points</a:t>
+            </a:r>
+            <a:endParaRPr lang="en-US" dirty="0"/>
           </a:p>
         </p:txBody>
       </p:sp>
@@ -14269,6 +15439,53 @@
           </a:p>
         </p:txBody>
       </p:sp>
+      <p:pic>
+        <p:nvPicPr>
+          <p:cNvPr id="14338" name="Picture 2" descr="Bug Logo Images – Browse 112,905 Stock ...">
+            <a:extLst>
+              <a:ext uri="{FF2B5EF4-FFF2-40B4-BE49-F238E27FC236}">
+                <a16:creationId xmlns:a16="http://schemas.microsoft.com/office/drawing/2014/main" id="{FD0A440A-4EE6-56E9-80FB-3B7016D49D17}"/>
+              </a:ext>
+            </a:extLst>
+          </p:cNvPr>
+          <p:cNvPicPr>
+            <a:picLocks noChangeAspect="1" noChangeArrowheads="1"/>
+          </p:cNvPicPr>
+          <p:nvPr/>
+        </p:nvPicPr>
+        <p:blipFill>
+          <a:blip r:embed="rId2">
+            <a:extLst>
+              <a:ext uri="{28A0092B-C50C-407E-A947-70E740481C1C}">
+                <a14:useLocalDpi xmlns:a14="http://schemas.microsoft.com/office/drawing/2010/main" val="0"/>
+              </a:ext>
+            </a:extLst>
+          </a:blip>
+          <a:srcRect/>
+          <a:stretch>
+            <a:fillRect/>
+          </a:stretch>
+        </p:blipFill>
+        <p:spPr bwMode="auto">
+          <a:xfrm>
+            <a:off x="6541953" y="541389"/>
+            <a:ext cx="2143125" cy="2143125"/>
+          </a:xfrm>
+          <a:prstGeom prst="rect">
+            <a:avLst/>
+          </a:prstGeom>
+          <a:noFill/>
+          <a:extLst>
+            <a:ext uri="{909E8E84-426E-40DD-AFC4-6F175D3DCCD1}">
+              <a14:hiddenFill xmlns:a14="http://schemas.microsoft.com/office/drawing/2010/main">
+                <a:solidFill>
+                  <a:srgbClr val="FFFFFF"/>
+                </a:solidFill>
+              </a14:hiddenFill>
+            </a:ext>
+          </a:extLst>
+        </p:spPr>
+      </p:pic>
     </p:spTree>
     <p:extLst>
       <p:ext uri="{BB962C8B-B14F-4D97-AF65-F5344CB8AC3E}">
@@ -14279,6 +15496,9 @@
   <p:clrMapOvr>
     <a:masterClrMapping/>
   </p:clrMapOvr>
+  <p:transition spd="med">
+    <p:push dir="u"/>
+  </p:transition>
 </p:sld>
 </file>
 
@@ -14369,6 +15589,9 @@
   <p:clrMapOvr>
     <a:masterClrMapping/>
   </p:clrMapOvr>
+  <p:transition spd="med">
+    <p:push dir="u"/>
+  </p:transition>
 </p:sld>
 </file>
 
@@ -14464,6 +15687,9 @@
   <p:clrMapOvr>
     <a:masterClrMapping/>
   </p:clrMapOvr>
+  <p:transition spd="med">
+    <p:push dir="u"/>
+  </p:transition>
 </p:sld>
 </file>
 
@@ -14554,6 +15780,9 @@
   <p:clrMapOvr>
     <a:masterClrMapping/>
   </p:clrMapOvr>
+  <p:transition spd="med">
+    <p:push dir="u"/>
+  </p:transition>
 </p:sld>
 </file>
 
@@ -14644,6 +15873,9 @@
   <p:clrMapOvr>
     <a:masterClrMapping/>
   </p:clrMapOvr>
+  <p:transition spd="med">
+    <p:push dir="u"/>
+  </p:transition>
 </p:sld>
 </file>
 
@@ -14734,6 +15966,9 @@
   <p:clrMapOvr>
     <a:masterClrMapping/>
   </p:clrMapOvr>
+  <p:transition spd="med">
+    <p:push dir="u"/>
+  </p:transition>
 </p:sld>
 </file>
 
@@ -14921,6 +16156,9 @@
   <p:clrMapOvr>
     <a:masterClrMapping/>
   </p:clrMapOvr>
+  <p:transition spd="med">
+    <p:push dir="u"/>
+  </p:transition>
 </p:sld>
 </file>
 
@@ -14972,6 +16210,27 @@
               <a:rPr lang="en-US" dirty="0"/>
               <a:t>Role Controller</a:t>
             </a:r>
+            <a:br>
+              <a:rPr lang="en-US" dirty="0"/>
+            </a:br>
+            <a:r>
+              <a:rPr kumimoji="0" lang="en-US" sz="2000" b="0" i="0" u="none" strike="noStrike" kern="1200" cap="none" spc="0" normalizeH="0" baseline="0" noProof="0" dirty="0">
+                <a:ln>
+                  <a:noFill/>
+                </a:ln>
+                <a:solidFill>
+                  <a:srgbClr val="90C226"/>
+                </a:solidFill>
+                <a:effectLst/>
+                <a:uLnTx/>
+                <a:uFillTx/>
+                <a:latin typeface="Trebuchet MS" panose="020B0603020202020204"/>
+                <a:ea typeface="+mj-ea"/>
+                <a:cs typeface="+mj-cs"/>
+              </a:rPr>
+              <a:t>collection of 4 end points</a:t>
+            </a:r>
+            <a:endParaRPr lang="en-US" dirty="0"/>
           </a:p>
         </p:txBody>
       </p:sp>
@@ -15047,6 +16306,53 @@
           </a:p>
         </p:txBody>
       </p:sp>
+      <p:pic>
+        <p:nvPicPr>
+          <p:cNvPr id="15362" name="Picture 2" descr="Role - Free user icons">
+            <a:extLst>
+              <a:ext uri="{FF2B5EF4-FFF2-40B4-BE49-F238E27FC236}">
+                <a16:creationId xmlns:a16="http://schemas.microsoft.com/office/drawing/2014/main" id="{040D4FD2-48D0-D968-4787-63C898E0F777}"/>
+              </a:ext>
+            </a:extLst>
+          </p:cNvPr>
+          <p:cNvPicPr>
+            <a:picLocks noChangeAspect="1" noChangeArrowheads="1"/>
+          </p:cNvPicPr>
+          <p:nvPr/>
+        </p:nvPicPr>
+        <p:blipFill>
+          <a:blip r:embed="rId2">
+            <a:extLst>
+              <a:ext uri="{28A0092B-C50C-407E-A947-70E740481C1C}">
+                <a14:useLocalDpi xmlns:a14="http://schemas.microsoft.com/office/drawing/2010/main" val="0"/>
+              </a:ext>
+            </a:extLst>
+          </a:blip>
+          <a:srcRect/>
+          <a:stretch>
+            <a:fillRect/>
+          </a:stretch>
+        </p:blipFill>
+        <p:spPr bwMode="auto">
+          <a:xfrm>
+            <a:off x="6658685" y="356161"/>
+            <a:ext cx="2143125" cy="2143125"/>
+          </a:xfrm>
+          <a:prstGeom prst="rect">
+            <a:avLst/>
+          </a:prstGeom>
+          <a:noFill/>
+          <a:extLst>
+            <a:ext uri="{909E8E84-426E-40DD-AFC4-6F175D3DCCD1}">
+              <a14:hiddenFill xmlns:a14="http://schemas.microsoft.com/office/drawing/2010/main">
+                <a:solidFill>
+                  <a:srgbClr val="FFFFFF"/>
+                </a:solidFill>
+              </a14:hiddenFill>
+            </a:ext>
+          </a:extLst>
+        </p:spPr>
+      </p:pic>
     </p:spTree>
     <p:extLst>
       <p:ext uri="{BB962C8B-B14F-4D97-AF65-F5344CB8AC3E}">
@@ -15057,6 +16363,9 @@
   <p:clrMapOvr>
     <a:masterClrMapping/>
   </p:clrMapOvr>
+  <p:transition spd="med">
+    <p:push dir="u"/>
+  </p:transition>
 </p:sld>
 </file>
 
@@ -15147,6 +16456,9 @@
   <p:clrMapOvr>
     <a:masterClrMapping/>
   </p:clrMapOvr>
+  <p:transition spd="med">
+    <p:push dir="u"/>
+  </p:transition>
 </p:sld>
 </file>
 
@@ -15237,6 +16549,9 @@
   <p:clrMapOvr>
     <a:masterClrMapping/>
   </p:clrMapOvr>
+  <p:transition spd="med">
+    <p:push dir="u"/>
+  </p:transition>
 </p:sld>
 </file>
 
@@ -15327,6 +16642,9 @@
   <p:clrMapOvr>
     <a:masterClrMapping/>
   </p:clrMapOvr>
+  <p:transition spd="med">
+    <p:push dir="u"/>
+  </p:transition>
 </p:sld>
 </file>
 
@@ -15417,6 +16735,9 @@
   <p:clrMapOvr>
     <a:masterClrMapping/>
   </p:clrMapOvr>
+  <p:transition spd="med">
+    <p:push dir="u"/>
+  </p:transition>
 </p:sld>
 </file>
 

--- a/Project SDC.pptx
+++ b/Project SDC.pptx
@@ -6321,7 +6321,43 @@
           <a:lstStyle/>
           <a:p>
             <a:r>
-              <a:t>GET /user</a:t>
+              <a:rPr lang="en-US" dirty="0"/>
+              <a:t>GET </a:t>
+            </a:r>
+            <a:br>
+              <a:rPr lang="en-US" dirty="0"/>
+            </a:br>
+            <a:r>
+              <a:rPr lang="en-US" dirty="0"/>
+              <a:t>/user</a:t>
+            </a:r>
+          </a:p>
+        </p:txBody>
+      </p:sp>
+      <p:sp>
+        <p:nvSpPr>
+          <p:cNvPr id="4" name="Text Placeholder 3">
+            <a:extLst>
+              <a:ext uri="{FF2B5EF4-FFF2-40B4-BE49-F238E27FC236}">
+                <a16:creationId xmlns:a16="http://schemas.microsoft.com/office/drawing/2014/main" id="{92DAF14E-A79F-B9C0-CF39-CBE2183271D5}"/>
+              </a:ext>
+            </a:extLst>
+          </p:cNvPr>
+          <p:cNvSpPr>
+            <a:spLocks noGrp="1"/>
+          </p:cNvSpPr>
+          <p:nvPr>
+            <p:ph type="body" idx="1"/>
+          </p:nvPr>
+        </p:nvSpPr>
+        <p:spPr/>
+        <p:txBody>
+          <a:bodyPr/>
+          <a:lstStyle/>
+          <a:p>
+            <a:r>
+              <a:rPr lang="en-US" dirty="0"/>
+              <a:t>Details</a:t>
             </a:r>
           </a:p>
         </p:txBody>
@@ -6333,43 +6369,156 @@
             <a:spLocks noGrp="1"/>
           </p:cNvSpPr>
           <p:nvPr>
-            <p:ph idx="1"/>
-          </p:nvPr>
-        </p:nvSpPr>
-        <p:spPr>
-          <a:xfrm>
-            <a:off x="677334" y="2170317"/>
-            <a:ext cx="8596668" cy="3880773"/>
-          </a:xfrm>
-        </p:spPr>
-        <p:txBody>
-          <a:bodyPr/>
-          <a:lstStyle/>
-          <a:p>
-            <a:r>
-              <a:rPr dirty="0"/>
+            <p:ph sz="half" idx="2"/>
+          </p:nvPr>
+        </p:nvSpPr>
+        <p:spPr/>
+        <p:txBody>
+          <a:bodyPr/>
+          <a:lstStyle/>
+          <a:p>
+            <a:r>
+              <a:rPr lang="en-US" dirty="0"/>
               <a:t>Operation ID: </a:t>
             </a:r>
             <a:r>
-              <a:rPr dirty="0" err="1"/>
+              <a:rPr lang="en-US" dirty="0" err="1"/>
               <a:t>getUsers</a:t>
             </a:r>
+            <a:endParaRPr lang="en-US" dirty="0"/>
+          </a:p>
+          <a:p>
+            <a:r>
+              <a:rPr lang="en-US" dirty="0"/>
+              <a:t>Responses:</a:t>
+            </a:r>
+          </a:p>
+          <a:p>
+            <a:r>
+              <a:rPr lang="en-US" dirty="0"/>
+              <a:t>  200: OK</a:t>
+            </a:r>
+          </a:p>
+          <a:p>
             <a:endParaRPr dirty="0"/>
           </a:p>
-          <a:p>
-            <a:r>
-              <a:rPr dirty="0"/>
-              <a:t>Responses:</a:t>
-            </a:r>
-          </a:p>
-          <a:p>
-            <a:r>
-              <a:rPr dirty="0"/>
-              <a:t>  200: OK</a:t>
-            </a:r>
-          </a:p>
-          <a:p>
-            <a:endParaRPr dirty="0"/>
+        </p:txBody>
+      </p:sp>
+      <p:sp>
+        <p:nvSpPr>
+          <p:cNvPr id="5" name="Text Placeholder 4">
+            <a:extLst>
+              <a:ext uri="{FF2B5EF4-FFF2-40B4-BE49-F238E27FC236}">
+                <a16:creationId xmlns:a16="http://schemas.microsoft.com/office/drawing/2014/main" id="{8A7E0A76-12B9-97A6-02EA-6B8327BBEA8F}"/>
+              </a:ext>
+            </a:extLst>
+          </p:cNvPr>
+          <p:cNvSpPr>
+            <a:spLocks noGrp="1"/>
+          </p:cNvSpPr>
+          <p:nvPr>
+            <p:ph type="body" sz="quarter" idx="3"/>
+          </p:nvPr>
+        </p:nvSpPr>
+        <p:spPr/>
+        <p:txBody>
+          <a:bodyPr/>
+          <a:lstStyle/>
+          <a:p>
+            <a:r>
+              <a:rPr lang="en-US" dirty="0" err="1"/>
+              <a:t>Respons</a:t>
+            </a:r>
+            <a:r>
+              <a:rPr lang="en-US" dirty="0"/>
+              <a:t>: user[]</a:t>
+            </a:r>
+          </a:p>
+        </p:txBody>
+      </p:sp>
+      <p:sp>
+        <p:nvSpPr>
+          <p:cNvPr id="6" name="Content Placeholder 5">
+            <a:extLst>
+              <a:ext uri="{FF2B5EF4-FFF2-40B4-BE49-F238E27FC236}">
+                <a16:creationId xmlns:a16="http://schemas.microsoft.com/office/drawing/2014/main" id="{F4F93A07-DE99-53CA-77AB-7E8E5677D6CE}"/>
+              </a:ext>
+            </a:extLst>
+          </p:cNvPr>
+          <p:cNvSpPr>
+            <a:spLocks noGrp="1"/>
+          </p:cNvSpPr>
+          <p:nvPr>
+            <p:ph sz="quarter" idx="4"/>
+          </p:nvPr>
+        </p:nvSpPr>
+        <p:spPr/>
+        <p:txBody>
+          <a:bodyPr/>
+          <a:lstStyle/>
+          <a:p>
+            <a:r>
+              <a:rPr lang="en-US" dirty="0"/>
+              <a:t>{ </a:t>
+            </a:r>
+          </a:p>
+          <a:p>
+            <a:r>
+              <a:rPr lang="en-US" dirty="0"/>
+              <a:t>"id": 1,</a:t>
+            </a:r>
+          </a:p>
+          <a:p>
+            <a:r>
+              <a:rPr lang="en-US" dirty="0"/>
+              <a:t> "</a:t>
+            </a:r>
+            <a:r>
+              <a:rPr lang="en-US" dirty="0" err="1"/>
+              <a:t>fullName</a:t>
+            </a:r>
+            <a:r>
+              <a:rPr lang="en-US" dirty="0"/>
+              <a:t>": "John Doe",</a:t>
+            </a:r>
+          </a:p>
+          <a:p>
+            <a:r>
+              <a:rPr lang="en-US" dirty="0"/>
+              <a:t> "username": "</a:t>
+            </a:r>
+            <a:r>
+              <a:rPr lang="en-US" dirty="0" err="1"/>
+              <a:t>johndoe</a:t>
+            </a:r>
+            <a:r>
+              <a:rPr lang="en-US" dirty="0"/>
+              <a:t>",</a:t>
+            </a:r>
+          </a:p>
+          <a:p>
+            <a:r>
+              <a:rPr lang="en-US" dirty="0"/>
+              <a:t> "email": "john@example.com",</a:t>
+            </a:r>
+          </a:p>
+          <a:p>
+            <a:r>
+              <a:rPr lang="en-US" dirty="0"/>
+              <a:t> "gender": "MALE",</a:t>
+            </a:r>
+          </a:p>
+          <a:p>
+            <a:r>
+              <a:rPr lang="en-US" dirty="0"/>
+              <a:t> "dob": "1990-05-15“</a:t>
+            </a:r>
+          </a:p>
+          <a:p>
+            <a:r>
+              <a:rPr lang="en-US" dirty="0"/>
+              <a:t> }</a:t>
+            </a:r>
           </a:p>
         </p:txBody>
       </p:sp>
@@ -6429,40 +6578,199 @@
       </p:sp>
       <p:sp>
         <p:nvSpPr>
+          <p:cNvPr id="4" name="Text Placeholder 3">
+            <a:extLst>
+              <a:ext uri="{FF2B5EF4-FFF2-40B4-BE49-F238E27FC236}">
+                <a16:creationId xmlns:a16="http://schemas.microsoft.com/office/drawing/2014/main" id="{EE95F499-36EF-909F-3413-D32D94C332B5}"/>
+              </a:ext>
+            </a:extLst>
+          </p:cNvPr>
+          <p:cNvSpPr>
+            <a:spLocks noGrp="1"/>
+          </p:cNvSpPr>
+          <p:nvPr>
+            <p:ph type="body" idx="1"/>
+          </p:nvPr>
+        </p:nvSpPr>
+        <p:spPr/>
+        <p:txBody>
+          <a:bodyPr/>
+          <a:lstStyle/>
+          <a:p>
+            <a:r>
+              <a:rPr lang="en-US" dirty="0"/>
+              <a:t>Details</a:t>
+            </a:r>
+          </a:p>
+        </p:txBody>
+      </p:sp>
+      <p:sp>
+        <p:nvSpPr>
           <p:cNvPr id="3" name="Content Placeholder 2"/>
           <p:cNvSpPr>
             <a:spLocks noGrp="1"/>
           </p:cNvSpPr>
           <p:nvPr>
-            <p:ph idx="1"/>
-          </p:nvPr>
-        </p:nvSpPr>
-        <p:spPr/>
-        <p:txBody>
-          <a:bodyPr/>
-          <a:lstStyle/>
-          <a:p>
-            <a:r>
-              <a:t>Operation ID: createUser</a:t>
-            </a:r>
-          </a:p>
-          <a:p>
-            <a:r>
-              <a:t>Request Body: {'application/json': {'schema': {'$ref': '#/components/schemas/User'}}}</a:t>
-            </a:r>
-          </a:p>
-          <a:p>
-            <a:r>
+            <p:ph sz="half" idx="2"/>
+          </p:nvPr>
+        </p:nvSpPr>
+        <p:spPr/>
+        <p:txBody>
+          <a:bodyPr/>
+          <a:lstStyle/>
+          <a:p>
+            <a:r>
+              <a:rPr dirty="0"/>
+              <a:t>Operation ID: </a:t>
+            </a:r>
+            <a:r>
+              <a:rPr dirty="0" err="1"/>
+              <a:t>createUser</a:t>
+            </a:r>
+            <a:endParaRPr dirty="0"/>
+          </a:p>
+          <a:p>
+            <a:r>
+              <a:rPr dirty="0"/>
+              <a:t>Request Body: </a:t>
+            </a:r>
+            <a:r>
+              <a:rPr lang="en-US" dirty="0"/>
+              <a:t>user</a:t>
+            </a:r>
+            <a:endParaRPr dirty="0"/>
+          </a:p>
+          <a:p>
+            <a:r>
+              <a:rPr dirty="0"/>
               <a:t>Responses:</a:t>
             </a:r>
           </a:p>
           <a:p>
             <a:r>
+              <a:rPr dirty="0"/>
               <a:t>  200: OK</a:t>
             </a:r>
           </a:p>
           <a:p>
-            <a:endParaRPr/>
+            <a:endParaRPr dirty="0"/>
+          </a:p>
+        </p:txBody>
+      </p:sp>
+      <p:sp>
+        <p:nvSpPr>
+          <p:cNvPr id="5" name="Text Placeholder 4">
+            <a:extLst>
+              <a:ext uri="{FF2B5EF4-FFF2-40B4-BE49-F238E27FC236}">
+                <a16:creationId xmlns:a16="http://schemas.microsoft.com/office/drawing/2014/main" id="{5008020E-24FC-4743-A7B2-579F612D8442}"/>
+              </a:ext>
+            </a:extLst>
+          </p:cNvPr>
+          <p:cNvSpPr>
+            <a:spLocks noGrp="1"/>
+          </p:cNvSpPr>
+          <p:nvPr>
+            <p:ph type="body" sz="quarter" idx="3"/>
+          </p:nvPr>
+        </p:nvSpPr>
+        <p:spPr/>
+        <p:txBody>
+          <a:bodyPr/>
+          <a:lstStyle/>
+          <a:p>
+            <a:r>
+              <a:rPr lang="en-US" dirty="0"/>
+              <a:t>Request body: user</a:t>
+            </a:r>
+          </a:p>
+        </p:txBody>
+      </p:sp>
+      <p:sp>
+        <p:nvSpPr>
+          <p:cNvPr id="6" name="Content Placeholder 5">
+            <a:extLst>
+              <a:ext uri="{FF2B5EF4-FFF2-40B4-BE49-F238E27FC236}">
+                <a16:creationId xmlns:a16="http://schemas.microsoft.com/office/drawing/2014/main" id="{7ADBC4A1-AD3A-4DDD-9EE7-4C4C9AFCD269}"/>
+              </a:ext>
+            </a:extLst>
+          </p:cNvPr>
+          <p:cNvSpPr>
+            <a:spLocks noGrp="1"/>
+          </p:cNvSpPr>
+          <p:nvPr>
+            <p:ph sz="quarter" idx="4"/>
+          </p:nvPr>
+        </p:nvSpPr>
+        <p:spPr/>
+        <p:txBody>
+          <a:bodyPr/>
+          <a:lstStyle/>
+          <a:p>
+            <a:r>
+              <a:rPr lang="en-US" dirty="0"/>
+              <a:t>{ </a:t>
+            </a:r>
+          </a:p>
+          <a:p>
+            <a:r>
+              <a:rPr lang="en-US" dirty="0"/>
+              <a:t>"id": 1,</a:t>
+            </a:r>
+          </a:p>
+          <a:p>
+            <a:r>
+              <a:rPr lang="en-US" dirty="0"/>
+              <a:t> "</a:t>
+            </a:r>
+            <a:r>
+              <a:rPr lang="en-US" dirty="0" err="1"/>
+              <a:t>fullName</a:t>
+            </a:r>
+            <a:r>
+              <a:rPr lang="en-US" dirty="0"/>
+              <a:t>": "John Doe",</a:t>
+            </a:r>
+          </a:p>
+          <a:p>
+            <a:r>
+              <a:rPr lang="en-US" dirty="0"/>
+              <a:t> "username": "</a:t>
+            </a:r>
+            <a:r>
+              <a:rPr lang="en-US" dirty="0" err="1"/>
+              <a:t>johndoe</a:t>
+            </a:r>
+            <a:r>
+              <a:rPr lang="en-US" dirty="0"/>
+              <a:t>",</a:t>
+            </a:r>
+          </a:p>
+          <a:p>
+            <a:r>
+              <a:rPr lang="en-US" dirty="0"/>
+              <a:t> "email": "john@example.com",</a:t>
+            </a:r>
+          </a:p>
+          <a:p>
+            <a:r>
+              <a:rPr lang="en-US" dirty="0"/>
+              <a:t> "gender": "MALE",</a:t>
+            </a:r>
+          </a:p>
+          <a:p>
+            <a:r>
+              <a:rPr lang="en-US" dirty="0"/>
+              <a:t> "dob": "1990-05-15“</a:t>
+            </a:r>
+          </a:p>
+          <a:p>
+            <a:r>
+              <a:rPr lang="en-US" dirty="0"/>
+              <a:t> }</a:t>
+            </a:r>
+          </a:p>
+          <a:p>
+            <a:endParaRPr lang="en-US" dirty="0"/>
           </a:p>
         </p:txBody>
       </p:sp>
@@ -6522,12 +6830,40 @@
       </p:sp>
       <p:sp>
         <p:nvSpPr>
+          <p:cNvPr id="4" name="Text Placeholder 3">
+            <a:extLst>
+              <a:ext uri="{FF2B5EF4-FFF2-40B4-BE49-F238E27FC236}">
+                <a16:creationId xmlns:a16="http://schemas.microsoft.com/office/drawing/2014/main" id="{E799925C-A187-19AF-2E1C-C6877401D7E5}"/>
+              </a:ext>
+            </a:extLst>
+          </p:cNvPr>
+          <p:cNvSpPr>
+            <a:spLocks noGrp="1"/>
+          </p:cNvSpPr>
+          <p:nvPr>
+            <p:ph type="body" idx="1"/>
+          </p:nvPr>
+        </p:nvSpPr>
+        <p:spPr/>
+        <p:txBody>
+          <a:bodyPr/>
+          <a:lstStyle/>
+          <a:p>
+            <a:r>
+              <a:rPr lang="en-US" dirty="0"/>
+              <a:t>Details</a:t>
+            </a:r>
+          </a:p>
+        </p:txBody>
+      </p:sp>
+      <p:sp>
+        <p:nvSpPr>
           <p:cNvPr id="3" name="Content Placeholder 2"/>
           <p:cNvSpPr>
             <a:spLocks noGrp="1"/>
           </p:cNvSpPr>
           <p:nvPr>
-            <p:ph idx="1"/>
+            <p:ph sz="half" idx="2"/>
           </p:nvPr>
         </p:nvSpPr>
         <p:spPr/>
@@ -6556,6 +6892,123 @@
           </a:p>
           <a:p>
             <a:endParaRPr/>
+          </a:p>
+        </p:txBody>
+      </p:sp>
+      <p:sp>
+        <p:nvSpPr>
+          <p:cNvPr id="5" name="Text Placeholder 4">
+            <a:extLst>
+              <a:ext uri="{FF2B5EF4-FFF2-40B4-BE49-F238E27FC236}">
+                <a16:creationId xmlns:a16="http://schemas.microsoft.com/office/drawing/2014/main" id="{118C6302-E0A5-E359-2A6B-A66281D59DC7}"/>
+              </a:ext>
+            </a:extLst>
+          </p:cNvPr>
+          <p:cNvSpPr>
+            <a:spLocks noGrp="1"/>
+          </p:cNvSpPr>
+          <p:nvPr>
+            <p:ph type="body" sz="quarter" idx="3"/>
+          </p:nvPr>
+        </p:nvSpPr>
+        <p:spPr/>
+        <p:txBody>
+          <a:bodyPr/>
+          <a:lstStyle/>
+          <a:p>
+            <a:r>
+              <a:rPr lang="en-US" dirty="0"/>
+              <a:t>Response: user</a:t>
+            </a:r>
+          </a:p>
+        </p:txBody>
+      </p:sp>
+      <p:sp>
+        <p:nvSpPr>
+          <p:cNvPr id="6" name="Content Placeholder 5">
+            <a:extLst>
+              <a:ext uri="{FF2B5EF4-FFF2-40B4-BE49-F238E27FC236}">
+                <a16:creationId xmlns:a16="http://schemas.microsoft.com/office/drawing/2014/main" id="{2D71173F-2BC1-A4FE-EC0A-24B4C30FD1FA}"/>
+              </a:ext>
+            </a:extLst>
+          </p:cNvPr>
+          <p:cNvSpPr>
+            <a:spLocks noGrp="1"/>
+          </p:cNvSpPr>
+          <p:nvPr>
+            <p:ph sz="quarter" idx="4"/>
+          </p:nvPr>
+        </p:nvSpPr>
+        <p:spPr/>
+        <p:txBody>
+          <a:bodyPr/>
+          <a:lstStyle/>
+          <a:p>
+            <a:r>
+              <a:rPr lang="en-US" dirty="0"/>
+              <a:t>{ </a:t>
+            </a:r>
+          </a:p>
+          <a:p>
+            <a:r>
+              <a:rPr lang="en-US" dirty="0"/>
+              <a:t>"id": 1,</a:t>
+            </a:r>
+          </a:p>
+          <a:p>
+            <a:r>
+              <a:rPr lang="en-US" dirty="0"/>
+              <a:t> "</a:t>
+            </a:r>
+            <a:r>
+              <a:rPr lang="en-US" dirty="0" err="1"/>
+              <a:t>fullName</a:t>
+            </a:r>
+            <a:r>
+              <a:rPr lang="en-US" dirty="0"/>
+              <a:t>": "John Doe",</a:t>
+            </a:r>
+          </a:p>
+          <a:p>
+            <a:r>
+              <a:rPr lang="en-US" dirty="0"/>
+              <a:t> "username": "</a:t>
+            </a:r>
+            <a:r>
+              <a:rPr lang="en-US" dirty="0" err="1"/>
+              <a:t>johndoe</a:t>
+            </a:r>
+            <a:r>
+              <a:rPr lang="en-US" dirty="0"/>
+              <a:t>",</a:t>
+            </a:r>
+          </a:p>
+          <a:p>
+            <a:r>
+              <a:rPr lang="en-US" dirty="0"/>
+              <a:t> "email": "john@example.com",</a:t>
+            </a:r>
+          </a:p>
+          <a:p>
+            <a:r>
+              <a:rPr lang="en-US" dirty="0"/>
+              <a:t> "gender": "MALE",</a:t>
+            </a:r>
+          </a:p>
+          <a:p>
+            <a:r>
+              <a:rPr lang="en-US" dirty="0"/>
+              <a:t> "dob": "1990-05-15“</a:t>
+            </a:r>
+          </a:p>
+          <a:p>
+            <a:r>
+              <a:rPr lang="en-US" dirty="0"/>
+              <a:t> }</a:t>
+            </a:r>
+          </a:p>
+          <a:p>
+            <a:endParaRPr lang="en-US" dirty="0"/>
           </a:p>
         </p:txBody>
       </p:sp>
@@ -6620,40 +7073,150 @@
             <a:spLocks noGrp="1"/>
           </p:cNvSpPr>
           <p:nvPr>
-            <p:ph idx="1"/>
-          </p:nvPr>
-        </p:nvSpPr>
-        <p:spPr/>
-        <p:txBody>
-          <a:bodyPr/>
-          <a:lstStyle/>
-          <a:p>
-            <a:r>
-              <a:t>Operation ID: updateUser</a:t>
-            </a:r>
-          </a:p>
-          <a:p>
-            <a:r>
+            <p:ph sz="half" idx="1"/>
+          </p:nvPr>
+        </p:nvSpPr>
+        <p:spPr/>
+        <p:txBody>
+          <a:bodyPr/>
+          <a:lstStyle/>
+          <a:p>
+            <a:r>
+              <a:rPr dirty="0"/>
+              <a:t>Operation ID: </a:t>
+            </a:r>
+            <a:r>
+              <a:rPr dirty="0" err="1"/>
+              <a:t>updateUser</a:t>
+            </a:r>
+            <a:endParaRPr dirty="0"/>
+          </a:p>
+          <a:p>
+            <a:r>
+              <a:rPr dirty="0"/>
               <a:t>Parameters: id (path)</a:t>
             </a:r>
           </a:p>
           <a:p>
             <a:r>
-              <a:t>Request Body: {'application/json': {'schema': {'$ref': '#/components/schemas/User'}}}</a:t>
-            </a:r>
-          </a:p>
-          <a:p>
-            <a:r>
+              <a:rPr dirty="0"/>
+              <a:t>Request Body: </a:t>
+            </a:r>
+            <a:r>
+              <a:rPr lang="en-US" dirty="0"/>
+              <a:t>user</a:t>
+            </a:r>
+            <a:endParaRPr dirty="0"/>
+          </a:p>
+          <a:p>
+            <a:r>
+              <a:rPr dirty="0"/>
               <a:t>Responses:</a:t>
             </a:r>
           </a:p>
           <a:p>
             <a:r>
+              <a:rPr dirty="0"/>
               <a:t>  200: OK</a:t>
             </a:r>
           </a:p>
           <a:p>
-            <a:endParaRPr/>
+            <a:endParaRPr dirty="0"/>
+          </a:p>
+        </p:txBody>
+      </p:sp>
+      <p:sp>
+        <p:nvSpPr>
+          <p:cNvPr id="4" name="Content Placeholder 3">
+            <a:extLst>
+              <a:ext uri="{FF2B5EF4-FFF2-40B4-BE49-F238E27FC236}">
+                <a16:creationId xmlns:a16="http://schemas.microsoft.com/office/drawing/2014/main" id="{61131165-A3CA-B743-63F5-F672BDD7397B}"/>
+              </a:ext>
+            </a:extLst>
+          </p:cNvPr>
+          <p:cNvSpPr>
+            <a:spLocks noGrp="1"/>
+          </p:cNvSpPr>
+          <p:nvPr>
+            <p:ph sz="half" idx="2"/>
+          </p:nvPr>
+        </p:nvSpPr>
+        <p:spPr/>
+        <p:txBody>
+          <a:bodyPr/>
+          <a:lstStyle/>
+          <a:p>
+            <a:r>
+              <a:rPr lang="en-US" dirty="0"/>
+              <a:t>user:</a:t>
+            </a:r>
+          </a:p>
+          <a:p>
+            <a:r>
+              <a:rPr lang="en-US" dirty="0"/>
+              <a:t>{ </a:t>
+            </a:r>
+          </a:p>
+          <a:p>
+            <a:r>
+              <a:rPr lang="en-US" dirty="0"/>
+              <a:t>"id": 1,</a:t>
+            </a:r>
+          </a:p>
+          <a:p>
+            <a:r>
+              <a:rPr lang="en-US" dirty="0"/>
+              <a:t> "</a:t>
+            </a:r>
+            <a:r>
+              <a:rPr lang="en-US" dirty="0" err="1"/>
+              <a:t>fullName</a:t>
+            </a:r>
+            <a:r>
+              <a:rPr lang="en-US" dirty="0"/>
+              <a:t>": "John Doe",</a:t>
+            </a:r>
+          </a:p>
+          <a:p>
+            <a:r>
+              <a:rPr lang="en-US" dirty="0"/>
+              <a:t> "username": "</a:t>
+            </a:r>
+            <a:r>
+              <a:rPr lang="en-US" dirty="0" err="1"/>
+              <a:t>johndoe</a:t>
+            </a:r>
+            <a:r>
+              <a:rPr lang="en-US" dirty="0"/>
+              <a:t>",</a:t>
+            </a:r>
+          </a:p>
+          <a:p>
+            <a:r>
+              <a:rPr lang="en-US" dirty="0"/>
+              <a:t> "email": "john@example.com",</a:t>
+            </a:r>
+          </a:p>
+          <a:p>
+            <a:r>
+              <a:rPr lang="en-US" dirty="0"/>
+              <a:t> "gender": "MALE",</a:t>
+            </a:r>
+          </a:p>
+          <a:p>
+            <a:r>
+              <a:rPr lang="en-US" dirty="0"/>
+              <a:t> "dob": "1990-05-15“</a:t>
+            </a:r>
+          </a:p>
+          <a:p>
+            <a:r>
+              <a:rPr lang="en-US" dirty="0"/>
+              <a:t> }</a:t>
+            </a:r>
+          </a:p>
+          <a:p>
+            <a:endParaRPr lang="en-US" dirty="0"/>
           </a:p>
         </p:txBody>
       </p:sp>
@@ -7011,12 +7574,40 @@
       </p:sp>
       <p:sp>
         <p:nvSpPr>
+          <p:cNvPr id="5" name="Text Placeholder 4">
+            <a:extLst>
+              <a:ext uri="{FF2B5EF4-FFF2-40B4-BE49-F238E27FC236}">
+                <a16:creationId xmlns:a16="http://schemas.microsoft.com/office/drawing/2014/main" id="{FF7F9184-50E8-E130-4796-A0997114E662}"/>
+              </a:ext>
+            </a:extLst>
+          </p:cNvPr>
+          <p:cNvSpPr>
+            <a:spLocks noGrp="1"/>
+          </p:cNvSpPr>
+          <p:nvPr>
+            <p:ph type="body" idx="1"/>
+          </p:nvPr>
+        </p:nvSpPr>
+        <p:spPr/>
+        <p:txBody>
+          <a:bodyPr/>
+          <a:lstStyle/>
+          <a:p>
+            <a:r>
+              <a:rPr lang="en-US" dirty="0"/>
+              <a:t>Details</a:t>
+            </a:r>
+          </a:p>
+        </p:txBody>
+      </p:sp>
+      <p:sp>
+        <p:nvSpPr>
           <p:cNvPr id="3" name="Content Placeholder 2"/>
           <p:cNvSpPr>
             <a:spLocks noGrp="1"/>
           </p:cNvSpPr>
           <p:nvPr>
-            <p:ph idx="1"/>
+            <p:ph sz="half" idx="2"/>
           </p:nvPr>
         </p:nvSpPr>
         <p:spPr/>
@@ -7045,6 +7636,120 @@
           </a:p>
           <a:p>
             <a:endParaRPr/>
+          </a:p>
+        </p:txBody>
+      </p:sp>
+      <p:sp>
+        <p:nvSpPr>
+          <p:cNvPr id="6" name="Text Placeholder 5">
+            <a:extLst>
+              <a:ext uri="{FF2B5EF4-FFF2-40B4-BE49-F238E27FC236}">
+                <a16:creationId xmlns:a16="http://schemas.microsoft.com/office/drawing/2014/main" id="{666E9FF1-2E8D-C6F0-E251-BD056DFB6FD3}"/>
+              </a:ext>
+            </a:extLst>
+          </p:cNvPr>
+          <p:cNvSpPr>
+            <a:spLocks noGrp="1"/>
+          </p:cNvSpPr>
+          <p:nvPr>
+            <p:ph type="body" sz="quarter" idx="3"/>
+          </p:nvPr>
+        </p:nvSpPr>
+        <p:spPr/>
+        <p:txBody>
+          <a:bodyPr/>
+          <a:lstStyle/>
+          <a:p>
+            <a:r>
+              <a:rPr lang="en-US" dirty="0"/>
+              <a:t>Response: Page</a:t>
+            </a:r>
+          </a:p>
+        </p:txBody>
+      </p:sp>
+      <p:sp>
+        <p:nvSpPr>
+          <p:cNvPr id="4" name="Content Placeholder 3">
+            <a:extLst>
+              <a:ext uri="{FF2B5EF4-FFF2-40B4-BE49-F238E27FC236}">
+                <a16:creationId xmlns:a16="http://schemas.microsoft.com/office/drawing/2014/main" id="{7BADAECF-C24A-C74E-057A-4CC6B764E4A0}"/>
+              </a:ext>
+            </a:extLst>
+          </p:cNvPr>
+          <p:cNvSpPr>
+            <a:spLocks noGrp="1"/>
+          </p:cNvSpPr>
+          <p:nvPr>
+            <p:ph sz="quarter" idx="4"/>
+          </p:nvPr>
+        </p:nvSpPr>
+        <p:spPr/>
+        <p:txBody>
+          <a:bodyPr/>
+          <a:lstStyle/>
+          <a:p>
+            <a:r>
+              <a:rPr lang="en-US" dirty="0"/>
+              <a:t>{  "</a:t>
+            </a:r>
+            <a:r>
+              <a:rPr lang="en-US" dirty="0" err="1"/>
+              <a:t>totalPages</a:t>
+            </a:r>
+            <a:r>
+              <a:rPr lang="en-US" dirty="0"/>
+              <a:t>": 5,</a:t>
+            </a:r>
+          </a:p>
+          <a:p>
+            <a:r>
+              <a:rPr lang="en-US" dirty="0"/>
+              <a:t>  "</a:t>
+            </a:r>
+            <a:r>
+              <a:rPr lang="en-US" dirty="0" err="1"/>
+              <a:t>totalElements</a:t>
+            </a:r>
+            <a:r>
+              <a:rPr lang="en-US" dirty="0"/>
+              <a:t>": 50,</a:t>
+            </a:r>
+          </a:p>
+          <a:p>
+            <a:r>
+              <a:rPr lang="en-US" dirty="0"/>
+              <a:t>  "size": 10,</a:t>
+            </a:r>
+          </a:p>
+          <a:p>
+            <a:r>
+              <a:rPr lang="en-US" dirty="0"/>
+              <a:t>  "number": 1,</a:t>
+            </a:r>
+          </a:p>
+          <a:p>
+            <a:r>
+              <a:rPr lang="en-US" dirty="0"/>
+              <a:t>  “content” : event[]</a:t>
+            </a:r>
+          </a:p>
+          <a:p>
+            <a:r>
+              <a:rPr lang="en-US" dirty="0"/>
+              <a:t>  "first": true, </a:t>
+            </a:r>
+          </a:p>
+          <a:p>
+            <a:r>
+              <a:rPr lang="en-US" dirty="0"/>
+              <a:t> "last": false,</a:t>
+            </a:r>
+          </a:p>
+          <a:p>
+            <a:r>
+              <a:rPr lang="en-US" dirty="0"/>
+              <a:t>  "empty": false}</a:t>
+            </a:r>
           </a:p>
         </p:txBody>
       </p:sp>

--- a/Project SDC.pptx
+++ b/Project SDC.pptx
@@ -927,7 +927,7 @@
           <a:p>
             <a:fld id="{03FDBACB-37CC-47D4-B7F1-CFD3A29BCE1D}" type="datetimeFigureOut">
               <a:rPr lang="en-US" smtClean="0"/>
-              <a:t>29-Jan-25</a:t>
+              <a:t>1/29/2025</a:t>
             </a:fld>
             <a:endParaRPr lang="en-US"/>
           </a:p>
@@ -1181,7 +1181,7 @@
           <a:p>
             <a:fld id="{03FDBACB-37CC-47D4-B7F1-CFD3A29BCE1D}" type="datetimeFigureOut">
               <a:rPr lang="en-US" smtClean="0"/>
-              <a:t>29-Jan-25</a:t>
+              <a:t>1/29/2025</a:t>
             </a:fld>
             <a:endParaRPr lang="en-US"/>
           </a:p>
@@ -1498,7 +1498,7 @@
           <a:p>
             <a:fld id="{03FDBACB-37CC-47D4-B7F1-CFD3A29BCE1D}" type="datetimeFigureOut">
               <a:rPr lang="en-US" smtClean="0"/>
-              <a:t>29-Jan-25</a:t>
+              <a:t>1/29/2025</a:t>
             </a:fld>
             <a:endParaRPr lang="en-US"/>
           </a:p>
@@ -1842,7 +1842,7 @@
           <a:p>
             <a:fld id="{03FDBACB-37CC-47D4-B7F1-CFD3A29BCE1D}" type="datetimeFigureOut">
               <a:rPr lang="en-US" smtClean="0"/>
-              <a:t>29-Jan-25</a:t>
+              <a:t>1/29/2025</a:t>
             </a:fld>
             <a:endParaRPr lang="en-US"/>
           </a:p>
@@ -2159,7 +2159,7 @@
           <a:p>
             <a:fld id="{03FDBACB-37CC-47D4-B7F1-CFD3A29BCE1D}" type="datetimeFigureOut">
               <a:rPr lang="en-US" smtClean="0"/>
-              <a:t>29-Jan-25</a:t>
+              <a:t>1/29/2025</a:t>
             </a:fld>
             <a:endParaRPr lang="en-US"/>
           </a:p>
@@ -2555,7 +2555,7 @@
           <a:p>
             <a:fld id="{03FDBACB-37CC-47D4-B7F1-CFD3A29BCE1D}" type="datetimeFigureOut">
               <a:rPr lang="en-US" smtClean="0"/>
-              <a:t>29-Jan-25</a:t>
+              <a:t>1/29/2025</a:t>
             </a:fld>
             <a:endParaRPr lang="en-US"/>
           </a:p>
@@ -2728,7 +2728,7 @@
           <a:p>
             <a:fld id="{03FDBACB-37CC-47D4-B7F1-CFD3A29BCE1D}" type="datetimeFigureOut">
               <a:rPr lang="en-US" smtClean="0"/>
-              <a:t>29-Jan-25</a:t>
+              <a:t>1/29/2025</a:t>
             </a:fld>
             <a:endParaRPr lang="en-US"/>
           </a:p>
@@ -2911,7 +2911,7 @@
           <a:p>
             <a:fld id="{03FDBACB-37CC-47D4-B7F1-CFD3A29BCE1D}" type="datetimeFigureOut">
               <a:rPr lang="en-US" smtClean="0"/>
-              <a:t>29-Jan-25</a:t>
+              <a:t>1/29/2025</a:t>
             </a:fld>
             <a:endParaRPr lang="en-US"/>
           </a:p>
@@ -3090,7 +3090,7 @@
           <a:p>
             <a:fld id="{03FDBACB-37CC-47D4-B7F1-CFD3A29BCE1D}" type="datetimeFigureOut">
               <a:rPr lang="en-US" smtClean="0"/>
-              <a:t>29-Jan-25</a:t>
+              <a:t>1/29/2025</a:t>
             </a:fld>
             <a:endParaRPr lang="en-US"/>
           </a:p>
@@ -3340,7 +3340,7 @@
           <a:p>
             <a:fld id="{03FDBACB-37CC-47D4-B7F1-CFD3A29BCE1D}" type="datetimeFigureOut">
               <a:rPr lang="en-US" smtClean="0"/>
-              <a:t>29-Jan-25</a:t>
+              <a:t>1/29/2025</a:t>
             </a:fld>
             <a:endParaRPr lang="en-US"/>
           </a:p>
@@ -3575,7 +3575,7 @@
           <a:p>
             <a:fld id="{03FDBACB-37CC-47D4-B7F1-CFD3A29BCE1D}" type="datetimeFigureOut">
               <a:rPr lang="en-US" smtClean="0"/>
-              <a:t>29-Jan-25</a:t>
+              <a:t>1/29/2025</a:t>
             </a:fld>
             <a:endParaRPr lang="en-US"/>
           </a:p>
@@ -3952,7 +3952,7 @@
           <a:p>
             <a:fld id="{03FDBACB-37CC-47D4-B7F1-CFD3A29BCE1D}" type="datetimeFigureOut">
               <a:rPr lang="en-US" smtClean="0"/>
-              <a:t>29-Jan-25</a:t>
+              <a:t>1/29/2025</a:t>
             </a:fld>
             <a:endParaRPr lang="en-US"/>
           </a:p>
@@ -4078,7 +4078,7 @@
           <a:p>
             <a:fld id="{03FDBACB-37CC-47D4-B7F1-CFD3A29BCE1D}" type="datetimeFigureOut">
               <a:rPr lang="en-US" smtClean="0"/>
-              <a:t>29-Jan-25</a:t>
+              <a:t>1/29/2025</a:t>
             </a:fld>
             <a:endParaRPr lang="en-US"/>
           </a:p>
@@ -4176,7 +4176,7 @@
           <a:p>
             <a:fld id="{03FDBACB-37CC-47D4-B7F1-CFD3A29BCE1D}" type="datetimeFigureOut">
               <a:rPr lang="en-US" smtClean="0"/>
-              <a:t>29-Jan-25</a:t>
+              <a:t>1/29/2025</a:t>
             </a:fld>
             <a:endParaRPr lang="en-US"/>
           </a:p>
@@ -4434,7 +4434,7 @@
           <a:p>
             <a:fld id="{03FDBACB-37CC-47D4-B7F1-CFD3A29BCE1D}" type="datetimeFigureOut">
               <a:rPr lang="en-US" smtClean="0"/>
-              <a:t>29-Jan-25</a:t>
+              <a:t>1/29/2025</a:t>
             </a:fld>
             <a:endParaRPr lang="en-US"/>
           </a:p>
@@ -4700,7 +4700,7 @@
           <a:p>
             <a:fld id="{03FDBACB-37CC-47D4-B7F1-CFD3A29BCE1D}" type="datetimeFigureOut">
               <a:rPr lang="en-US" smtClean="0"/>
-              <a:t>29-Jan-25</a:t>
+              <a:t>1/29/2025</a:t>
             </a:fld>
             <a:endParaRPr lang="en-US"/>
           </a:p>
@@ -5446,7 +5446,7 @@
           <a:p>
             <a:fld id="{03FDBACB-37CC-47D4-B7F1-CFD3A29BCE1D}" type="datetimeFigureOut">
               <a:rPr lang="en-US" smtClean="0"/>
-              <a:t>29-Jan-25</a:t>
+              <a:t>1/29/2025</a:t>
             </a:fld>
             <a:endParaRPr lang="en-US"/>
           </a:p>
@@ -6457,18 +6457,27 @@
           <a:bodyPr/>
           <a:lstStyle/>
           <a:p>
+            <a:pPr marL="0" indent="0">
+              <a:buNone/>
+            </a:pPr>
             <a:r>
               <a:rPr lang="en-US" dirty="0"/>
               <a:t>{ </a:t>
             </a:r>
           </a:p>
           <a:p>
+            <a:pPr marL="0" indent="0">
+              <a:buNone/>
+            </a:pPr>
             <a:r>
               <a:rPr lang="en-US" dirty="0"/>
               <a:t>"id": 1,</a:t>
             </a:r>
           </a:p>
           <a:p>
+            <a:pPr marL="0" indent="0">
+              <a:buNone/>
+            </a:pPr>
             <a:r>
               <a:rPr lang="en-US" dirty="0"/>
               <a:t> "</a:t>
@@ -6483,6 +6492,9 @@
             </a:r>
           </a:p>
           <a:p>
+            <a:pPr marL="0" indent="0">
+              <a:buNone/>
+            </a:pPr>
             <a:r>
               <a:rPr lang="en-US" dirty="0"/>
               <a:t> "username": "</a:t>
@@ -6497,24 +6509,36 @@
             </a:r>
           </a:p>
           <a:p>
+            <a:pPr marL="0" indent="0">
+              <a:buNone/>
+            </a:pPr>
             <a:r>
               <a:rPr lang="en-US" dirty="0"/>
               <a:t> "email": "john@example.com",</a:t>
             </a:r>
           </a:p>
           <a:p>
+            <a:pPr marL="0" indent="0">
+              <a:buNone/>
+            </a:pPr>
             <a:r>
               <a:rPr lang="en-US" dirty="0"/>
               <a:t> "gender": "MALE",</a:t>
             </a:r>
           </a:p>
           <a:p>
+            <a:pPr marL="0" indent="0">
+              <a:buNone/>
+            </a:pPr>
             <a:r>
               <a:rPr lang="en-US" dirty="0"/>
               <a:t> "dob": "1990-05-15“</a:t>
             </a:r>
           </a:p>
           <a:p>
+            <a:pPr marL="0" indent="0">
+              <a:buNone/>
+            </a:pPr>
             <a:r>
               <a:rPr lang="en-US" dirty="0"/>
               <a:t> }</a:t>
@@ -6706,18 +6730,27 @@
           <a:bodyPr/>
           <a:lstStyle/>
           <a:p>
+            <a:pPr marL="0" indent="0">
+              <a:buNone/>
+            </a:pPr>
             <a:r>
               <a:rPr lang="en-US" dirty="0"/>
               <a:t>{ </a:t>
             </a:r>
           </a:p>
           <a:p>
+            <a:pPr marL="0" indent="0">
+              <a:buNone/>
+            </a:pPr>
             <a:r>
               <a:rPr lang="en-US" dirty="0"/>
               <a:t>"id": 1,</a:t>
             </a:r>
           </a:p>
           <a:p>
+            <a:pPr marL="0" indent="0">
+              <a:buNone/>
+            </a:pPr>
             <a:r>
               <a:rPr lang="en-US" dirty="0"/>
               <a:t> "</a:t>
@@ -6732,6 +6765,9 @@
             </a:r>
           </a:p>
           <a:p>
+            <a:pPr marL="0" indent="0">
+              <a:buNone/>
+            </a:pPr>
             <a:r>
               <a:rPr lang="en-US" dirty="0"/>
               <a:t> "username": "</a:t>
@@ -6746,24 +6782,36 @@
             </a:r>
           </a:p>
           <a:p>
+            <a:pPr marL="0" indent="0">
+              <a:buNone/>
+            </a:pPr>
             <a:r>
               <a:rPr lang="en-US" dirty="0"/>
               <a:t> "email": "john@example.com",</a:t>
             </a:r>
           </a:p>
           <a:p>
+            <a:pPr marL="0" indent="0">
+              <a:buNone/>
+            </a:pPr>
             <a:r>
               <a:rPr lang="en-US" dirty="0"/>
               <a:t> "gender": "MALE",</a:t>
             </a:r>
           </a:p>
           <a:p>
+            <a:pPr marL="0" indent="0">
+              <a:buNone/>
+            </a:pPr>
             <a:r>
               <a:rPr lang="en-US" dirty="0"/>
               <a:t> "dob": "1990-05-15“</a:t>
             </a:r>
           </a:p>
           <a:p>
+            <a:pPr marL="0" indent="0">
+              <a:buNone/>
+            </a:pPr>
             <a:r>
               <a:rPr lang="en-US" dirty="0"/>
               <a:t> }</a:t>
@@ -6944,18 +6992,27 @@
           <a:bodyPr/>
           <a:lstStyle/>
           <a:p>
+            <a:pPr marL="0" indent="0">
+              <a:buNone/>
+            </a:pPr>
             <a:r>
               <a:rPr lang="en-US" dirty="0"/>
               <a:t>{ </a:t>
             </a:r>
           </a:p>
           <a:p>
+            <a:pPr marL="0" indent="0">
+              <a:buNone/>
+            </a:pPr>
             <a:r>
               <a:rPr lang="en-US" dirty="0"/>
               <a:t>"id": 1,</a:t>
             </a:r>
           </a:p>
           <a:p>
+            <a:pPr marL="0" indent="0">
+              <a:buNone/>
+            </a:pPr>
             <a:r>
               <a:rPr lang="en-US" dirty="0"/>
               <a:t> "</a:t>
@@ -6970,6 +7027,9 @@
             </a:r>
           </a:p>
           <a:p>
+            <a:pPr marL="0" indent="0">
+              <a:buNone/>
+            </a:pPr>
             <a:r>
               <a:rPr lang="en-US" dirty="0"/>
               <a:t> "username": "</a:t>
@@ -6984,24 +7044,36 @@
             </a:r>
           </a:p>
           <a:p>
+            <a:pPr marL="0" indent="0">
+              <a:buNone/>
+            </a:pPr>
             <a:r>
               <a:rPr lang="en-US" dirty="0"/>
               <a:t> "email": "john@example.com",</a:t>
             </a:r>
           </a:p>
           <a:p>
+            <a:pPr marL="0" indent="0">
+              <a:buNone/>
+            </a:pPr>
             <a:r>
               <a:rPr lang="en-US" dirty="0"/>
               <a:t> "gender": "MALE",</a:t>
             </a:r>
           </a:p>
           <a:p>
+            <a:pPr marL="0" indent="0">
+              <a:buNone/>
+            </a:pPr>
             <a:r>
               <a:rPr lang="en-US" dirty="0"/>
               <a:t> "dob": "1990-05-15“</a:t>
             </a:r>
           </a:p>
           <a:p>
+            <a:pPr marL="0" indent="0">
+              <a:buNone/>
+            </a:pPr>
             <a:r>
               <a:rPr lang="en-US" dirty="0"/>
               <a:t> }</a:t>
@@ -7146,24 +7218,36 @@
           <a:bodyPr/>
           <a:lstStyle/>
           <a:p>
+            <a:pPr marL="0" indent="0">
+              <a:buNone/>
+            </a:pPr>
             <a:r>
               <a:rPr lang="en-US" dirty="0"/>
               <a:t>user:</a:t>
             </a:r>
           </a:p>
           <a:p>
+            <a:pPr marL="0" indent="0">
+              <a:buNone/>
+            </a:pPr>
             <a:r>
               <a:rPr lang="en-US" dirty="0"/>
               <a:t>{ </a:t>
             </a:r>
           </a:p>
           <a:p>
+            <a:pPr marL="0" indent="0">
+              <a:buNone/>
+            </a:pPr>
             <a:r>
               <a:rPr lang="en-US" dirty="0"/>
               <a:t>"id": 1,</a:t>
             </a:r>
           </a:p>
           <a:p>
+            <a:pPr marL="0" indent="0">
+              <a:buNone/>
+            </a:pPr>
             <a:r>
               <a:rPr lang="en-US" dirty="0"/>
               <a:t> "</a:t>
@@ -7178,6 +7262,9 @@
             </a:r>
           </a:p>
           <a:p>
+            <a:pPr marL="0" indent="0">
+              <a:buNone/>
+            </a:pPr>
             <a:r>
               <a:rPr lang="en-US" dirty="0"/>
               <a:t> "username": "</a:t>
@@ -7192,24 +7279,36 @@
             </a:r>
           </a:p>
           <a:p>
+            <a:pPr marL="0" indent="0">
+              <a:buNone/>
+            </a:pPr>
             <a:r>
               <a:rPr lang="en-US" dirty="0"/>
               <a:t> "email": "john@example.com",</a:t>
             </a:r>
           </a:p>
           <a:p>
+            <a:pPr marL="0" indent="0">
+              <a:buNone/>
+            </a:pPr>
             <a:r>
               <a:rPr lang="en-US" dirty="0"/>
               <a:t> "gender": "MALE",</a:t>
             </a:r>
           </a:p>
           <a:p>
+            <a:pPr marL="0" indent="0">
+              <a:buNone/>
+            </a:pPr>
             <a:r>
               <a:rPr lang="en-US" dirty="0"/>
               <a:t> "dob": "1990-05-15“</a:t>
             </a:r>
           </a:p>
           <a:p>
+            <a:pPr marL="0" indent="0">
+              <a:buNone/>
+            </a:pPr>
             <a:r>
               <a:rPr lang="en-US" dirty="0"/>
               <a:t> }</a:t>
@@ -7688,6 +7787,9 @@
           <a:bodyPr/>
           <a:lstStyle/>
           <a:p>
+            <a:pPr marL="0" indent="0">
+              <a:buNone/>
+            </a:pPr>
             <a:r>
               <a:rPr lang="en-US" dirty="0"/>
               <a:t>{  "</a:t>
@@ -7702,6 +7804,9 @@
             </a:r>
           </a:p>
           <a:p>
+            <a:pPr marL="0" indent="0">
+              <a:buNone/>
+            </a:pPr>
             <a:r>
               <a:rPr lang="en-US" dirty="0"/>
               <a:t>  "</a:t>
@@ -7716,36 +7821,54 @@
             </a:r>
           </a:p>
           <a:p>
+            <a:pPr marL="0" indent="0">
+              <a:buNone/>
+            </a:pPr>
             <a:r>
               <a:rPr lang="en-US" dirty="0"/>
               <a:t>  "size": 10,</a:t>
             </a:r>
           </a:p>
           <a:p>
+            <a:pPr marL="0" indent="0">
+              <a:buNone/>
+            </a:pPr>
             <a:r>
               <a:rPr lang="en-US" dirty="0"/>
               <a:t>  "number": 1,</a:t>
             </a:r>
           </a:p>
           <a:p>
+            <a:pPr marL="0" indent="0">
+              <a:buNone/>
+            </a:pPr>
             <a:r>
               <a:rPr lang="en-US" dirty="0"/>
               <a:t>  “content” : event[]</a:t>
             </a:r>
           </a:p>
           <a:p>
+            <a:pPr marL="0" indent="0">
+              <a:buNone/>
+            </a:pPr>
             <a:r>
               <a:rPr lang="en-US" dirty="0"/>
               <a:t>  "first": true, </a:t>
             </a:r>
           </a:p>
           <a:p>
+            <a:pPr marL="0" indent="0">
+              <a:buNone/>
+            </a:pPr>
             <a:r>
               <a:rPr lang="en-US" dirty="0"/>
               <a:t> "last": false,</a:t>
             </a:r>
           </a:p>
           <a:p>
+            <a:pPr marL="0" indent="0">
+              <a:buNone/>
+            </a:pPr>
             <a:r>
               <a:rPr lang="en-US" dirty="0"/>
               <a:t>  "empty": false}</a:t>
@@ -7809,40 +7932,268 @@
       </p:sp>
       <p:sp>
         <p:nvSpPr>
+          <p:cNvPr id="4" name="Text Placeholder 3">
+            <a:extLst>
+              <a:ext uri="{FF2B5EF4-FFF2-40B4-BE49-F238E27FC236}">
+                <a16:creationId xmlns:a16="http://schemas.microsoft.com/office/drawing/2014/main" id="{8F335A33-C46E-8942-BB64-774643B0545E}"/>
+              </a:ext>
+            </a:extLst>
+          </p:cNvPr>
+          <p:cNvSpPr>
+            <a:spLocks noGrp="1"/>
+          </p:cNvSpPr>
+          <p:nvPr>
+            <p:ph type="body" idx="1"/>
+          </p:nvPr>
+        </p:nvSpPr>
+        <p:spPr/>
+        <p:txBody>
+          <a:bodyPr/>
+          <a:lstStyle/>
+          <a:p>
+            <a:r>
+              <a:rPr lang="en-US" dirty="0"/>
+              <a:t>Details</a:t>
+            </a:r>
+          </a:p>
+        </p:txBody>
+      </p:sp>
+      <p:sp>
+        <p:nvSpPr>
           <p:cNvPr id="3" name="Content Placeholder 2"/>
           <p:cNvSpPr>
             <a:spLocks noGrp="1"/>
           </p:cNvSpPr>
           <p:nvPr>
-            <p:ph idx="1"/>
-          </p:nvPr>
-        </p:nvSpPr>
-        <p:spPr/>
-        <p:txBody>
-          <a:bodyPr/>
-          <a:lstStyle/>
-          <a:p>
-            <a:r>
-              <a:t>Operation ID: addEvent</a:t>
-            </a:r>
-          </a:p>
-          <a:p>
-            <a:r>
-              <a:t>Request Body: {'application/json': {'schema': {'$ref': '#/components/schemas/Event'}}}</a:t>
-            </a:r>
-          </a:p>
-          <a:p>
-            <a:r>
+            <p:ph sz="half" idx="2"/>
+          </p:nvPr>
+        </p:nvSpPr>
+        <p:spPr/>
+        <p:txBody>
+          <a:bodyPr>
+            <a:normAutofit fontScale="85000" lnSpcReduction="10000"/>
+          </a:bodyPr>
+          <a:lstStyle/>
+          <a:p>
+            <a:r>
+              <a:rPr dirty="0"/>
+              <a:t>Operation ID: </a:t>
+            </a:r>
+            <a:r>
+              <a:rPr dirty="0" err="1"/>
+              <a:t>addEvent</a:t>
+            </a:r>
+            <a:endParaRPr dirty="0"/>
+          </a:p>
+          <a:p>
+            <a:r>
+              <a:rPr dirty="0"/>
+              <a:t>Request Body: </a:t>
+            </a:r>
+            <a:r>
+              <a:rPr lang="en-US" dirty="0"/>
+              <a:t>Event</a:t>
+            </a:r>
+          </a:p>
+          <a:p>
+            <a:r>
+              <a:rPr dirty="0"/>
               <a:t>Responses:</a:t>
             </a:r>
           </a:p>
           <a:p>
             <a:r>
+              <a:rPr dirty="0"/>
               <a:t>  200: OK</a:t>
             </a:r>
           </a:p>
           <a:p>
-            <a:endParaRPr/>
+            <a:endParaRPr dirty="0"/>
+          </a:p>
+        </p:txBody>
+      </p:sp>
+      <p:sp>
+        <p:nvSpPr>
+          <p:cNvPr id="5" name="Text Placeholder 4">
+            <a:extLst>
+              <a:ext uri="{FF2B5EF4-FFF2-40B4-BE49-F238E27FC236}">
+                <a16:creationId xmlns:a16="http://schemas.microsoft.com/office/drawing/2014/main" id="{78E0544F-CF50-C0B7-DFC0-4617136C33A9}"/>
+              </a:ext>
+            </a:extLst>
+          </p:cNvPr>
+          <p:cNvSpPr>
+            <a:spLocks noGrp="1"/>
+          </p:cNvSpPr>
+          <p:nvPr>
+            <p:ph type="body" sz="quarter" idx="3"/>
+          </p:nvPr>
+        </p:nvSpPr>
+        <p:spPr/>
+        <p:txBody>
+          <a:bodyPr/>
+          <a:lstStyle/>
+          <a:p>
+            <a:r>
+              <a:rPr lang="en-US" dirty="0"/>
+              <a:t>Request Body : event</a:t>
+            </a:r>
+          </a:p>
+        </p:txBody>
+      </p:sp>
+      <p:sp>
+        <p:nvSpPr>
+          <p:cNvPr id="6" name="Content Placeholder 5">
+            <a:extLst>
+              <a:ext uri="{FF2B5EF4-FFF2-40B4-BE49-F238E27FC236}">
+                <a16:creationId xmlns:a16="http://schemas.microsoft.com/office/drawing/2014/main" id="{636EC56F-5651-6D47-DB7C-269C03B11C24}"/>
+              </a:ext>
+            </a:extLst>
+          </p:cNvPr>
+          <p:cNvSpPr>
+            <a:spLocks noGrp="1"/>
+          </p:cNvSpPr>
+          <p:nvPr>
+            <p:ph sz="quarter" idx="4"/>
+          </p:nvPr>
+        </p:nvSpPr>
+        <p:spPr/>
+        <p:txBody>
+          <a:bodyPr>
+            <a:normAutofit fontScale="85000" lnSpcReduction="10000"/>
+          </a:bodyPr>
+          <a:lstStyle/>
+          <a:p>
+            <a:pPr marL="0" indent="0">
+              <a:buNone/>
+            </a:pPr>
+            <a:r>
+              <a:rPr lang="en-US" dirty="0"/>
+              <a:t>{</a:t>
+            </a:r>
+          </a:p>
+          <a:p>
+            <a:pPr marL="0" indent="0">
+              <a:buNone/>
+            </a:pPr>
+            <a:r>
+              <a:rPr lang="en-US" dirty="0"/>
+              <a:t>  "name": "Charity Marathon",</a:t>
+            </a:r>
+          </a:p>
+          <a:p>
+            <a:pPr marL="0" indent="0">
+              <a:buNone/>
+            </a:pPr>
+            <a:r>
+              <a:rPr lang="en-US" dirty="0"/>
+              <a:t>  "date": "2024-06-15",</a:t>
+            </a:r>
+          </a:p>
+          <a:p>
+            <a:pPr marL="0" indent="0">
+              <a:buNone/>
+            </a:pPr>
+            <a:r>
+              <a:rPr lang="en-US" dirty="0"/>
+              <a:t>  "</a:t>
+            </a:r>
+            <a:r>
+              <a:rPr lang="en-US" dirty="0" err="1"/>
+              <a:t>dayOfWeek</a:t>
+            </a:r>
+            <a:r>
+              <a:rPr lang="en-US" dirty="0"/>
+              <a:t>": "SATURDAY",</a:t>
+            </a:r>
+          </a:p>
+          <a:p>
+            <a:pPr marL="0" indent="0">
+              <a:buNone/>
+            </a:pPr>
+            <a:r>
+              <a:rPr lang="en-US" dirty="0"/>
+              <a:t>  "</a:t>
+            </a:r>
+            <a:r>
+              <a:rPr lang="en-US" dirty="0" err="1"/>
+              <a:t>fromLocation</a:t>
+            </a:r>
+            <a:r>
+              <a:rPr lang="en-US" dirty="0"/>
+              <a:t>": "City Park",</a:t>
+            </a:r>
+          </a:p>
+          <a:p>
+            <a:pPr marL="0" indent="0">
+              <a:buNone/>
+            </a:pPr>
+            <a:r>
+              <a:rPr lang="en-US" dirty="0"/>
+              <a:t>  "</a:t>
+            </a:r>
+            <a:r>
+              <a:rPr lang="en-US" dirty="0" err="1"/>
+              <a:t>toLocation</a:t>
+            </a:r>
+            <a:r>
+              <a:rPr lang="en-US" dirty="0"/>
+              <a:t>": "Downtown",</a:t>
+            </a:r>
+          </a:p>
+          <a:p>
+            <a:pPr marL="0" indent="0">
+              <a:buNone/>
+            </a:pPr>
+            <a:r>
+              <a:rPr lang="en-US" dirty="0"/>
+              <a:t>  "</a:t>
+            </a:r>
+            <a:r>
+              <a:rPr lang="en-US" dirty="0" err="1"/>
+              <a:t>startTime</a:t>
+            </a:r>
+            <a:r>
+              <a:rPr lang="en-US" dirty="0"/>
+              <a:t>": "2024-06-15T08:00:00Z",</a:t>
+            </a:r>
+          </a:p>
+          <a:p>
+            <a:pPr marL="0" indent="0">
+              <a:buNone/>
+            </a:pPr>
+            <a:r>
+              <a:rPr lang="en-US" dirty="0"/>
+              <a:t>  "duration": 180,</a:t>
+            </a:r>
+          </a:p>
+          <a:p>
+            <a:pPr marL="0" indent="0">
+              <a:buNone/>
+            </a:pPr>
+            <a:r>
+              <a:rPr lang="en-US" dirty="0"/>
+              <a:t>  "</a:t>
+            </a:r>
+            <a:r>
+              <a:rPr lang="en-US" dirty="0" err="1"/>
+              <a:t>distanceInKM</a:t>
+            </a:r>
+            <a:r>
+              <a:rPr lang="en-US" dirty="0"/>
+              <a:t>": 10</a:t>
+            </a:r>
+          </a:p>
+          <a:p>
+            <a:pPr marL="0" indent="0">
+              <a:buNone/>
+            </a:pPr>
+            <a:r>
+              <a:rPr lang="en-US" dirty="0"/>
+              <a:t>}</a:t>
+            </a:r>
+          </a:p>
+          <a:p>
+            <a:endParaRPr lang="en-US" dirty="0"/>
           </a:p>
         </p:txBody>
       </p:sp>
@@ -7902,17 +8253,47 @@
       </p:sp>
       <p:sp>
         <p:nvSpPr>
+          <p:cNvPr id="4" name="Text Placeholder 3">
+            <a:extLst>
+              <a:ext uri="{FF2B5EF4-FFF2-40B4-BE49-F238E27FC236}">
+                <a16:creationId xmlns:a16="http://schemas.microsoft.com/office/drawing/2014/main" id="{9FB28148-38CF-3C43-950C-918573A5099E}"/>
+              </a:ext>
+            </a:extLst>
+          </p:cNvPr>
+          <p:cNvSpPr>
+            <a:spLocks noGrp="1"/>
+          </p:cNvSpPr>
+          <p:nvPr>
+            <p:ph type="body" idx="1"/>
+          </p:nvPr>
+        </p:nvSpPr>
+        <p:spPr/>
+        <p:txBody>
+          <a:bodyPr/>
+          <a:lstStyle/>
+          <a:p>
+            <a:r>
+              <a:rPr lang="en-US" dirty="0"/>
+              <a:t>Details</a:t>
+            </a:r>
+          </a:p>
+        </p:txBody>
+      </p:sp>
+      <p:sp>
+        <p:nvSpPr>
           <p:cNvPr id="3" name="Content Placeholder 2"/>
           <p:cNvSpPr>
             <a:spLocks noGrp="1"/>
           </p:cNvSpPr>
           <p:nvPr>
-            <p:ph idx="1"/>
-          </p:nvPr>
-        </p:nvSpPr>
-        <p:spPr/>
-        <p:txBody>
-          <a:bodyPr/>
+            <p:ph sz="half" idx="2"/>
+          </p:nvPr>
+        </p:nvSpPr>
+        <p:spPr/>
+        <p:txBody>
+          <a:bodyPr>
+            <a:normAutofit fontScale="92500" lnSpcReduction="10000"/>
+          </a:bodyPr>
           <a:lstStyle/>
           <a:p>
             <a:r>
@@ -7928,15 +8309,11 @@
           <a:p>
             <a:r>
               <a:rPr dirty="0"/>
-              <a:t>Request Body: {'application/</a:t>
-            </a:r>
-            <a:r>
-              <a:rPr dirty="0" err="1"/>
-              <a:t>json</a:t>
-            </a:r>
-            <a:r>
-              <a:rPr dirty="0"/>
-              <a:t>': {'schema': {'$ref': '#/components/schemas/User'}}}</a:t>
+              <a:t>Request Body: </a:t>
+            </a:r>
+            <a:r>
+              <a:rPr lang="en-US" dirty="0"/>
+              <a:t>User</a:t>
             </a:r>
           </a:p>
           <a:p>
@@ -7953,6 +8330,155 @@
           </a:p>
           <a:p>
             <a:endParaRPr dirty="0"/>
+          </a:p>
+        </p:txBody>
+      </p:sp>
+      <p:sp>
+        <p:nvSpPr>
+          <p:cNvPr id="5" name="Text Placeholder 4">
+            <a:extLst>
+              <a:ext uri="{FF2B5EF4-FFF2-40B4-BE49-F238E27FC236}">
+                <a16:creationId xmlns:a16="http://schemas.microsoft.com/office/drawing/2014/main" id="{8B8CF5D0-A1B4-520D-A79B-7E8444B90F4F}"/>
+              </a:ext>
+            </a:extLst>
+          </p:cNvPr>
+          <p:cNvSpPr>
+            <a:spLocks noGrp="1"/>
+          </p:cNvSpPr>
+          <p:nvPr>
+            <p:ph type="body" sz="quarter" idx="3"/>
+          </p:nvPr>
+        </p:nvSpPr>
+        <p:spPr/>
+        <p:txBody>
+          <a:bodyPr/>
+          <a:lstStyle/>
+          <a:p>
+            <a:r>
+              <a:rPr lang="en-US" dirty="0"/>
+              <a:t>Request Body :</a:t>
+            </a:r>
+          </a:p>
+        </p:txBody>
+      </p:sp>
+      <p:sp>
+        <p:nvSpPr>
+          <p:cNvPr id="6" name="Content Placeholder 5">
+            <a:extLst>
+              <a:ext uri="{FF2B5EF4-FFF2-40B4-BE49-F238E27FC236}">
+                <a16:creationId xmlns:a16="http://schemas.microsoft.com/office/drawing/2014/main" id="{0AEED4D4-902C-6FAD-14EC-A037480DCD68}"/>
+              </a:ext>
+            </a:extLst>
+          </p:cNvPr>
+          <p:cNvSpPr>
+            <a:spLocks noGrp="1"/>
+          </p:cNvSpPr>
+          <p:nvPr>
+            <p:ph sz="quarter" idx="4"/>
+          </p:nvPr>
+        </p:nvSpPr>
+        <p:spPr/>
+        <p:txBody>
+          <a:bodyPr>
+            <a:normAutofit fontScale="92500" lnSpcReduction="10000"/>
+          </a:bodyPr>
+          <a:lstStyle/>
+          <a:p>
+            <a:pPr marL="0" indent="0">
+              <a:buNone/>
+            </a:pPr>
+            <a:r>
+              <a:rPr lang="en-US" dirty="0"/>
+              <a:t>user:</a:t>
+            </a:r>
+          </a:p>
+          <a:p>
+            <a:pPr marL="0" indent="0">
+              <a:buNone/>
+            </a:pPr>
+            <a:r>
+              <a:rPr lang="en-US" dirty="0"/>
+              <a:t>{ </a:t>
+            </a:r>
+          </a:p>
+          <a:p>
+            <a:pPr marL="0" indent="0">
+              <a:buNone/>
+            </a:pPr>
+            <a:r>
+              <a:rPr lang="en-US" dirty="0"/>
+              <a:t>"id": 1,</a:t>
+            </a:r>
+          </a:p>
+          <a:p>
+            <a:pPr marL="0" indent="0">
+              <a:buNone/>
+            </a:pPr>
+            <a:r>
+              <a:rPr lang="en-US" dirty="0"/>
+              <a:t> "</a:t>
+            </a:r>
+            <a:r>
+              <a:rPr lang="en-US" dirty="0" err="1"/>
+              <a:t>fullName</a:t>
+            </a:r>
+            <a:r>
+              <a:rPr lang="en-US" dirty="0"/>
+              <a:t>": "John Doe",</a:t>
+            </a:r>
+          </a:p>
+          <a:p>
+            <a:pPr marL="0" indent="0">
+              <a:buNone/>
+            </a:pPr>
+            <a:r>
+              <a:rPr lang="en-US" dirty="0"/>
+              <a:t> "username": "</a:t>
+            </a:r>
+            <a:r>
+              <a:rPr lang="en-US" dirty="0" err="1"/>
+              <a:t>johndoe</a:t>
+            </a:r>
+            <a:r>
+              <a:rPr lang="en-US" dirty="0"/>
+              <a:t>",</a:t>
+            </a:r>
+          </a:p>
+          <a:p>
+            <a:pPr marL="0" indent="0">
+              <a:buNone/>
+            </a:pPr>
+            <a:r>
+              <a:rPr lang="en-US" dirty="0"/>
+              <a:t> "email": "john@example.com",</a:t>
+            </a:r>
+          </a:p>
+          <a:p>
+            <a:pPr marL="0" indent="0">
+              <a:buNone/>
+            </a:pPr>
+            <a:r>
+              <a:rPr lang="en-US" dirty="0"/>
+              <a:t> "gender": "MALE",</a:t>
+            </a:r>
+          </a:p>
+          <a:p>
+            <a:pPr marL="0" indent="0">
+              <a:buNone/>
+            </a:pPr>
+            <a:r>
+              <a:rPr lang="en-US" dirty="0"/>
+              <a:t> "dob": "1990-05-15“</a:t>
+            </a:r>
+          </a:p>
+          <a:p>
+            <a:pPr marL="0" indent="0">
+              <a:buNone/>
+            </a:pPr>
+            <a:r>
+              <a:rPr lang="en-US" dirty="0"/>
+              <a:t> }</a:t>
+            </a:r>
           </a:p>
         </p:txBody>
       </p:sp>
@@ -8129,17 +8655,47 @@
       </p:sp>
       <p:sp>
         <p:nvSpPr>
+          <p:cNvPr id="4" name="Text Placeholder 3">
+            <a:extLst>
+              <a:ext uri="{FF2B5EF4-FFF2-40B4-BE49-F238E27FC236}">
+                <a16:creationId xmlns:a16="http://schemas.microsoft.com/office/drawing/2014/main" id="{B652F7C3-FBE7-BAF6-8C0F-1B1AA11E5F10}"/>
+              </a:ext>
+            </a:extLst>
+          </p:cNvPr>
+          <p:cNvSpPr>
+            <a:spLocks noGrp="1"/>
+          </p:cNvSpPr>
+          <p:nvPr>
+            <p:ph type="body" idx="1"/>
+          </p:nvPr>
+        </p:nvSpPr>
+        <p:spPr/>
+        <p:txBody>
+          <a:bodyPr/>
+          <a:lstStyle/>
+          <a:p>
+            <a:r>
+              <a:rPr lang="en-US" dirty="0"/>
+              <a:t>Details</a:t>
+            </a:r>
+          </a:p>
+        </p:txBody>
+      </p:sp>
+      <p:sp>
+        <p:nvSpPr>
           <p:cNvPr id="3" name="Content Placeholder 2"/>
           <p:cNvSpPr>
             <a:spLocks noGrp="1"/>
           </p:cNvSpPr>
           <p:nvPr>
-            <p:ph idx="1"/>
-          </p:nvPr>
-        </p:nvSpPr>
-        <p:spPr/>
-        <p:txBody>
-          <a:bodyPr/>
+            <p:ph sz="half" idx="2"/>
+          </p:nvPr>
+        </p:nvSpPr>
+        <p:spPr/>
+        <p:txBody>
+          <a:bodyPr>
+            <a:normAutofit fontScale="85000" lnSpcReduction="10000"/>
+          </a:bodyPr>
           <a:lstStyle/>
           <a:p>
             <a:r>
@@ -8163,6 +8719,191 @@
           </a:p>
           <a:p>
             <a:endParaRPr/>
+          </a:p>
+        </p:txBody>
+      </p:sp>
+      <p:sp>
+        <p:nvSpPr>
+          <p:cNvPr id="5" name="Text Placeholder 4">
+            <a:extLst>
+              <a:ext uri="{FF2B5EF4-FFF2-40B4-BE49-F238E27FC236}">
+                <a16:creationId xmlns:a16="http://schemas.microsoft.com/office/drawing/2014/main" id="{FD892DC5-895B-DFD2-9DC7-B94EE651BC86}"/>
+              </a:ext>
+            </a:extLst>
+          </p:cNvPr>
+          <p:cNvSpPr>
+            <a:spLocks noGrp="1"/>
+          </p:cNvSpPr>
+          <p:nvPr>
+            <p:ph type="body" sz="quarter" idx="3"/>
+          </p:nvPr>
+        </p:nvSpPr>
+        <p:spPr/>
+        <p:txBody>
+          <a:bodyPr/>
+          <a:lstStyle/>
+          <a:p>
+            <a:r>
+              <a:rPr lang="en-US" dirty="0"/>
+              <a:t>Response : event</a:t>
+            </a:r>
+          </a:p>
+        </p:txBody>
+      </p:sp>
+      <p:sp>
+        <p:nvSpPr>
+          <p:cNvPr id="6" name="Content Placeholder 5">
+            <a:extLst>
+              <a:ext uri="{FF2B5EF4-FFF2-40B4-BE49-F238E27FC236}">
+                <a16:creationId xmlns:a16="http://schemas.microsoft.com/office/drawing/2014/main" id="{A7D8DC3D-DA37-B88B-3E1C-3EDF3220E3FC}"/>
+              </a:ext>
+            </a:extLst>
+          </p:cNvPr>
+          <p:cNvSpPr>
+            <a:spLocks noGrp="1"/>
+          </p:cNvSpPr>
+          <p:nvPr>
+            <p:ph sz="quarter" idx="4"/>
+          </p:nvPr>
+        </p:nvSpPr>
+        <p:spPr/>
+        <p:txBody>
+          <a:bodyPr>
+            <a:normAutofit fontScale="85000" lnSpcReduction="10000"/>
+          </a:bodyPr>
+          <a:lstStyle/>
+          <a:p>
+            <a:pPr marL="0" indent="0">
+              <a:buNone/>
+            </a:pPr>
+            <a:r>
+              <a:rPr lang="en-US" dirty="0"/>
+              <a:t>{</a:t>
+            </a:r>
+          </a:p>
+          <a:p>
+            <a:pPr marL="0" indent="0">
+              <a:buNone/>
+            </a:pPr>
+            <a:r>
+              <a:rPr lang="en-US" dirty="0"/>
+              <a:t>  "name": "Charity Marathon",</a:t>
+            </a:r>
+          </a:p>
+          <a:p>
+            <a:pPr marL="0" indent="0">
+              <a:buNone/>
+            </a:pPr>
+            <a:r>
+              <a:rPr lang="en-US" dirty="0"/>
+              <a:t>  "date": "2024-06-15",</a:t>
+            </a:r>
+          </a:p>
+          <a:p>
+            <a:pPr marL="0" indent="0">
+              <a:buNone/>
+            </a:pPr>
+            <a:r>
+              <a:rPr lang="en-US" dirty="0"/>
+              <a:t>  "</a:t>
+            </a:r>
+            <a:r>
+              <a:rPr lang="en-US" dirty="0" err="1"/>
+              <a:t>dayOfWeek</a:t>
+            </a:r>
+            <a:r>
+              <a:rPr lang="en-US" dirty="0"/>
+              <a:t>": "SATURDAY",</a:t>
+            </a:r>
+          </a:p>
+          <a:p>
+            <a:pPr marL="0" indent="0">
+              <a:buNone/>
+            </a:pPr>
+            <a:r>
+              <a:rPr lang="en-US" dirty="0"/>
+              <a:t>  "</a:t>
+            </a:r>
+            <a:r>
+              <a:rPr lang="en-US" dirty="0" err="1"/>
+              <a:t>fromLocation</a:t>
+            </a:r>
+            <a:r>
+              <a:rPr lang="en-US" dirty="0"/>
+              <a:t>": "City Park",</a:t>
+            </a:r>
+          </a:p>
+          <a:p>
+            <a:pPr marL="0" indent="0">
+              <a:buNone/>
+            </a:pPr>
+            <a:r>
+              <a:rPr lang="en-US" dirty="0"/>
+              <a:t>  "</a:t>
+            </a:r>
+            <a:r>
+              <a:rPr lang="en-US" dirty="0" err="1"/>
+              <a:t>toLocation</a:t>
+            </a:r>
+            <a:r>
+              <a:rPr lang="en-US" dirty="0"/>
+              <a:t>": "Downtown",</a:t>
+            </a:r>
+          </a:p>
+          <a:p>
+            <a:pPr marL="0" indent="0">
+              <a:buNone/>
+            </a:pPr>
+            <a:r>
+              <a:rPr lang="en-US" dirty="0"/>
+              <a:t>  "</a:t>
+            </a:r>
+            <a:r>
+              <a:rPr lang="en-US" dirty="0" err="1"/>
+              <a:t>startTime</a:t>
+            </a:r>
+            <a:r>
+              <a:rPr lang="en-US" dirty="0"/>
+              <a:t>": "2024-06-15T08:00:00Z",</a:t>
+            </a:r>
+          </a:p>
+          <a:p>
+            <a:pPr marL="0" indent="0">
+              <a:buNone/>
+            </a:pPr>
+            <a:r>
+              <a:rPr lang="en-US" dirty="0"/>
+              <a:t>  "duration": 180,</a:t>
+            </a:r>
+          </a:p>
+          <a:p>
+            <a:pPr marL="0" indent="0">
+              <a:buNone/>
+            </a:pPr>
+            <a:r>
+              <a:rPr lang="en-US" dirty="0"/>
+              <a:t>  "</a:t>
+            </a:r>
+            <a:r>
+              <a:rPr lang="en-US" dirty="0" err="1"/>
+              <a:t>distanceInKM</a:t>
+            </a:r>
+            <a:r>
+              <a:rPr lang="en-US" dirty="0"/>
+              <a:t>": 10</a:t>
+            </a:r>
+          </a:p>
+          <a:p>
+            <a:pPr marL="0" indent="0">
+              <a:buNone/>
+            </a:pPr>
+            <a:r>
+              <a:rPr lang="en-US" dirty="0"/>
+              <a:t>}</a:t>
+            </a:r>
+          </a:p>
+          <a:p>
+            <a:endParaRPr lang="en-US" dirty="0"/>
           </a:p>
         </p:txBody>
       </p:sp>
@@ -8222,45 +8963,275 @@
       </p:sp>
       <p:sp>
         <p:nvSpPr>
+          <p:cNvPr id="4" name="Text Placeholder 3">
+            <a:extLst>
+              <a:ext uri="{FF2B5EF4-FFF2-40B4-BE49-F238E27FC236}">
+                <a16:creationId xmlns:a16="http://schemas.microsoft.com/office/drawing/2014/main" id="{E22D676E-624E-2D46-C4E1-3E096FC5F6AA}"/>
+              </a:ext>
+            </a:extLst>
+          </p:cNvPr>
+          <p:cNvSpPr>
+            <a:spLocks noGrp="1"/>
+          </p:cNvSpPr>
+          <p:nvPr>
+            <p:ph type="body" idx="1"/>
+          </p:nvPr>
+        </p:nvSpPr>
+        <p:spPr/>
+        <p:txBody>
+          <a:bodyPr/>
+          <a:lstStyle/>
+          <a:p>
+            <a:r>
+              <a:rPr lang="en-US" dirty="0"/>
+              <a:t>Description</a:t>
+            </a:r>
+          </a:p>
+        </p:txBody>
+      </p:sp>
+      <p:sp>
+        <p:nvSpPr>
           <p:cNvPr id="3" name="Content Placeholder 2"/>
           <p:cNvSpPr>
             <a:spLocks noGrp="1"/>
           </p:cNvSpPr>
           <p:nvPr>
-            <p:ph idx="1"/>
-          </p:nvPr>
-        </p:nvSpPr>
-        <p:spPr/>
-        <p:txBody>
-          <a:bodyPr/>
-          <a:lstStyle/>
-          <a:p>
-            <a:r>
-              <a:t>Operation ID: updateEvent</a:t>
-            </a:r>
-          </a:p>
-          <a:p>
-            <a:r>
+            <p:ph sz="half" idx="2"/>
+          </p:nvPr>
+        </p:nvSpPr>
+        <p:spPr/>
+        <p:txBody>
+          <a:bodyPr>
+            <a:normAutofit fontScale="85000" lnSpcReduction="10000"/>
+          </a:bodyPr>
+          <a:lstStyle/>
+          <a:p>
+            <a:r>
+              <a:rPr dirty="0"/>
+              <a:t>Operation ID: </a:t>
+            </a:r>
+            <a:r>
+              <a:rPr dirty="0" err="1"/>
+              <a:t>updateEvent</a:t>
+            </a:r>
+            <a:endParaRPr dirty="0"/>
+          </a:p>
+          <a:p>
+            <a:r>
+              <a:rPr dirty="0"/>
               <a:t>Parameters: id (path)</a:t>
             </a:r>
           </a:p>
           <a:p>
             <a:r>
-              <a:t>Request Body: {'application/json': {'schema': {'$ref': '#/components/schemas/Event'}}}</a:t>
-            </a:r>
-          </a:p>
-          <a:p>
-            <a:r>
+              <a:rPr dirty="0"/>
+              <a:t>Request Body:</a:t>
+            </a:r>
+            <a:r>
+              <a:rPr lang="en-US" dirty="0"/>
+              <a:t> event</a:t>
+            </a:r>
+            <a:endParaRPr dirty="0"/>
+          </a:p>
+          <a:p>
+            <a:r>
+              <a:rPr dirty="0"/>
               <a:t>Responses:</a:t>
             </a:r>
           </a:p>
           <a:p>
             <a:r>
+              <a:rPr dirty="0"/>
               <a:t>  200: OK</a:t>
             </a:r>
           </a:p>
           <a:p>
-            <a:endParaRPr/>
+            <a:endParaRPr dirty="0"/>
+          </a:p>
+        </p:txBody>
+      </p:sp>
+      <p:sp>
+        <p:nvSpPr>
+          <p:cNvPr id="5" name="Text Placeholder 4">
+            <a:extLst>
+              <a:ext uri="{FF2B5EF4-FFF2-40B4-BE49-F238E27FC236}">
+                <a16:creationId xmlns:a16="http://schemas.microsoft.com/office/drawing/2014/main" id="{916721DE-82EB-3C00-6A13-A4363AB239AE}"/>
+              </a:ext>
+            </a:extLst>
+          </p:cNvPr>
+          <p:cNvSpPr>
+            <a:spLocks noGrp="1"/>
+          </p:cNvSpPr>
+          <p:nvPr>
+            <p:ph type="body" sz="quarter" idx="3"/>
+          </p:nvPr>
+        </p:nvSpPr>
+        <p:spPr/>
+        <p:txBody>
+          <a:bodyPr/>
+          <a:lstStyle/>
+          <a:p>
+            <a:r>
+              <a:rPr lang="en-US" dirty="0"/>
+              <a:t>Request Body</a:t>
+            </a:r>
+          </a:p>
+        </p:txBody>
+      </p:sp>
+      <p:sp>
+        <p:nvSpPr>
+          <p:cNvPr id="6" name="Content Placeholder 5">
+            <a:extLst>
+              <a:ext uri="{FF2B5EF4-FFF2-40B4-BE49-F238E27FC236}">
+                <a16:creationId xmlns:a16="http://schemas.microsoft.com/office/drawing/2014/main" id="{B9DB1241-075B-FD17-0D45-91CA9B53A91A}"/>
+              </a:ext>
+            </a:extLst>
+          </p:cNvPr>
+          <p:cNvSpPr>
+            <a:spLocks noGrp="1"/>
+          </p:cNvSpPr>
+          <p:nvPr>
+            <p:ph sz="quarter" idx="4"/>
+          </p:nvPr>
+        </p:nvSpPr>
+        <p:spPr/>
+        <p:txBody>
+          <a:bodyPr>
+            <a:normAutofit fontScale="85000" lnSpcReduction="10000"/>
+          </a:bodyPr>
+          <a:lstStyle/>
+          <a:p>
+            <a:pPr marL="0" indent="0">
+              <a:buNone/>
+            </a:pPr>
+            <a:r>
+              <a:rPr lang="en-US" dirty="0"/>
+              <a:t>{</a:t>
+            </a:r>
+          </a:p>
+          <a:p>
+            <a:pPr marL="0" indent="0">
+              <a:buNone/>
+            </a:pPr>
+            <a:r>
+              <a:rPr lang="en-US" dirty="0"/>
+              <a:t>  "name": "Charity Marathon",</a:t>
+            </a:r>
+          </a:p>
+          <a:p>
+            <a:pPr marL="0" indent="0">
+              <a:buNone/>
+            </a:pPr>
+            <a:r>
+              <a:rPr lang="en-US" dirty="0"/>
+              <a:t>  "date": "2024-06-15",</a:t>
+            </a:r>
+          </a:p>
+          <a:p>
+            <a:pPr marL="0" indent="0">
+              <a:buNone/>
+            </a:pPr>
+            <a:r>
+              <a:rPr lang="en-US" dirty="0"/>
+              <a:t>  "</a:t>
+            </a:r>
+            <a:r>
+              <a:rPr lang="en-US" dirty="0" err="1"/>
+              <a:t>dayOfWeek</a:t>
+            </a:r>
+            <a:r>
+              <a:rPr lang="en-US" dirty="0"/>
+              <a:t>": "SATURDAY",</a:t>
+            </a:r>
+          </a:p>
+          <a:p>
+            <a:pPr marL="0" indent="0">
+              <a:buNone/>
+            </a:pPr>
+            <a:r>
+              <a:rPr lang="en-US" dirty="0"/>
+              <a:t>  "</a:t>
+            </a:r>
+            <a:r>
+              <a:rPr lang="en-US" dirty="0" err="1"/>
+              <a:t>fromLocation</a:t>
+            </a:r>
+            <a:r>
+              <a:rPr lang="en-US" dirty="0"/>
+              <a:t>": "City Park",</a:t>
+            </a:r>
+          </a:p>
+          <a:p>
+            <a:pPr marL="0" indent="0">
+              <a:buNone/>
+            </a:pPr>
+            <a:r>
+              <a:rPr lang="en-US" dirty="0"/>
+              <a:t>  "</a:t>
+            </a:r>
+            <a:r>
+              <a:rPr lang="en-US" dirty="0" err="1"/>
+              <a:t>toLocation</a:t>
+            </a:r>
+            <a:r>
+              <a:rPr lang="en-US" dirty="0"/>
+              <a:t>": "Downtown",</a:t>
+            </a:r>
+          </a:p>
+          <a:p>
+            <a:pPr marL="0" indent="0">
+              <a:buNone/>
+            </a:pPr>
+            <a:r>
+              <a:rPr lang="en-US" dirty="0"/>
+              <a:t>  "</a:t>
+            </a:r>
+            <a:r>
+              <a:rPr lang="en-US" dirty="0" err="1"/>
+              <a:t>startTime</a:t>
+            </a:r>
+            <a:r>
+              <a:rPr lang="en-US" dirty="0"/>
+              <a:t>": "2024-06-15T08:00:00Z",</a:t>
+            </a:r>
+          </a:p>
+          <a:p>
+            <a:pPr marL="0" indent="0">
+              <a:buNone/>
+            </a:pPr>
+            <a:r>
+              <a:rPr lang="en-US" dirty="0"/>
+              <a:t>  "duration": 180,</a:t>
+            </a:r>
+          </a:p>
+          <a:p>
+            <a:pPr marL="0" indent="0">
+              <a:buNone/>
+            </a:pPr>
+            <a:r>
+              <a:rPr lang="en-US" dirty="0"/>
+              <a:t>  "</a:t>
+            </a:r>
+            <a:r>
+              <a:rPr lang="en-US" dirty="0" err="1"/>
+              <a:t>distanceInKM</a:t>
+            </a:r>
+            <a:r>
+              <a:rPr lang="en-US" dirty="0"/>
+              <a:t>": 10</a:t>
+            </a:r>
+          </a:p>
+          <a:p>
+            <a:pPr marL="0" indent="0">
+              <a:buNone/>
+            </a:pPr>
+            <a:r>
+              <a:rPr lang="en-US" dirty="0"/>
+              <a:t>}</a:t>
+            </a:r>
+          </a:p>
+          <a:p>
+            <a:endParaRPr lang="en-US" dirty="0"/>
           </a:p>
         </p:txBody>
       </p:sp>
@@ -8413,17 +9384,47 @@
       </p:sp>
       <p:sp>
         <p:nvSpPr>
+          <p:cNvPr id="4" name="Text Placeholder 3">
+            <a:extLst>
+              <a:ext uri="{FF2B5EF4-FFF2-40B4-BE49-F238E27FC236}">
+                <a16:creationId xmlns:a16="http://schemas.microsoft.com/office/drawing/2014/main" id="{33FD2DBF-D271-96B1-9122-143F5F163812}"/>
+              </a:ext>
+            </a:extLst>
+          </p:cNvPr>
+          <p:cNvSpPr>
+            <a:spLocks noGrp="1"/>
+          </p:cNvSpPr>
+          <p:nvPr>
+            <p:ph type="body" idx="1"/>
+          </p:nvPr>
+        </p:nvSpPr>
+        <p:spPr/>
+        <p:txBody>
+          <a:bodyPr/>
+          <a:lstStyle/>
+          <a:p>
+            <a:r>
+              <a:rPr lang="en-US" dirty="0"/>
+              <a:t>Description</a:t>
+            </a:r>
+          </a:p>
+        </p:txBody>
+      </p:sp>
+      <p:sp>
+        <p:nvSpPr>
           <p:cNvPr id="3" name="Content Placeholder 2"/>
           <p:cNvSpPr>
             <a:spLocks noGrp="1"/>
           </p:cNvSpPr>
           <p:nvPr>
-            <p:ph idx="1"/>
-          </p:nvPr>
-        </p:nvSpPr>
-        <p:spPr/>
-        <p:txBody>
-          <a:bodyPr/>
+            <p:ph sz="half" idx="2"/>
+          </p:nvPr>
+        </p:nvSpPr>
+        <p:spPr/>
+        <p:txBody>
+          <a:bodyPr>
+            <a:normAutofit fontScale="85000" lnSpcReduction="10000"/>
+          </a:bodyPr>
           <a:lstStyle/>
           <a:p>
             <a:r>
@@ -8447,6 +9448,167 @@
           </a:p>
           <a:p>
             <a:endParaRPr/>
+          </a:p>
+        </p:txBody>
+      </p:sp>
+      <p:sp>
+        <p:nvSpPr>
+          <p:cNvPr id="5" name="Text Placeholder 4">
+            <a:extLst>
+              <a:ext uri="{FF2B5EF4-FFF2-40B4-BE49-F238E27FC236}">
+                <a16:creationId xmlns:a16="http://schemas.microsoft.com/office/drawing/2014/main" id="{260899CD-AF37-EEB0-908A-B3919C9F8F74}"/>
+              </a:ext>
+            </a:extLst>
+          </p:cNvPr>
+          <p:cNvSpPr>
+            <a:spLocks noGrp="1"/>
+          </p:cNvSpPr>
+          <p:nvPr>
+            <p:ph type="body" sz="quarter" idx="3"/>
+          </p:nvPr>
+        </p:nvSpPr>
+        <p:spPr/>
+        <p:txBody>
+          <a:bodyPr/>
+          <a:lstStyle/>
+          <a:p>
+            <a:r>
+              <a:rPr lang="en-US" dirty="0"/>
+              <a:t>Response body</a:t>
+            </a:r>
+          </a:p>
+        </p:txBody>
+      </p:sp>
+      <p:sp>
+        <p:nvSpPr>
+          <p:cNvPr id="6" name="Content Placeholder 5">
+            <a:extLst>
+              <a:ext uri="{FF2B5EF4-FFF2-40B4-BE49-F238E27FC236}">
+                <a16:creationId xmlns:a16="http://schemas.microsoft.com/office/drawing/2014/main" id="{C820F389-9FDF-805A-927B-79053629E8F2}"/>
+              </a:ext>
+            </a:extLst>
+          </p:cNvPr>
+          <p:cNvSpPr>
+            <a:spLocks noGrp="1"/>
+          </p:cNvSpPr>
+          <p:nvPr>
+            <p:ph sz="quarter" idx="4"/>
+          </p:nvPr>
+        </p:nvSpPr>
+        <p:spPr/>
+        <p:txBody>
+          <a:bodyPr>
+            <a:normAutofit fontScale="85000" lnSpcReduction="10000"/>
+          </a:bodyPr>
+          <a:lstStyle/>
+          <a:p>
+            <a:pPr marL="0" indent="0">
+              <a:buNone/>
+            </a:pPr>
+            <a:r>
+              <a:rPr lang="en-US" dirty="0"/>
+              <a:t>{</a:t>
+            </a:r>
+          </a:p>
+          <a:p>
+            <a:pPr marL="0" indent="0">
+              <a:buNone/>
+            </a:pPr>
+            <a:r>
+              <a:rPr lang="en-US" dirty="0"/>
+              <a:t>  "</a:t>
+            </a:r>
+            <a:r>
+              <a:rPr lang="en-US" dirty="0" err="1"/>
+              <a:t>totalPages</a:t>
+            </a:r>
+            <a:r>
+              <a:rPr lang="en-US" dirty="0"/>
+              <a:t>": 5,</a:t>
+            </a:r>
+          </a:p>
+          <a:p>
+            <a:pPr marL="0" indent="0">
+              <a:buNone/>
+            </a:pPr>
+            <a:r>
+              <a:rPr lang="en-US" dirty="0"/>
+              <a:t>  "</a:t>
+            </a:r>
+            <a:r>
+              <a:rPr lang="en-US" dirty="0" err="1"/>
+              <a:t>totalElements</a:t>
+            </a:r>
+            <a:r>
+              <a:rPr lang="en-US" dirty="0"/>
+              <a:t>": 50,</a:t>
+            </a:r>
+          </a:p>
+          <a:p>
+            <a:pPr marL="0" indent="0">
+              <a:buNone/>
+            </a:pPr>
+            <a:r>
+              <a:rPr lang="en-US" dirty="0"/>
+              <a:t>  "size": 10,</a:t>
+            </a:r>
+          </a:p>
+          <a:p>
+            <a:pPr marL="0" indent="0">
+              <a:buNone/>
+            </a:pPr>
+            <a:r>
+              <a:rPr lang="en-US" dirty="0"/>
+              <a:t>  "number": 1,</a:t>
+            </a:r>
+          </a:p>
+          <a:p>
+            <a:pPr marL="0" indent="0">
+              <a:buNone/>
+            </a:pPr>
+            <a:r>
+              <a:rPr lang="en-US" dirty="0"/>
+              <a:t>"content": event[]</a:t>
+            </a:r>
+          </a:p>
+          <a:p>
+            <a:pPr marL="0" indent="0">
+              <a:buNone/>
+            </a:pPr>
+            <a:r>
+              <a:rPr lang="en-US" dirty="0"/>
+              <a:t>  "first": true,</a:t>
+            </a:r>
+          </a:p>
+          <a:p>
+            <a:pPr marL="0" indent="0">
+              <a:buNone/>
+            </a:pPr>
+            <a:r>
+              <a:rPr lang="en-US" dirty="0"/>
+              <a:t>  "last": false,</a:t>
+            </a:r>
+          </a:p>
+          <a:p>
+            <a:pPr marL="0" indent="0">
+              <a:buNone/>
+            </a:pPr>
+            <a:r>
+              <a:rPr lang="en-US" dirty="0"/>
+              <a:t>  "empty": false</a:t>
+            </a:r>
+          </a:p>
+          <a:p>
+            <a:pPr marL="0" indent="0">
+              <a:buNone/>
+            </a:pPr>
+            <a:r>
+              <a:rPr lang="en-US" dirty="0"/>
+              <a:t>}</a:t>
+            </a:r>
+          </a:p>
+          <a:p>
+            <a:endParaRPr lang="en-US" dirty="0"/>
           </a:p>
         </p:txBody>
       </p:sp>
@@ -8506,17 +9668,47 @@
       </p:sp>
       <p:sp>
         <p:nvSpPr>
+          <p:cNvPr id="4" name="Text Placeholder 3">
+            <a:extLst>
+              <a:ext uri="{FF2B5EF4-FFF2-40B4-BE49-F238E27FC236}">
+                <a16:creationId xmlns:a16="http://schemas.microsoft.com/office/drawing/2014/main" id="{CFC9163F-12AD-B83F-C853-2324705E48AF}"/>
+              </a:ext>
+            </a:extLst>
+          </p:cNvPr>
+          <p:cNvSpPr>
+            <a:spLocks noGrp="1"/>
+          </p:cNvSpPr>
+          <p:nvPr>
+            <p:ph type="body" idx="1"/>
+          </p:nvPr>
+        </p:nvSpPr>
+        <p:spPr/>
+        <p:txBody>
+          <a:bodyPr/>
+          <a:lstStyle/>
+          <a:p>
+            <a:r>
+              <a:rPr lang="en-US" dirty="0"/>
+              <a:t>Description</a:t>
+            </a:r>
+          </a:p>
+        </p:txBody>
+      </p:sp>
+      <p:sp>
+        <p:nvSpPr>
           <p:cNvPr id="3" name="Content Placeholder 2"/>
           <p:cNvSpPr>
             <a:spLocks noGrp="1"/>
           </p:cNvSpPr>
           <p:nvPr>
-            <p:ph idx="1"/>
-          </p:nvPr>
-        </p:nvSpPr>
-        <p:spPr/>
-        <p:txBody>
-          <a:bodyPr/>
+            <p:ph sz="half" idx="2"/>
+          </p:nvPr>
+        </p:nvSpPr>
+        <p:spPr/>
+        <p:txBody>
+          <a:bodyPr>
+            <a:normAutofit fontScale="85000" lnSpcReduction="10000"/>
+          </a:bodyPr>
           <a:lstStyle/>
           <a:p>
             <a:r>
@@ -8540,6 +9732,167 @@
           </a:p>
           <a:p>
             <a:endParaRPr/>
+          </a:p>
+        </p:txBody>
+      </p:sp>
+      <p:sp>
+        <p:nvSpPr>
+          <p:cNvPr id="5" name="Text Placeholder 4">
+            <a:extLst>
+              <a:ext uri="{FF2B5EF4-FFF2-40B4-BE49-F238E27FC236}">
+                <a16:creationId xmlns:a16="http://schemas.microsoft.com/office/drawing/2014/main" id="{73D644BE-C379-09AA-C595-0A61CB2A014B}"/>
+              </a:ext>
+            </a:extLst>
+          </p:cNvPr>
+          <p:cNvSpPr>
+            <a:spLocks noGrp="1"/>
+          </p:cNvSpPr>
+          <p:nvPr>
+            <p:ph type="body" sz="quarter" idx="3"/>
+          </p:nvPr>
+        </p:nvSpPr>
+        <p:spPr/>
+        <p:txBody>
+          <a:bodyPr/>
+          <a:lstStyle/>
+          <a:p>
+            <a:r>
+              <a:rPr lang="en-US" dirty="0"/>
+              <a:t>Response body </a:t>
+            </a:r>
+          </a:p>
+        </p:txBody>
+      </p:sp>
+      <p:sp>
+        <p:nvSpPr>
+          <p:cNvPr id="6" name="Content Placeholder 5">
+            <a:extLst>
+              <a:ext uri="{FF2B5EF4-FFF2-40B4-BE49-F238E27FC236}">
+                <a16:creationId xmlns:a16="http://schemas.microsoft.com/office/drawing/2014/main" id="{5690AA5A-2F28-38B0-AF00-CE7AF553B619}"/>
+              </a:ext>
+            </a:extLst>
+          </p:cNvPr>
+          <p:cNvSpPr>
+            <a:spLocks noGrp="1"/>
+          </p:cNvSpPr>
+          <p:nvPr>
+            <p:ph sz="quarter" idx="4"/>
+          </p:nvPr>
+        </p:nvSpPr>
+        <p:spPr/>
+        <p:txBody>
+          <a:bodyPr>
+            <a:normAutofit fontScale="85000" lnSpcReduction="10000"/>
+          </a:bodyPr>
+          <a:lstStyle/>
+          <a:p>
+            <a:pPr marL="0" indent="0">
+              <a:buNone/>
+            </a:pPr>
+            <a:r>
+              <a:rPr lang="en-US" dirty="0"/>
+              <a:t>{</a:t>
+            </a:r>
+          </a:p>
+          <a:p>
+            <a:pPr marL="0" indent="0">
+              <a:buNone/>
+            </a:pPr>
+            <a:r>
+              <a:rPr lang="en-US" dirty="0"/>
+              <a:t>  "</a:t>
+            </a:r>
+            <a:r>
+              <a:rPr lang="en-US" dirty="0" err="1"/>
+              <a:t>totalPages</a:t>
+            </a:r>
+            <a:r>
+              <a:rPr lang="en-US" dirty="0"/>
+              <a:t>": 5,</a:t>
+            </a:r>
+          </a:p>
+          <a:p>
+            <a:pPr marL="0" indent="0">
+              <a:buNone/>
+            </a:pPr>
+            <a:r>
+              <a:rPr lang="en-US" dirty="0"/>
+              <a:t>  "</a:t>
+            </a:r>
+            <a:r>
+              <a:rPr lang="en-US" dirty="0" err="1"/>
+              <a:t>totalElements</a:t>
+            </a:r>
+            <a:r>
+              <a:rPr lang="en-US" dirty="0"/>
+              <a:t>": 50,</a:t>
+            </a:r>
+          </a:p>
+          <a:p>
+            <a:pPr marL="0" indent="0">
+              <a:buNone/>
+            </a:pPr>
+            <a:r>
+              <a:rPr lang="en-US" dirty="0"/>
+              <a:t>  "size": 10,</a:t>
+            </a:r>
+          </a:p>
+          <a:p>
+            <a:pPr marL="0" indent="0">
+              <a:buNone/>
+            </a:pPr>
+            <a:r>
+              <a:rPr lang="en-US" dirty="0"/>
+              <a:t>  "number": 1,</a:t>
+            </a:r>
+          </a:p>
+          <a:p>
+            <a:pPr marL="0" indent="0">
+              <a:buNone/>
+            </a:pPr>
+            <a:r>
+              <a:rPr lang="en-US" dirty="0"/>
+              <a:t>"content": event[]</a:t>
+            </a:r>
+          </a:p>
+          <a:p>
+            <a:pPr marL="0" indent="0">
+              <a:buNone/>
+            </a:pPr>
+            <a:r>
+              <a:rPr lang="en-US" dirty="0"/>
+              <a:t>  "first": true,</a:t>
+            </a:r>
+          </a:p>
+          <a:p>
+            <a:pPr marL="0" indent="0">
+              <a:buNone/>
+            </a:pPr>
+            <a:r>
+              <a:rPr lang="en-US" dirty="0"/>
+              <a:t>  "last": false,</a:t>
+            </a:r>
+          </a:p>
+          <a:p>
+            <a:pPr marL="0" indent="0">
+              <a:buNone/>
+            </a:pPr>
+            <a:r>
+              <a:rPr lang="en-US" dirty="0"/>
+              <a:t>  "empty": false</a:t>
+            </a:r>
+          </a:p>
+          <a:p>
+            <a:pPr marL="0" indent="0">
+              <a:buNone/>
+            </a:pPr>
+            <a:r>
+              <a:rPr lang="en-US" dirty="0"/>
+              <a:t>}</a:t>
+            </a:r>
+          </a:p>
+          <a:p>
+            <a:endParaRPr lang="en-US" dirty="0"/>
           </a:p>
         </p:txBody>
       </p:sp>
@@ -8586,12 +9939,18 @@
             <p:ph type="title"/>
           </p:nvPr>
         </p:nvSpPr>
-        <p:spPr/>
-        <p:txBody>
-          <a:bodyPr/>
-          <a:lstStyle/>
-          <a:p>
-            <a:r>
+        <p:spPr>
+          <a:xfrm>
+            <a:off x="790049" y="467914"/>
+            <a:ext cx="8596668" cy="1320800"/>
+          </a:xfrm>
+        </p:spPr>
+        <p:txBody>
+          <a:bodyPr/>
+          <a:lstStyle/>
+          <a:p>
+            <a:r>
+              <a:rPr dirty="0"/>
               <a:t>GET /event/future</a:t>
             </a:r>
           </a:p>
@@ -8599,12 +9958,40 @@
       </p:sp>
       <p:sp>
         <p:nvSpPr>
+          <p:cNvPr id="4" name="Text Placeholder 3">
+            <a:extLst>
+              <a:ext uri="{FF2B5EF4-FFF2-40B4-BE49-F238E27FC236}">
+                <a16:creationId xmlns:a16="http://schemas.microsoft.com/office/drawing/2014/main" id="{28C096C6-A82B-1288-610B-B4AE69A807A3}"/>
+              </a:ext>
+            </a:extLst>
+          </p:cNvPr>
+          <p:cNvSpPr>
+            <a:spLocks noGrp="1"/>
+          </p:cNvSpPr>
+          <p:nvPr>
+            <p:ph type="body" idx="1"/>
+          </p:nvPr>
+        </p:nvSpPr>
+        <p:spPr/>
+        <p:txBody>
+          <a:bodyPr/>
+          <a:lstStyle/>
+          <a:p>
+            <a:r>
+              <a:rPr lang="en-US" dirty="0"/>
+              <a:t>Description</a:t>
+            </a:r>
+          </a:p>
+        </p:txBody>
+      </p:sp>
+      <p:sp>
+        <p:nvSpPr>
           <p:cNvPr id="3" name="Content Placeholder 2"/>
           <p:cNvSpPr>
             <a:spLocks noGrp="1"/>
           </p:cNvSpPr>
           <p:nvPr>
-            <p:ph idx="1"/>
+            <p:ph sz="half" idx="2"/>
           </p:nvPr>
         </p:nvSpPr>
         <p:spPr/>
@@ -8633,6 +10020,177 @@
           </a:p>
           <a:p>
             <a:endParaRPr/>
+          </a:p>
+        </p:txBody>
+      </p:sp>
+      <p:sp>
+        <p:nvSpPr>
+          <p:cNvPr id="9" name="Text Placeholder 4">
+            <a:extLst>
+              <a:ext uri="{FF2B5EF4-FFF2-40B4-BE49-F238E27FC236}">
+                <a16:creationId xmlns:a16="http://schemas.microsoft.com/office/drawing/2014/main" id="{177C9840-6BFE-A0D8-E4CC-E3B87EB07A3F}"/>
+              </a:ext>
+            </a:extLst>
+          </p:cNvPr>
+          <p:cNvSpPr>
+            <a:spLocks noGrp="1"/>
+          </p:cNvSpPr>
+          <p:nvPr>
+            <p:ph type="body" sz="quarter" idx="3"/>
+          </p:nvPr>
+        </p:nvSpPr>
+        <p:spPr>
+          <a:xfrm>
+            <a:off x="5088383" y="2160983"/>
+            <a:ext cx="4185618" cy="576262"/>
+          </a:xfrm>
+        </p:spPr>
+        <p:txBody>
+          <a:bodyPr/>
+          <a:lstStyle/>
+          <a:p>
+            <a:r>
+              <a:rPr lang="en-US" dirty="0"/>
+              <a:t>Response body </a:t>
+            </a:r>
+          </a:p>
+        </p:txBody>
+      </p:sp>
+      <p:sp>
+        <p:nvSpPr>
+          <p:cNvPr id="10" name="Content Placeholder 5">
+            <a:extLst>
+              <a:ext uri="{FF2B5EF4-FFF2-40B4-BE49-F238E27FC236}">
+                <a16:creationId xmlns:a16="http://schemas.microsoft.com/office/drawing/2014/main" id="{F1D1F45A-2DC5-34C2-39FA-D98F7AF2EA3D}"/>
+              </a:ext>
+            </a:extLst>
+          </p:cNvPr>
+          <p:cNvSpPr>
+            <a:spLocks noGrp="1"/>
+          </p:cNvSpPr>
+          <p:nvPr>
+            <p:ph sz="quarter" idx="4"/>
+          </p:nvPr>
+        </p:nvSpPr>
+        <p:spPr>
+          <a:xfrm>
+            <a:off x="5088384" y="2737245"/>
+            <a:ext cx="4185617" cy="3304117"/>
+          </a:xfrm>
+        </p:spPr>
+        <p:txBody>
+          <a:bodyPr>
+            <a:normAutofit fontScale="85000" lnSpcReduction="10000"/>
+          </a:bodyPr>
+          <a:lstStyle/>
+          <a:p>
+            <a:pPr marL="0" indent="0">
+              <a:buNone/>
+            </a:pPr>
+            <a:r>
+              <a:rPr lang="en-US" dirty="0"/>
+              <a:t>{</a:t>
+            </a:r>
+          </a:p>
+          <a:p>
+            <a:pPr marL="0" indent="0">
+              <a:buNone/>
+            </a:pPr>
+            <a:r>
+              <a:rPr lang="en-US" dirty="0"/>
+              <a:t>  "</a:t>
+            </a:r>
+            <a:r>
+              <a:rPr lang="en-US" dirty="0" err="1"/>
+              <a:t>totalPages</a:t>
+            </a:r>
+            <a:r>
+              <a:rPr lang="en-US" dirty="0"/>
+              <a:t>": 5,</a:t>
+            </a:r>
+          </a:p>
+          <a:p>
+            <a:pPr marL="0" indent="0">
+              <a:buNone/>
+            </a:pPr>
+            <a:r>
+              <a:rPr lang="en-US" dirty="0"/>
+              <a:t>  "</a:t>
+            </a:r>
+            <a:r>
+              <a:rPr lang="en-US" dirty="0" err="1"/>
+              <a:t>totalElements</a:t>
+            </a:r>
+            <a:r>
+              <a:rPr lang="en-US" dirty="0"/>
+              <a:t>": 50,</a:t>
+            </a:r>
+          </a:p>
+          <a:p>
+            <a:pPr marL="0" indent="0">
+              <a:buNone/>
+            </a:pPr>
+            <a:r>
+              <a:rPr lang="en-US" dirty="0"/>
+              <a:t>  "size": 10,</a:t>
+            </a:r>
+          </a:p>
+          <a:p>
+            <a:pPr marL="0" indent="0">
+              <a:buNone/>
+            </a:pPr>
+            <a:r>
+              <a:rPr lang="en-US" dirty="0"/>
+              <a:t>  "number": 1,</a:t>
+            </a:r>
+          </a:p>
+          <a:p>
+            <a:pPr marL="0" indent="0">
+              <a:buNone/>
+            </a:pPr>
+            <a:r>
+              <a:rPr lang="en-US" dirty="0"/>
+              <a:t>"content": event[]</a:t>
+            </a:r>
+          </a:p>
+          <a:p>
+            <a:pPr marL="0" indent="0">
+              <a:buNone/>
+            </a:pPr>
+            <a:r>
+              <a:rPr lang="en-US" dirty="0"/>
+              <a:t>  "first": true,</a:t>
+            </a:r>
+          </a:p>
+          <a:p>
+            <a:pPr marL="0" indent="0">
+              <a:buNone/>
+            </a:pPr>
+            <a:r>
+              <a:rPr lang="en-US" dirty="0"/>
+              <a:t>  "last": false,</a:t>
+            </a:r>
+          </a:p>
+          <a:p>
+            <a:pPr marL="0" indent="0">
+              <a:buNone/>
+            </a:pPr>
+            <a:r>
+              <a:rPr lang="en-US" dirty="0"/>
+              <a:t>  "empty": false</a:t>
+            </a:r>
+          </a:p>
+          <a:p>
+            <a:pPr marL="0" indent="0">
+              <a:buNone/>
+            </a:pPr>
+            <a:r>
+              <a:rPr lang="en-US" dirty="0"/>
+              <a:t>}</a:t>
+            </a:r>
+          </a:p>
+          <a:p>
+            <a:endParaRPr lang="en-US" dirty="0"/>
           </a:p>
         </p:txBody>
       </p:sp>
@@ -14154,7 +15712,9 @@
         </p:nvSpPr>
         <p:spPr/>
         <p:txBody>
-          <a:bodyPr/>
+          <a:bodyPr>
+            <a:normAutofit lnSpcReduction="10000"/>
+          </a:bodyPr>
           <a:lstStyle/>
           <a:p>
             <a:pPr marL="0" indent="0">
@@ -14207,7 +15767,9 @@
         </p:nvSpPr>
         <p:spPr/>
         <p:txBody>
-          <a:bodyPr/>
+          <a:bodyPr>
+            <a:normAutofit lnSpcReduction="10000"/>
+          </a:bodyPr>
           <a:lstStyle/>
           <a:p>
             <a:pPr marL="0" indent="0">
@@ -14215,39 +15777,273 @@
             </a:pPr>
             <a:r>
               <a:rPr lang="en-US" dirty="0"/>
-              <a:t>Responses:</a:t>
-            </a:r>
-          </a:p>
-          <a:p>
-            <a:r>
-              <a:rPr lang="en-US" dirty="0"/>
-              <a:t>Response Code: 200</a:t>
-            </a:r>
-          </a:p>
-          <a:p>
-            <a:r>
-              <a:rPr lang="en-US" dirty="0"/>
-              <a:t>Description: OK</a:t>
-            </a:r>
-          </a:p>
-          <a:p>
-            <a:r>
-              <a:rPr lang="en-US" dirty="0"/>
-              <a:t>Content Type: */*</a:t>
-            </a:r>
-          </a:p>
-          <a:p>
-            <a:r>
-              <a:rPr lang="en-US" dirty="0"/>
-              <a:t>Response Schema:</a:t>
-            </a:r>
-          </a:p>
-          <a:p>
-            <a:pPr lvl="1"/>
-            <a:r>
-              <a:rPr lang="en-US" dirty="0"/>
-              <a:t>Type: string</a:t>
-            </a:r>
+              <a:t>Request body: User</a:t>
+            </a:r>
+          </a:p>
+          <a:p>
+            <a:pPr marL="0" indent="0" algn="l" rtl="0" eaLnBrk="1" latinLnBrk="0" hangingPunct="1">
+              <a:spcBef>
+                <a:spcPts val="1000"/>
+              </a:spcBef>
+              <a:buClr>
+                <a:schemeClr val="accent1"/>
+              </a:buClr>
+              <a:buSzPct val="80000"/>
+              <a:buNone/>
+            </a:pPr>
+            <a:r>
+              <a:rPr lang="en-US" sz="1800" kern="1200" dirty="0">
+                <a:solidFill>
+                  <a:srgbClr val="404040"/>
+                </a:solidFill>
+                <a:effectLst/>
+                <a:latin typeface="Trebuchet MS" panose="020B0603020202020204" pitchFamily="34" charset="0"/>
+                <a:ea typeface="+mn-ea"/>
+                <a:cs typeface="+mn-cs"/>
+              </a:rPr>
+              <a:t>user:</a:t>
+            </a:r>
+            <a:endParaRPr lang="en-US" sz="1800" dirty="0">
+              <a:effectLst/>
+            </a:endParaRPr>
+          </a:p>
+          <a:p>
+            <a:pPr marL="0" indent="0" algn="l" rtl="0" eaLnBrk="1" latinLnBrk="0" hangingPunct="1">
+              <a:spcBef>
+                <a:spcPts val="1000"/>
+              </a:spcBef>
+              <a:buNone/>
+            </a:pPr>
+            <a:r>
+              <a:rPr lang="en-US" sz="1800" kern="1200" dirty="0">
+                <a:solidFill>
+                  <a:srgbClr val="404040"/>
+                </a:solidFill>
+                <a:effectLst/>
+                <a:latin typeface="Trebuchet MS" panose="020B0603020202020204" pitchFamily="34" charset="0"/>
+                <a:ea typeface="+mn-ea"/>
+                <a:cs typeface="+mn-cs"/>
+              </a:rPr>
+              <a:t>{ </a:t>
+            </a:r>
+            <a:endParaRPr lang="en-US" dirty="0">
+              <a:effectLst/>
+            </a:endParaRPr>
+          </a:p>
+          <a:p>
+            <a:pPr marL="0" indent="0" algn="l" rtl="0" eaLnBrk="1" latinLnBrk="0" hangingPunct="1">
+              <a:spcBef>
+                <a:spcPts val="1000"/>
+              </a:spcBef>
+              <a:buNone/>
+            </a:pPr>
+            <a:r>
+              <a:rPr lang="en-US" sz="1800" kern="1200" dirty="0">
+                <a:solidFill>
+                  <a:srgbClr val="404040"/>
+                </a:solidFill>
+                <a:effectLst/>
+                <a:latin typeface="Trebuchet MS" panose="020B0603020202020204" pitchFamily="34" charset="0"/>
+                <a:ea typeface="+mn-ea"/>
+                <a:cs typeface="+mn-cs"/>
+              </a:rPr>
+              <a:t>"id": 1,</a:t>
+            </a:r>
+            <a:endParaRPr lang="en-US" dirty="0">
+              <a:effectLst/>
+            </a:endParaRPr>
+          </a:p>
+          <a:p>
+            <a:pPr marL="0" indent="0" algn="l" rtl="0" eaLnBrk="1" latinLnBrk="0" hangingPunct="1">
+              <a:spcBef>
+                <a:spcPts val="1000"/>
+              </a:spcBef>
+              <a:buNone/>
+            </a:pPr>
+            <a:r>
+              <a:rPr lang="en-US" sz="1800" kern="1200" dirty="0">
+                <a:solidFill>
+                  <a:srgbClr val="404040"/>
+                </a:solidFill>
+                <a:effectLst/>
+                <a:latin typeface="Trebuchet MS" panose="020B0603020202020204" pitchFamily="34" charset="0"/>
+                <a:ea typeface="+mn-ea"/>
+                <a:cs typeface="+mn-cs"/>
+              </a:rPr>
+              <a:t>"</a:t>
+            </a:r>
+            <a:r>
+              <a:rPr lang="en-US" sz="1800" kern="1200" dirty="0" err="1">
+                <a:solidFill>
+                  <a:srgbClr val="404040"/>
+                </a:solidFill>
+                <a:effectLst/>
+                <a:latin typeface="Trebuchet MS" panose="020B0603020202020204" pitchFamily="34" charset="0"/>
+                <a:ea typeface="+mn-ea"/>
+                <a:cs typeface="+mn-cs"/>
+              </a:rPr>
+              <a:t>fullName</a:t>
+            </a:r>
+            <a:r>
+              <a:rPr lang="en-US" sz="1800" kern="1200" dirty="0">
+                <a:solidFill>
+                  <a:srgbClr val="404040"/>
+                </a:solidFill>
+                <a:effectLst/>
+                <a:latin typeface="Trebuchet MS" panose="020B0603020202020204" pitchFamily="34" charset="0"/>
+                <a:ea typeface="+mn-ea"/>
+                <a:cs typeface="+mn-cs"/>
+              </a:rPr>
+              <a:t>": "John Doe",</a:t>
+            </a:r>
+            <a:endParaRPr lang="en-US" dirty="0">
+              <a:effectLst/>
+            </a:endParaRPr>
+          </a:p>
+          <a:p>
+            <a:pPr marL="0" indent="0" algn="l" rtl="0" eaLnBrk="1" latinLnBrk="0" hangingPunct="1">
+              <a:spcBef>
+                <a:spcPts val="1000"/>
+              </a:spcBef>
+              <a:buNone/>
+            </a:pPr>
+            <a:r>
+              <a:rPr lang="en-US" sz="1800" kern="1200" dirty="0">
+                <a:solidFill>
+                  <a:srgbClr val="404040"/>
+                </a:solidFill>
+                <a:effectLst/>
+                <a:latin typeface="Trebuchet MS" panose="020B0603020202020204" pitchFamily="34" charset="0"/>
+                <a:ea typeface="+mn-ea"/>
+                <a:cs typeface="+mn-cs"/>
+              </a:rPr>
+              <a:t>"username": "</a:t>
+            </a:r>
+            <a:r>
+              <a:rPr lang="en-US" sz="1800" kern="1200" dirty="0" err="1">
+                <a:solidFill>
+                  <a:srgbClr val="404040"/>
+                </a:solidFill>
+                <a:effectLst/>
+                <a:latin typeface="Trebuchet MS" panose="020B0603020202020204" pitchFamily="34" charset="0"/>
+                <a:ea typeface="+mn-ea"/>
+                <a:cs typeface="+mn-cs"/>
+              </a:rPr>
+              <a:t>johndoe</a:t>
+            </a:r>
+            <a:r>
+              <a:rPr lang="en-US" sz="1800" kern="1200" dirty="0">
+                <a:solidFill>
+                  <a:srgbClr val="404040"/>
+                </a:solidFill>
+                <a:effectLst/>
+                <a:latin typeface="Trebuchet MS" panose="020B0603020202020204" pitchFamily="34" charset="0"/>
+                <a:ea typeface="+mn-ea"/>
+                <a:cs typeface="+mn-cs"/>
+              </a:rPr>
+              <a:t>",</a:t>
+            </a:r>
+            <a:endParaRPr lang="en-US" dirty="0">
+              <a:effectLst/>
+            </a:endParaRPr>
+          </a:p>
+          <a:p>
+            <a:pPr marL="0" indent="0" algn="l" rtl="0" eaLnBrk="1" latinLnBrk="0" hangingPunct="1">
+              <a:spcBef>
+                <a:spcPts val="1000"/>
+              </a:spcBef>
+              <a:buNone/>
+            </a:pPr>
+            <a:r>
+              <a:rPr lang="en-US" sz="1800" kern="1200" dirty="0">
+                <a:solidFill>
+                  <a:srgbClr val="404040"/>
+                </a:solidFill>
+                <a:effectLst/>
+                <a:latin typeface="Trebuchet MS" panose="020B0603020202020204" pitchFamily="34" charset="0"/>
+                <a:ea typeface="+mn-ea"/>
+                <a:cs typeface="+mn-cs"/>
+              </a:rPr>
+              <a:t>"email": "john@example.com",</a:t>
+            </a:r>
+            <a:endParaRPr lang="en-US" dirty="0">
+              <a:effectLst/>
+            </a:endParaRPr>
+          </a:p>
+          <a:p>
+            <a:pPr marL="0" indent="0" algn="l" rtl="0" eaLnBrk="1" latinLnBrk="0" hangingPunct="1">
+              <a:spcBef>
+                <a:spcPts val="1000"/>
+              </a:spcBef>
+              <a:buNone/>
+            </a:pPr>
+            <a:r>
+              <a:rPr lang="en-US" sz="1800" kern="1200" dirty="0">
+                <a:solidFill>
+                  <a:srgbClr val="404040"/>
+                </a:solidFill>
+                <a:effectLst/>
+                <a:latin typeface="Trebuchet MS" panose="020B0603020202020204" pitchFamily="34" charset="0"/>
+                <a:ea typeface="+mn-ea"/>
+                <a:cs typeface="+mn-cs"/>
+              </a:rPr>
+              <a:t>"gender": "MALE",</a:t>
+            </a:r>
+            <a:endParaRPr lang="en-US" dirty="0">
+              <a:effectLst/>
+            </a:endParaRPr>
+          </a:p>
+          <a:p>
+            <a:pPr marL="0" indent="0" algn="l" rtl="0" eaLnBrk="1" latinLnBrk="0" hangingPunct="1">
+              <a:spcBef>
+                <a:spcPts val="1000"/>
+              </a:spcBef>
+              <a:buNone/>
+            </a:pPr>
+            <a:r>
+              <a:rPr lang="en-US" sz="1800" kern="1200" dirty="0">
+                <a:solidFill>
+                  <a:srgbClr val="404040"/>
+                </a:solidFill>
+                <a:effectLst/>
+                <a:latin typeface="Trebuchet MS" panose="020B0603020202020204" pitchFamily="34" charset="0"/>
+                <a:ea typeface="+mn-ea"/>
+                <a:cs typeface="+mn-cs"/>
+              </a:rPr>
+              <a:t>"dob": "1990-05-15“</a:t>
+            </a:r>
+            <a:endParaRPr lang="en-US" dirty="0">
+              <a:effectLst/>
+            </a:endParaRPr>
+          </a:p>
+          <a:p>
+            <a:pPr marL="0" indent="0" algn="l" rtl="0" eaLnBrk="1" latinLnBrk="0" hangingPunct="1">
+              <a:spcBef>
+                <a:spcPts val="1000"/>
+              </a:spcBef>
+              <a:buNone/>
+            </a:pPr>
+            <a:r>
+              <a:rPr lang="en-US" sz="1800" kern="1200" dirty="0">
+                <a:solidFill>
+                  <a:srgbClr val="404040"/>
+                </a:solidFill>
+                <a:effectLst/>
+                <a:latin typeface="Trebuchet MS" panose="020B0603020202020204" pitchFamily="34" charset="0"/>
+                <a:ea typeface="+mn-ea"/>
+                <a:cs typeface="+mn-cs"/>
+              </a:rPr>
+              <a:t>}</a:t>
+            </a:r>
+            <a:endParaRPr lang="en-US" dirty="0">
+              <a:effectLst/>
+            </a:endParaRPr>
+          </a:p>
+          <a:p>
+            <a:pPr marL="0" indent="0">
+              <a:buNone/>
+            </a:pPr>
+            <a:endParaRPr lang="en-US" dirty="0"/>
           </a:p>
         </p:txBody>
       </p:sp>
@@ -15516,7 +17312,9 @@
         </p:nvSpPr>
         <p:spPr/>
         <p:txBody>
-          <a:bodyPr/>
+          <a:bodyPr>
+            <a:normAutofit/>
+          </a:bodyPr>
           <a:lstStyle/>
           <a:p>
             <a:pPr marL="0" indent="0">
@@ -15566,7 +17364,9 @@
         </p:nvSpPr>
         <p:spPr/>
         <p:txBody>
-          <a:bodyPr/>
+          <a:bodyPr>
+            <a:normAutofit/>
+          </a:bodyPr>
           <a:lstStyle/>
           <a:p>
             <a:pPr marL="0" indent="0">
@@ -15574,39 +17374,153 @@
             </a:pPr>
             <a:r>
               <a:rPr lang="en-US" dirty="0"/>
-              <a:t>Responses:</a:t>
-            </a:r>
-          </a:p>
-          <a:p>
-            <a:r>
-              <a:rPr lang="en-US" dirty="0"/>
-              <a:t>Response Code: 200</a:t>
-            </a:r>
-          </a:p>
-          <a:p>
-            <a:r>
-              <a:rPr lang="en-US" dirty="0"/>
-              <a:t>Description: OK</a:t>
-            </a:r>
-          </a:p>
-          <a:p>
-            <a:r>
-              <a:rPr lang="en-US" dirty="0"/>
-              <a:t>Content Type: */*</a:t>
-            </a:r>
-          </a:p>
-          <a:p>
-            <a:r>
-              <a:rPr lang="en-US" dirty="0"/>
-              <a:t>Response Schema:</a:t>
-            </a:r>
-          </a:p>
-          <a:p>
-            <a:pPr lvl="1"/>
-            <a:r>
-              <a:rPr lang="en-US" dirty="0"/>
-              <a:t>Type: string</a:t>
-            </a:r>
+              <a:t>Request Body</a:t>
+            </a:r>
+          </a:p>
+          <a:p>
+            <a:pPr marL="0" indent="0" algn="l" rtl="0" eaLnBrk="1" latinLnBrk="0" hangingPunct="1">
+              <a:spcBef>
+                <a:spcPts val="1000"/>
+              </a:spcBef>
+              <a:buNone/>
+            </a:pPr>
+            <a:r>
+              <a:rPr lang="en-US" sz="1800" kern="1200" dirty="0">
+                <a:solidFill>
+                  <a:srgbClr val="404040"/>
+                </a:solidFill>
+                <a:effectLst/>
+                <a:latin typeface="Trebuchet MS" panose="020B0603020202020204" pitchFamily="34" charset="0"/>
+                <a:ea typeface="+mn-ea"/>
+                <a:cs typeface="+mn-cs"/>
+              </a:rPr>
+              <a:t>{ </a:t>
+            </a:r>
+            <a:endParaRPr lang="en-US" dirty="0">
+              <a:effectLst/>
+            </a:endParaRPr>
+          </a:p>
+          <a:p>
+            <a:pPr marL="0" indent="0" algn="l" rtl="0" eaLnBrk="1" latinLnBrk="0" hangingPunct="1">
+              <a:spcBef>
+                <a:spcPts val="1000"/>
+              </a:spcBef>
+              <a:buNone/>
+            </a:pPr>
+            <a:r>
+              <a:rPr lang="en-US" sz="1800" kern="1200" dirty="0">
+                <a:solidFill>
+                  <a:srgbClr val="404040"/>
+                </a:solidFill>
+                <a:effectLst/>
+                <a:latin typeface="Trebuchet MS" panose="020B0603020202020204" pitchFamily="34" charset="0"/>
+                <a:ea typeface="+mn-ea"/>
+                <a:cs typeface="+mn-cs"/>
+              </a:rPr>
+              <a:t>"username": "</a:t>
+            </a:r>
+            <a:r>
+              <a:rPr lang="en-US" sz="1800" kern="1200" dirty="0" err="1">
+                <a:solidFill>
+                  <a:srgbClr val="404040"/>
+                </a:solidFill>
+                <a:effectLst/>
+                <a:latin typeface="Trebuchet MS" panose="020B0603020202020204" pitchFamily="34" charset="0"/>
+                <a:ea typeface="+mn-ea"/>
+                <a:cs typeface="+mn-cs"/>
+              </a:rPr>
+              <a:t>johndoe</a:t>
+            </a:r>
+            <a:r>
+              <a:rPr lang="en-US" sz="1800" kern="1200" dirty="0">
+                <a:solidFill>
+                  <a:srgbClr val="404040"/>
+                </a:solidFill>
+                <a:effectLst/>
+                <a:latin typeface="Trebuchet MS" panose="020B0603020202020204" pitchFamily="34" charset="0"/>
+                <a:ea typeface="+mn-ea"/>
+                <a:cs typeface="+mn-cs"/>
+              </a:rPr>
+              <a:t>",</a:t>
+            </a:r>
+            <a:endParaRPr lang="en-US" dirty="0">
+              <a:effectLst/>
+            </a:endParaRPr>
+          </a:p>
+          <a:p>
+            <a:pPr marL="0" indent="0" algn="l" rtl="0" eaLnBrk="1" latinLnBrk="0" hangingPunct="1">
+              <a:spcBef>
+                <a:spcPts val="1000"/>
+              </a:spcBef>
+              <a:buNone/>
+            </a:pPr>
+            <a:r>
+              <a:rPr lang="en-US" sz="1800" kern="1200" dirty="0">
+                <a:solidFill>
+                  <a:srgbClr val="404040"/>
+                </a:solidFill>
+                <a:effectLst/>
+                <a:latin typeface="Trebuchet MS" panose="020B0603020202020204" pitchFamily="34" charset="0"/>
+                <a:ea typeface="+mn-ea"/>
+                <a:cs typeface="+mn-cs"/>
+              </a:rPr>
+              <a:t>"email": "john@example.com",</a:t>
+            </a:r>
+            <a:endParaRPr lang="en-US" dirty="0">
+              <a:effectLst/>
+            </a:endParaRPr>
+          </a:p>
+          <a:p>
+            <a:pPr marL="0" indent="0" algn="l" rtl="0" eaLnBrk="1" latinLnBrk="0" hangingPunct="1">
+              <a:spcBef>
+                <a:spcPts val="1000"/>
+              </a:spcBef>
+              <a:buNone/>
+            </a:pPr>
+            <a:r>
+              <a:rPr lang="en-US" sz="1800" kern="1200" dirty="0">
+                <a:solidFill>
+                  <a:srgbClr val="404040"/>
+                </a:solidFill>
+                <a:effectLst/>
+                <a:latin typeface="Trebuchet MS" panose="020B0603020202020204" pitchFamily="34" charset="0"/>
+                <a:ea typeface="+mn-ea"/>
+                <a:cs typeface="+mn-cs"/>
+              </a:rPr>
+              <a:t>“password” : “12345678”</a:t>
+            </a:r>
+            <a:endParaRPr lang="en-US" dirty="0">
+              <a:effectLst/>
+            </a:endParaRPr>
+          </a:p>
+          <a:p>
+            <a:pPr marL="0" indent="0" algn="l" rtl="0" eaLnBrk="1" latinLnBrk="0" hangingPunct="1">
+              <a:spcBef>
+                <a:spcPts val="1000"/>
+              </a:spcBef>
+              <a:buNone/>
+            </a:pPr>
+            <a:r>
+              <a:rPr lang="en-US" sz="1800" kern="1200" dirty="0">
+                <a:solidFill>
+                  <a:srgbClr val="404040"/>
+                </a:solidFill>
+                <a:effectLst/>
+                <a:latin typeface="Trebuchet MS" panose="020B0603020202020204" pitchFamily="34" charset="0"/>
+                <a:ea typeface="+mn-ea"/>
+                <a:cs typeface="+mn-cs"/>
+              </a:rPr>
+              <a:t>}</a:t>
+            </a:r>
+            <a:endParaRPr lang="en-US" dirty="0">
+              <a:effectLst/>
+            </a:endParaRPr>
+          </a:p>
+          <a:p>
+            <a:pPr marL="0" indent="0">
+              <a:buNone/>
+            </a:pPr>
+            <a:endParaRPr lang="en-US" dirty="0"/>
           </a:p>
         </p:txBody>
       </p:sp>
@@ -16753,7 +18667,9 @@
         </p:nvSpPr>
         <p:spPr/>
         <p:txBody>
-          <a:bodyPr/>
+          <a:bodyPr>
+            <a:normAutofit lnSpcReduction="10000"/>
+          </a:bodyPr>
           <a:lstStyle/>
           <a:p>
             <a:pPr marL="0" indent="0">
@@ -16807,7 +18723,9 @@
         </p:nvSpPr>
         <p:spPr/>
         <p:txBody>
-          <a:bodyPr/>
+          <a:bodyPr>
+            <a:normAutofit lnSpcReduction="10000"/>
+          </a:bodyPr>
           <a:lstStyle/>
           <a:p>
             <a:pPr marL="0" indent="0">
@@ -16815,39 +18733,273 @@
             </a:pPr>
             <a:r>
               <a:rPr lang="en-US" dirty="0"/>
-              <a:t>Responses:</a:t>
-            </a:r>
-          </a:p>
-          <a:p>
-            <a:r>
-              <a:rPr lang="en-US" dirty="0"/>
-              <a:t>Response Code: 200</a:t>
-            </a:r>
-          </a:p>
-          <a:p>
-            <a:r>
-              <a:rPr lang="en-US" dirty="0"/>
-              <a:t>Description: OK</a:t>
-            </a:r>
-          </a:p>
-          <a:p>
-            <a:r>
-              <a:rPr lang="en-US" dirty="0"/>
-              <a:t>Content Type: */*</a:t>
-            </a:r>
-          </a:p>
-          <a:p>
-            <a:r>
-              <a:rPr lang="en-US" dirty="0"/>
-              <a:t>Response Schema:</a:t>
-            </a:r>
-          </a:p>
-          <a:p>
-            <a:pPr lvl="1"/>
-            <a:r>
-              <a:rPr lang="en-US" dirty="0"/>
-              <a:t>Type: string</a:t>
-            </a:r>
+              <a:t>Request body:</a:t>
+            </a:r>
+          </a:p>
+          <a:p>
+            <a:pPr marL="0" indent="0" algn="l" rtl="0" eaLnBrk="1" latinLnBrk="0" hangingPunct="1">
+              <a:spcBef>
+                <a:spcPts val="1000"/>
+              </a:spcBef>
+              <a:buClr>
+                <a:schemeClr val="accent1"/>
+              </a:buClr>
+              <a:buSzPct val="80000"/>
+              <a:buNone/>
+            </a:pPr>
+            <a:r>
+              <a:rPr lang="en-US" sz="1800" kern="1200" dirty="0">
+                <a:solidFill>
+                  <a:srgbClr val="404040"/>
+                </a:solidFill>
+                <a:effectLst/>
+                <a:latin typeface="Trebuchet MS" panose="020B0603020202020204" pitchFamily="34" charset="0"/>
+                <a:ea typeface="+mn-ea"/>
+                <a:cs typeface="+mn-cs"/>
+              </a:rPr>
+              <a:t>user:</a:t>
+            </a:r>
+            <a:endParaRPr lang="en-US" sz="1800" dirty="0">
+              <a:effectLst/>
+            </a:endParaRPr>
+          </a:p>
+          <a:p>
+            <a:pPr marL="0" indent="0" algn="l" rtl="0" eaLnBrk="1" latinLnBrk="0" hangingPunct="1">
+              <a:spcBef>
+                <a:spcPts val="1000"/>
+              </a:spcBef>
+              <a:buNone/>
+            </a:pPr>
+            <a:r>
+              <a:rPr lang="en-US" sz="1800" kern="1200" dirty="0">
+                <a:solidFill>
+                  <a:srgbClr val="404040"/>
+                </a:solidFill>
+                <a:effectLst/>
+                <a:latin typeface="Trebuchet MS" panose="020B0603020202020204" pitchFamily="34" charset="0"/>
+                <a:ea typeface="+mn-ea"/>
+                <a:cs typeface="+mn-cs"/>
+              </a:rPr>
+              <a:t>{ </a:t>
+            </a:r>
+            <a:endParaRPr lang="en-US" dirty="0">
+              <a:effectLst/>
+            </a:endParaRPr>
+          </a:p>
+          <a:p>
+            <a:pPr marL="0" indent="0" algn="l" rtl="0" eaLnBrk="1" latinLnBrk="0" hangingPunct="1">
+              <a:spcBef>
+                <a:spcPts val="1000"/>
+              </a:spcBef>
+              <a:buNone/>
+            </a:pPr>
+            <a:r>
+              <a:rPr lang="en-US" sz="1800" kern="1200" dirty="0">
+                <a:solidFill>
+                  <a:srgbClr val="404040"/>
+                </a:solidFill>
+                <a:effectLst/>
+                <a:latin typeface="Trebuchet MS" panose="020B0603020202020204" pitchFamily="34" charset="0"/>
+                <a:ea typeface="+mn-ea"/>
+                <a:cs typeface="+mn-cs"/>
+              </a:rPr>
+              <a:t>"id": 1,</a:t>
+            </a:r>
+            <a:endParaRPr lang="en-US" dirty="0">
+              <a:effectLst/>
+            </a:endParaRPr>
+          </a:p>
+          <a:p>
+            <a:pPr marL="0" indent="0" algn="l" rtl="0" eaLnBrk="1" latinLnBrk="0" hangingPunct="1">
+              <a:spcBef>
+                <a:spcPts val="1000"/>
+              </a:spcBef>
+              <a:buNone/>
+            </a:pPr>
+            <a:r>
+              <a:rPr lang="en-US" sz="1800" kern="1200" dirty="0">
+                <a:solidFill>
+                  <a:srgbClr val="404040"/>
+                </a:solidFill>
+                <a:effectLst/>
+                <a:latin typeface="Trebuchet MS" panose="020B0603020202020204" pitchFamily="34" charset="0"/>
+                <a:ea typeface="+mn-ea"/>
+                <a:cs typeface="+mn-cs"/>
+              </a:rPr>
+              <a:t>"</a:t>
+            </a:r>
+            <a:r>
+              <a:rPr lang="en-US" sz="1800" kern="1200" dirty="0" err="1">
+                <a:solidFill>
+                  <a:srgbClr val="404040"/>
+                </a:solidFill>
+                <a:effectLst/>
+                <a:latin typeface="Trebuchet MS" panose="020B0603020202020204" pitchFamily="34" charset="0"/>
+                <a:ea typeface="+mn-ea"/>
+                <a:cs typeface="+mn-cs"/>
+              </a:rPr>
+              <a:t>fullName</a:t>
+            </a:r>
+            <a:r>
+              <a:rPr lang="en-US" sz="1800" kern="1200" dirty="0">
+                <a:solidFill>
+                  <a:srgbClr val="404040"/>
+                </a:solidFill>
+                <a:effectLst/>
+                <a:latin typeface="Trebuchet MS" panose="020B0603020202020204" pitchFamily="34" charset="0"/>
+                <a:ea typeface="+mn-ea"/>
+                <a:cs typeface="+mn-cs"/>
+              </a:rPr>
+              <a:t>": "John Doe",</a:t>
+            </a:r>
+            <a:endParaRPr lang="en-US" dirty="0">
+              <a:effectLst/>
+            </a:endParaRPr>
+          </a:p>
+          <a:p>
+            <a:pPr marL="0" indent="0" algn="l" rtl="0" eaLnBrk="1" latinLnBrk="0" hangingPunct="1">
+              <a:spcBef>
+                <a:spcPts val="1000"/>
+              </a:spcBef>
+              <a:buNone/>
+            </a:pPr>
+            <a:r>
+              <a:rPr lang="en-US" sz="1800" kern="1200" dirty="0">
+                <a:solidFill>
+                  <a:srgbClr val="404040"/>
+                </a:solidFill>
+                <a:effectLst/>
+                <a:latin typeface="Trebuchet MS" panose="020B0603020202020204" pitchFamily="34" charset="0"/>
+                <a:ea typeface="+mn-ea"/>
+                <a:cs typeface="+mn-cs"/>
+              </a:rPr>
+              <a:t>"username": "</a:t>
+            </a:r>
+            <a:r>
+              <a:rPr lang="en-US" sz="1800" kern="1200" dirty="0" err="1">
+                <a:solidFill>
+                  <a:srgbClr val="404040"/>
+                </a:solidFill>
+                <a:effectLst/>
+                <a:latin typeface="Trebuchet MS" panose="020B0603020202020204" pitchFamily="34" charset="0"/>
+                <a:ea typeface="+mn-ea"/>
+                <a:cs typeface="+mn-cs"/>
+              </a:rPr>
+              <a:t>johndoe</a:t>
+            </a:r>
+            <a:r>
+              <a:rPr lang="en-US" sz="1800" kern="1200" dirty="0">
+                <a:solidFill>
+                  <a:srgbClr val="404040"/>
+                </a:solidFill>
+                <a:effectLst/>
+                <a:latin typeface="Trebuchet MS" panose="020B0603020202020204" pitchFamily="34" charset="0"/>
+                <a:ea typeface="+mn-ea"/>
+                <a:cs typeface="+mn-cs"/>
+              </a:rPr>
+              <a:t>",</a:t>
+            </a:r>
+            <a:endParaRPr lang="en-US" dirty="0">
+              <a:effectLst/>
+            </a:endParaRPr>
+          </a:p>
+          <a:p>
+            <a:pPr marL="0" indent="0" algn="l" rtl="0" eaLnBrk="1" latinLnBrk="0" hangingPunct="1">
+              <a:spcBef>
+                <a:spcPts val="1000"/>
+              </a:spcBef>
+              <a:buNone/>
+            </a:pPr>
+            <a:r>
+              <a:rPr lang="en-US" sz="1800" kern="1200" dirty="0">
+                <a:solidFill>
+                  <a:srgbClr val="404040"/>
+                </a:solidFill>
+                <a:effectLst/>
+                <a:latin typeface="Trebuchet MS" panose="020B0603020202020204" pitchFamily="34" charset="0"/>
+                <a:ea typeface="+mn-ea"/>
+                <a:cs typeface="+mn-cs"/>
+              </a:rPr>
+              <a:t>"email": "john@example.com",</a:t>
+            </a:r>
+            <a:endParaRPr lang="en-US" dirty="0">
+              <a:effectLst/>
+            </a:endParaRPr>
+          </a:p>
+          <a:p>
+            <a:pPr marL="0" indent="0" algn="l" rtl="0" eaLnBrk="1" latinLnBrk="0" hangingPunct="1">
+              <a:spcBef>
+                <a:spcPts val="1000"/>
+              </a:spcBef>
+              <a:buNone/>
+            </a:pPr>
+            <a:r>
+              <a:rPr lang="en-US" sz="1800" kern="1200" dirty="0">
+                <a:solidFill>
+                  <a:srgbClr val="404040"/>
+                </a:solidFill>
+                <a:effectLst/>
+                <a:latin typeface="Trebuchet MS" panose="020B0603020202020204" pitchFamily="34" charset="0"/>
+                <a:ea typeface="+mn-ea"/>
+                <a:cs typeface="+mn-cs"/>
+              </a:rPr>
+              <a:t>"gender": "MALE",</a:t>
+            </a:r>
+            <a:endParaRPr lang="en-US" dirty="0">
+              <a:effectLst/>
+            </a:endParaRPr>
+          </a:p>
+          <a:p>
+            <a:pPr marL="0" indent="0" algn="l" rtl="0" eaLnBrk="1" latinLnBrk="0" hangingPunct="1">
+              <a:spcBef>
+                <a:spcPts val="1000"/>
+              </a:spcBef>
+              <a:buNone/>
+            </a:pPr>
+            <a:r>
+              <a:rPr lang="en-US" sz="1800" kern="1200" dirty="0">
+                <a:solidFill>
+                  <a:srgbClr val="404040"/>
+                </a:solidFill>
+                <a:effectLst/>
+                <a:latin typeface="Trebuchet MS" panose="020B0603020202020204" pitchFamily="34" charset="0"/>
+                <a:ea typeface="+mn-ea"/>
+                <a:cs typeface="+mn-cs"/>
+              </a:rPr>
+              <a:t>"dob": "1990-05-15“</a:t>
+            </a:r>
+            <a:endParaRPr lang="en-US" dirty="0">
+              <a:effectLst/>
+            </a:endParaRPr>
+          </a:p>
+          <a:p>
+            <a:pPr marL="0" indent="0" algn="l" rtl="0" eaLnBrk="1" latinLnBrk="0" hangingPunct="1">
+              <a:spcBef>
+                <a:spcPts val="1000"/>
+              </a:spcBef>
+              <a:buNone/>
+            </a:pPr>
+            <a:r>
+              <a:rPr lang="en-US" sz="1800" kern="1200" dirty="0">
+                <a:solidFill>
+                  <a:srgbClr val="404040"/>
+                </a:solidFill>
+                <a:effectLst/>
+                <a:latin typeface="Trebuchet MS" panose="020B0603020202020204" pitchFamily="34" charset="0"/>
+                <a:ea typeface="+mn-ea"/>
+                <a:cs typeface="+mn-cs"/>
+              </a:rPr>
+              <a:t>}</a:t>
+            </a:r>
+            <a:endParaRPr lang="en-US" dirty="0">
+              <a:effectLst/>
+            </a:endParaRPr>
+          </a:p>
+          <a:p>
+            <a:pPr marL="0" indent="0">
+              <a:buNone/>
+            </a:pPr>
+            <a:endParaRPr lang="en-US" dirty="0"/>
           </a:p>
         </p:txBody>
       </p:sp>
